--- a/energy_saving_RL_project.pptx
+++ b/energy_saving_RL_project.pptx
@@ -3518,7 +3518,7 @@
                   <a:srgbClr val="666666"/>
                 </a:solidFill>
               </a:rPr>
-              <a:t>Power over time, # gNBs on, and which cell sleeps when. Idle cells sleep; busy cells stay on.</a:t>
+              <a:t>One shaped-RL run (seed 999, ~43% saved). RL's 4-seed AVERAGE is ~40% energy saved; per-seed it varies 25-46%. Idle cells sleep; busy cells stay on.</a:t>
             </a:r>
           </a:p>
         </p:txBody>
@@ -3569,7 +3569,7 @@
                   <a:srgbClr val="222222"/>
                 </a:solidFill>
               </a:rPr>
-              <a:t>Bottom line &amp; recommended next step</a:t>
+              <a:t>Bottom line &amp; next steps</a:t>
             </a:r>
           </a:p>
         </p:txBody>
@@ -3665,7 +3665,7 @@
                   <a:srgbClr val="666666"/>
                 </a:solidFill>
               </a:rPr>
-              <a:t>– a rigorous quantification of the energy-vs-QoS tradeoff, and a tunable energy-saving controller.</a:t>
+              <a:t>– a rigorous energy-vs-QoS tradeoff, and a tunable energy-saving controller.</a:t>
             </a:r>
           </a:p>
           <a:p>
@@ -3695,7 +3695,7 @@
                   <a:srgbClr val="666666"/>
                 </a:solidFill>
               </a:rPr>
-              <a:t>– (better on energy and dropped-calls; slightly lower throughput) - a favourable, honest tradeoff.</a:t>
+              <a:t>– - better on energy AND dropped-calls, slightly lower throughput: a favourable, honest tradeoff.</a:t>
             </a:r>
           </a:p>
           <a:p>
@@ -3710,7 +3710,22 @@
                   <a:srgbClr val="222222"/>
                 </a:solidFill>
               </a:rPr>
-              <a:t>• It does not STRICTLY beat a strong heuristic on all three axes - and we explain precisely why.</a:t>
+              <a:t>• It does not STRICTLY beat a strong heuristic on all three axes - the real blocker is the slow</a:t>
+            </a:r>
+          </a:p>
+          <a:p>
+            <a:pPr lvl="1">
+              <a:spcAft>
+                <a:spcPts val="700"/>
+              </a:spcAft>
+            </a:pPr>
+            <a:r>
+              <a:rPr sz="1500">
+                <a:solidFill>
+                  <a:srgbClr val="666666"/>
+                </a:solidFill>
+              </a:rPr>
+              <a:t>– simulator's tiny sample budget (~640 RL trial-steps), too little to out-tune a good heuristic.</a:t>
             </a:r>
           </a:p>
           <a:p>
@@ -3725,7 +3740,7 @@
                   <a:srgbClr val="222222"/>
                 </a:solidFill>
               </a:rPr>
-              <a:t>• Next step for a strict win: a spatial-HOTSPOT scenario (some cells persistently idle), where a smart</a:t>
+              <a:t>• Next steps: (1) sample-efficient RL - offline RL on logged data, or a fast learned surrogate of the</a:t>
             </a:r>
           </a:p>
           <a:p>
@@ -3740,7 +3755,7 @@
                   <a:srgbClr val="666666"/>
                 </a:solidFill>
               </a:rPr>
-              <a:t>– controller can sleep truly-unused cells for free - more realistic and genuinely winnable.</a:t>
+              <a:t>– sim - to escape that budget;  (2) richer / larger network scenarios;  (3) ship the tunable controller.</a:t>
             </a:r>
           </a:p>
         </p:txBody>

--- a/energy_saving_RL_project.pptx
+++ b/energy_saving_RL_project.pptx
@@ -5307,7 +5307,7 @@
                   <a:srgbClr val="666666"/>
                 </a:solidFill>
               </a:rPr>
-              <a:t>Shaped-reward RL vs balanced heuristic (4-seed avg): +6 pts energy AND ~26% fewer dropped calls, ~9% less throughput.</a:t>
+              <a:t>Shaped-reward RL vs balanced heuristic (4-seed avg): +6 pts energy AND ~25% fewer dropped calls, ~9% less throughput.</a:t>
             </a:r>
           </a:p>
         </p:txBody>

--- a/energy_saving_RL_project.pptx
+++ b/energy_saving_RL_project.pptx
@@ -3102,14 +3102,249 @@
       <p:grpSpPr/>
       <p:sp>
         <p:nvSpPr>
-          <p:cNvPr id="2" name="TextBox 1"/>
+          <p:cNvPr id="2" name="Rectangle 1"/>
+          <p:cNvSpPr/>
+          <p:nvPr/>
+        </p:nvSpPr>
+        <p:spPr>
+          <a:xfrm>
+            <a:off x="0" y="0"/>
+            <a:ext cx="12191695" cy="6858000"/>
+          </a:xfrm>
+          <a:prstGeom prst="rect">
+            <a:avLst/>
+          </a:prstGeom>
+          <a:gradFill>
+            <a:gsLst>
+              <a:gs pos="0">
+                <a:srgbClr val="12203A"/>
+              </a:gs>
+              <a:gs pos="100000">
+                <a:srgbClr val="214170"/>
+              </a:gs>
+            </a:gsLst>
+            <a:lin ang="3000000" scaled="1"/>
+          </a:gradFill>
+          <a:ln>
+            <a:noFill/>
+          </a:ln>
+        </p:spPr>
+        <p:style>
+          <a:lnRef idx="1">
+            <a:schemeClr val="accent1"/>
+          </a:lnRef>
+          <a:fillRef idx="3">
+            <a:schemeClr val="accent1"/>
+          </a:fillRef>
+          <a:effectRef idx="2">
+            <a:schemeClr val="accent1"/>
+          </a:effectRef>
+          <a:fontRef idx="minor">
+            <a:schemeClr val="lt1"/>
+          </a:fontRef>
+        </p:style>
+        <p:txBody>
+          <a:bodyPr rtlCol="0" anchor="ctr"/>
+          <a:lstStyle/>
+          <a:p>
+            <a:pPr algn="ctr"/>
+          </a:p>
+        </p:txBody>
+      </p:sp>
+      <p:sp>
+        <p:nvSpPr>
+          <p:cNvPr id="3" name="Oval 2"/>
+          <p:cNvSpPr/>
+          <p:nvPr/>
+        </p:nvSpPr>
+        <p:spPr>
+          <a:xfrm>
+            <a:off x="8869680" y="-1463040"/>
+            <a:ext cx="5120640" cy="5120640"/>
+          </a:xfrm>
+          <a:prstGeom prst="ellipse">
+            <a:avLst/>
+          </a:prstGeom>
+          <a:solidFill>
+            <a:srgbClr val="FFFFFF">
+              <a:alpha val="8000"/>
+            </a:srgbClr>
+          </a:solidFill>
+          <a:ln>
+            <a:noFill/>
+          </a:ln>
+        </p:spPr>
+        <p:style>
+          <a:lnRef idx="1">
+            <a:schemeClr val="accent1"/>
+          </a:lnRef>
+          <a:fillRef idx="3">
+            <a:schemeClr val="accent1"/>
+          </a:fillRef>
+          <a:effectRef idx="2">
+            <a:schemeClr val="accent1"/>
+          </a:effectRef>
+          <a:fontRef idx="minor">
+            <a:schemeClr val="lt1"/>
+          </a:fontRef>
+        </p:style>
+        <p:txBody>
+          <a:bodyPr rtlCol="0" anchor="ctr"/>
+          <a:lstStyle/>
+          <a:p>
+            <a:pPr algn="ctr"/>
+          </a:p>
+        </p:txBody>
+      </p:sp>
+      <p:sp>
+        <p:nvSpPr>
+          <p:cNvPr id="4" name="Oval 3"/>
+          <p:cNvSpPr/>
+          <p:nvPr/>
+        </p:nvSpPr>
+        <p:spPr>
+          <a:xfrm>
+            <a:off x="10058400" y="4206240"/>
+            <a:ext cx="3474720" cy="3474720"/>
+          </a:xfrm>
+          <a:prstGeom prst="ellipse">
+            <a:avLst/>
+          </a:prstGeom>
+          <a:solidFill>
+            <a:srgbClr val="FFFFFF">
+              <a:alpha val="6000"/>
+            </a:srgbClr>
+          </a:solidFill>
+          <a:ln>
+            <a:noFill/>
+          </a:ln>
+        </p:spPr>
+        <p:style>
+          <a:lnRef idx="1">
+            <a:schemeClr val="accent1"/>
+          </a:lnRef>
+          <a:fillRef idx="3">
+            <a:schemeClr val="accent1"/>
+          </a:fillRef>
+          <a:effectRef idx="2">
+            <a:schemeClr val="accent1"/>
+          </a:effectRef>
+          <a:fontRef idx="minor">
+            <a:schemeClr val="lt1"/>
+          </a:fontRef>
+        </p:style>
+        <p:txBody>
+          <a:bodyPr rtlCol="0" anchor="ctr"/>
+          <a:lstStyle/>
+          <a:p>
+            <a:pPr algn="ctr"/>
+          </a:p>
+        </p:txBody>
+      </p:sp>
+      <p:sp>
+        <p:nvSpPr>
+          <p:cNvPr id="5" name="Rectangle 4"/>
+          <p:cNvSpPr/>
+          <p:nvPr/>
+        </p:nvSpPr>
+        <p:spPr>
+          <a:xfrm>
+            <a:off x="0" y="6327648"/>
+            <a:ext cx="12191695" cy="530352"/>
+          </a:xfrm>
+          <a:prstGeom prst="rect">
+            <a:avLst/>
+          </a:prstGeom>
+          <a:gradFill>
+            <a:gsLst>
+              <a:gs pos="0">
+                <a:srgbClr val="0072B2"/>
+              </a:gs>
+              <a:gs pos="100000">
+                <a:srgbClr val="009E73"/>
+              </a:gs>
+            </a:gsLst>
+            <a:lin ang="0" scaled="1"/>
+          </a:gradFill>
+          <a:ln>
+            <a:noFill/>
+          </a:ln>
+        </p:spPr>
+        <p:style>
+          <a:lnRef idx="1">
+            <a:schemeClr val="accent1"/>
+          </a:lnRef>
+          <a:fillRef idx="3">
+            <a:schemeClr val="accent1"/>
+          </a:fillRef>
+          <a:effectRef idx="2">
+            <a:schemeClr val="accent1"/>
+          </a:effectRef>
+          <a:fontRef idx="minor">
+            <a:schemeClr val="lt1"/>
+          </a:fontRef>
+        </p:style>
+        <p:txBody>
+          <a:bodyPr rtlCol="0" anchor="ctr"/>
+          <a:lstStyle/>
+          <a:p>
+            <a:pPr algn="ctr"/>
+          </a:p>
+        </p:txBody>
+      </p:sp>
+      <p:sp>
+        <p:nvSpPr>
+          <p:cNvPr id="6" name="Rectangle 5"/>
+          <p:cNvSpPr/>
+          <p:nvPr/>
+        </p:nvSpPr>
+        <p:spPr>
+          <a:xfrm>
+            <a:off x="0" y="6272784"/>
+            <a:ext cx="12191695" cy="54864"/>
+          </a:xfrm>
+          <a:prstGeom prst="rect">
+            <a:avLst/>
+          </a:prstGeom>
+          <a:solidFill>
+            <a:srgbClr val="E69F00"/>
+          </a:solidFill>
+          <a:ln>
+            <a:noFill/>
+          </a:ln>
+        </p:spPr>
+        <p:style>
+          <a:lnRef idx="1">
+            <a:schemeClr val="accent1"/>
+          </a:lnRef>
+          <a:fillRef idx="3">
+            <a:schemeClr val="accent1"/>
+          </a:fillRef>
+          <a:effectRef idx="2">
+            <a:schemeClr val="accent1"/>
+          </a:effectRef>
+          <a:fontRef idx="minor">
+            <a:schemeClr val="lt1"/>
+          </a:fontRef>
+        </p:style>
+        <p:txBody>
+          <a:bodyPr rtlCol="0" anchor="ctr"/>
+          <a:lstStyle/>
+          <a:p>
+            <a:pPr algn="ctr"/>
+          </a:p>
+        </p:txBody>
+      </p:sp>
+      <p:sp>
+        <p:nvSpPr>
+          <p:cNvPr id="7" name="TextBox 6"/>
           <p:cNvSpPr txBox="1"/>
           <p:nvPr/>
         </p:nvSpPr>
         <p:spPr>
           <a:xfrm>
-            <a:off x="731520" y="2194560"/>
-            <a:ext cx="10698480" cy="1828800"/>
+            <a:off x="822960" y="1965960"/>
+            <a:ext cx="10607040" cy="2194560"/>
           </a:xfrm>
           <a:prstGeom prst="rect">
             <a:avLst/>
@@ -3123,32 +3358,240 @@
           <a:lstStyle/>
           <a:p>
             <a:r>
-              <a:rPr sz="4000" b="1">
-                <a:solidFill>
-                  <a:srgbClr val="0072B2"/>
+              <a:rPr sz="4000" b="1" i="0">
+                <a:solidFill>
+                  <a:srgbClr val="FFFFFF"/>
                 </a:solidFill>
               </a:rPr>
               <a:t>Energy Saving in O-RAN with Reinforcement Learning</a:t>
             </a:r>
           </a:p>
           <a:p>
-            <a:r>
-              <a:rPr sz="1800">
-                <a:solidFill>
-                  <a:srgbClr val="222222"/>
+            <a:pPr>
+              <a:spcBef>
+                <a:spcPts val="1000"/>
+              </a:spcBef>
+            </a:pPr>
+            <a:r>
+              <a:rPr sz="1800" b="0" i="0">
+                <a:solidFill>
+                  <a:srgbClr val="C9D6E5"/>
                 </a:solidFill>
               </a:rPr>
               <a:t>A digital-twin study: learning to sleep 5G cells without hurting service quality</a:t>
             </a:r>
           </a:p>
-          <a:p>
-            <a:r>
-              <a:rPr sz="1400" i="1">
-                <a:solidFill>
-                  <a:srgbClr val="666666"/>
-                </a:solidFill>
-              </a:rPr>
-              <a:t>ns-3 mmWave O-RAN  ·  imitation + PPO  ·  energy-vs-QoS tradeoff</a:t>
+        </p:txBody>
+      </p:sp>
+      <p:sp>
+        <p:nvSpPr>
+          <p:cNvPr id="8" name="Rounded Rectangle 7"/>
+          <p:cNvSpPr/>
+          <p:nvPr/>
+        </p:nvSpPr>
+        <p:spPr>
+          <a:xfrm>
+            <a:off x="841248" y="4343400"/>
+            <a:ext cx="2181758" cy="457200"/>
+          </a:xfrm>
+          <a:prstGeom prst="roundRect">
+            <a:avLst>
+              <a:gd name="adj" fmla="val 50000"/>
+            </a:avLst>
+          </a:prstGeom>
+          <a:solidFill>
+            <a:srgbClr val="0072B2"/>
+          </a:solidFill>
+          <a:ln>
+            <a:noFill/>
+          </a:ln>
+          <a:effectLst>
+            <a:outerShdw blurRad="60000" dist="22000" dir="5400000" rotWithShape="0">
+              <a:srgbClr val="000000">
+                <a:alpha val="50000"/>
+              </a:srgbClr>
+            </a:outerShdw>
+          </a:effectLst>
+        </p:spPr>
+        <p:style>
+          <a:lnRef idx="1">
+            <a:schemeClr val="accent1"/>
+          </a:lnRef>
+          <a:fillRef idx="3">
+            <a:schemeClr val="accent1"/>
+          </a:fillRef>
+          <a:effectRef idx="2">
+            <a:schemeClr val="accent1"/>
+          </a:effectRef>
+          <a:fontRef idx="minor">
+            <a:schemeClr val="lt1"/>
+          </a:fontRef>
+        </p:style>
+        <p:txBody>
+          <a:bodyPr rtlCol="0" anchor="ctr" wrap="none"/>
+          <a:lstStyle/>
+          <a:p>
+            <a:pPr algn="ctr"/>
+            <a:r>
+              <a:rPr sz="1200" b="1" i="0">
+                <a:solidFill>
+                  <a:srgbClr val="FFFFFF"/>
+                </a:solidFill>
+              </a:rPr>
+              <a:t>ns-3 mmWave O-RAN</a:t>
+            </a:r>
+          </a:p>
+        </p:txBody>
+      </p:sp>
+      <p:sp>
+        <p:nvSpPr>
+          <p:cNvPr id="9" name="Rounded Rectangle 8"/>
+          <p:cNvSpPr/>
+          <p:nvPr/>
+        </p:nvSpPr>
+        <p:spPr>
+          <a:xfrm>
+            <a:off x="3242462" y="4343400"/>
+            <a:ext cx="1984248" cy="457200"/>
+          </a:xfrm>
+          <a:prstGeom prst="roundRect">
+            <a:avLst>
+              <a:gd name="adj" fmla="val 50000"/>
+            </a:avLst>
+          </a:prstGeom>
+          <a:solidFill>
+            <a:srgbClr val="009E73"/>
+          </a:solidFill>
+          <a:ln>
+            <a:noFill/>
+          </a:ln>
+          <a:effectLst>
+            <a:outerShdw blurRad="60000" dist="22000" dir="5400000" rotWithShape="0">
+              <a:srgbClr val="000000">
+                <a:alpha val="50000"/>
+              </a:srgbClr>
+            </a:outerShdw>
+          </a:effectLst>
+        </p:spPr>
+        <p:style>
+          <a:lnRef idx="1">
+            <a:schemeClr val="accent1"/>
+          </a:lnRef>
+          <a:fillRef idx="3">
+            <a:schemeClr val="accent1"/>
+          </a:fillRef>
+          <a:effectRef idx="2">
+            <a:schemeClr val="accent1"/>
+          </a:effectRef>
+          <a:fontRef idx="minor">
+            <a:schemeClr val="lt1"/>
+          </a:fontRef>
+        </p:style>
+        <p:txBody>
+          <a:bodyPr rtlCol="0" anchor="ctr" wrap="none"/>
+          <a:lstStyle/>
+          <a:p>
+            <a:pPr algn="ctr"/>
+            <a:r>
+              <a:rPr sz="1200" b="1" i="0">
+                <a:solidFill>
+                  <a:srgbClr val="FFFFFF"/>
+                </a:solidFill>
+              </a:rPr>
+              <a:t>imitation + PPO</a:t>
+            </a:r>
+          </a:p>
+        </p:txBody>
+      </p:sp>
+      <p:sp>
+        <p:nvSpPr>
+          <p:cNvPr id="10" name="Rounded Rectangle 9"/>
+          <p:cNvSpPr/>
+          <p:nvPr/>
+        </p:nvSpPr>
+        <p:spPr>
+          <a:xfrm>
+            <a:off x="5446166" y="4343400"/>
+            <a:ext cx="2675534" cy="457200"/>
+          </a:xfrm>
+          <a:prstGeom prst="roundRect">
+            <a:avLst>
+              <a:gd name="adj" fmla="val 50000"/>
+            </a:avLst>
+          </a:prstGeom>
+          <a:solidFill>
+            <a:srgbClr val="E69F00"/>
+          </a:solidFill>
+          <a:ln>
+            <a:noFill/>
+          </a:ln>
+          <a:effectLst>
+            <a:outerShdw blurRad="60000" dist="22000" dir="5400000" rotWithShape="0">
+              <a:srgbClr val="000000">
+                <a:alpha val="50000"/>
+              </a:srgbClr>
+            </a:outerShdw>
+          </a:effectLst>
+        </p:spPr>
+        <p:style>
+          <a:lnRef idx="1">
+            <a:schemeClr val="accent1"/>
+          </a:lnRef>
+          <a:fillRef idx="3">
+            <a:schemeClr val="accent1"/>
+          </a:fillRef>
+          <a:effectRef idx="2">
+            <a:schemeClr val="accent1"/>
+          </a:effectRef>
+          <a:fontRef idx="minor">
+            <a:schemeClr val="lt1"/>
+          </a:fontRef>
+        </p:style>
+        <p:txBody>
+          <a:bodyPr rtlCol="0" anchor="ctr" wrap="none"/>
+          <a:lstStyle/>
+          <a:p>
+            <a:pPr algn="ctr"/>
+            <a:r>
+              <a:rPr sz="1200" b="1" i="0">
+                <a:solidFill>
+                  <a:srgbClr val="FFFFFF"/>
+                </a:solidFill>
+              </a:rPr>
+              <a:t>energy-vs-QoS tradeoff</a:t>
+            </a:r>
+          </a:p>
+        </p:txBody>
+      </p:sp>
+      <p:sp>
+        <p:nvSpPr>
+          <p:cNvPr id="11" name="TextBox 10"/>
+          <p:cNvSpPr txBox="1"/>
+          <p:nvPr/>
+        </p:nvSpPr>
+        <p:spPr>
+          <a:xfrm>
+            <a:off x="822960" y="6364224"/>
+            <a:ext cx="7315200" cy="457200"/>
+          </a:xfrm>
+          <a:prstGeom prst="rect">
+            <a:avLst/>
+          </a:prstGeom>
+          <a:noFill/>
+        </p:spPr>
+        <p:txBody>
+          <a:bodyPr wrap="square">
+            <a:spAutoFit/>
+          </a:bodyPr>
+          <a:lstStyle/>
+          <a:p>
+            <a:r>
+              <a:rPr sz="1100" b="0" i="0">
+                <a:solidFill>
+                  <a:srgbClr val="FFFFFF"/>
+                </a:solidFill>
+              </a:rPr>
+              <a:t>ns-O-RAN digital-twin study  ·  imitation + reinforcement learning</a:t>
             </a:r>
           </a:p>
         </p:txBody>
@@ -3173,54 +3616,29 @@
       <p:grpSpPr/>
       <p:sp>
         <p:nvSpPr>
-          <p:cNvPr id="2" name="TextBox 1"/>
-          <p:cNvSpPr txBox="1"/>
-          <p:nvPr/>
-        </p:nvSpPr>
-        <p:spPr>
-          <a:xfrm>
-            <a:off x="548640" y="320040"/>
-            <a:ext cx="11064240" cy="914400"/>
-          </a:xfrm>
-          <a:prstGeom prst="rect">
-            <a:avLst/>
-          </a:prstGeom>
-          <a:noFill/>
-        </p:spPr>
-        <p:txBody>
-          <a:bodyPr wrap="square">
-            <a:spAutoFit/>
-          </a:bodyPr>
-          <a:lstStyle/>
-          <a:p>
-            <a:r>
-              <a:rPr sz="3000" b="1">
-                <a:solidFill>
-                  <a:srgbClr val="222222"/>
-                </a:solidFill>
-              </a:rPr>
-              <a:t>Operational value — a tunable energy/QoS frontier</a:t>
-            </a:r>
-          </a:p>
-        </p:txBody>
-      </p:sp>
-      <p:sp>
-        <p:nvSpPr>
-          <p:cNvPr id="3" name="Rectangle 2"/>
+          <p:cNvPr id="2" name="Rectangle 1"/>
           <p:cNvSpPr/>
           <p:nvPr/>
         </p:nvSpPr>
         <p:spPr>
           <a:xfrm>
-            <a:off x="566928" y="1170432"/>
-            <a:ext cx="2926080" cy="50800"/>
-          </a:xfrm>
-          <a:prstGeom prst="rect">
-            <a:avLst/>
-          </a:prstGeom>
-          <a:solidFill>
-            <a:srgbClr val="0072B2"/>
-          </a:solidFill>
+            <a:off x="0" y="0"/>
+            <a:ext cx="146304" cy="6858000"/>
+          </a:xfrm>
+          <a:prstGeom prst="rect">
+            <a:avLst/>
+          </a:prstGeom>
+          <a:gradFill>
+            <a:gsLst>
+              <a:gs pos="0">
+                <a:srgbClr val="0072B2"/>
+              </a:gs>
+              <a:gs pos="100000">
+                <a:srgbClr val="009E73"/>
+              </a:gs>
+            </a:gsLst>
+            <a:lin ang="5400000" scaled="1"/>
+          </a:gradFill>
           <a:ln>
             <a:noFill/>
           </a:ln>
@@ -3249,14 +3667,14 @@
       </p:sp>
       <p:sp>
         <p:nvSpPr>
-          <p:cNvPr id="4" name="TextBox 3"/>
+          <p:cNvPr id="3" name="TextBox 2"/>
           <p:cNvSpPr txBox="1"/>
           <p:nvPr/>
         </p:nvSpPr>
         <p:spPr>
           <a:xfrm>
-            <a:off x="566928" y="1280160"/>
-            <a:ext cx="10972800" cy="457200"/>
+            <a:off x="658368" y="329184"/>
+            <a:ext cx="9144000" cy="320040"/>
           </a:xfrm>
           <a:prstGeom prst="rect">
             <a:avLst/>
@@ -3270,19 +3688,300 @@
           <a:lstStyle/>
           <a:p>
             <a:r>
-              <a:rPr sz="1400" i="1">
-                <a:solidFill>
-                  <a:srgbClr val="666666"/>
+              <a:rPr sz="1250" b="1" i="0">
+                <a:solidFill>
+                  <a:srgbClr val="0072B2"/>
+                </a:solidFill>
+              </a:rPr>
+              <a:t>RESULTS</a:t>
+            </a:r>
+          </a:p>
+        </p:txBody>
+      </p:sp>
+      <p:sp>
+        <p:nvSpPr>
+          <p:cNvPr id="4" name="TextBox 3"/>
+          <p:cNvSpPr txBox="1"/>
+          <p:nvPr/>
+        </p:nvSpPr>
+        <p:spPr>
+          <a:xfrm>
+            <a:off x="640080" y="566928"/>
+            <a:ext cx="11155680" cy="822960"/>
+          </a:xfrm>
+          <a:prstGeom prst="rect">
+            <a:avLst/>
+          </a:prstGeom>
+          <a:noFill/>
+        </p:spPr>
+        <p:txBody>
+          <a:bodyPr wrap="square">
+            <a:spAutoFit/>
+          </a:bodyPr>
+          <a:lstStyle/>
+          <a:p>
+            <a:r>
+              <a:rPr sz="2800" b="1" i="0">
+                <a:solidFill>
+                  <a:srgbClr val="1A2233"/>
+                </a:solidFill>
+              </a:rPr>
+              <a:t>Operational value — a tunable energy/QoS frontier</a:t>
+            </a:r>
+          </a:p>
+        </p:txBody>
+      </p:sp>
+      <p:sp>
+        <p:nvSpPr>
+          <p:cNvPr id="5" name="Rectangle 4"/>
+          <p:cNvSpPr/>
+          <p:nvPr/>
+        </p:nvSpPr>
+        <p:spPr>
+          <a:xfrm>
+            <a:off x="658368" y="1335024"/>
+            <a:ext cx="2468880" cy="68580"/>
+          </a:xfrm>
+          <a:prstGeom prst="rect">
+            <a:avLst/>
+          </a:prstGeom>
+          <a:gradFill>
+            <a:gsLst>
+              <a:gs pos="0">
+                <a:srgbClr val="0072B2"/>
+              </a:gs>
+              <a:gs pos="100000">
+                <a:srgbClr val="009E73"/>
+              </a:gs>
+            </a:gsLst>
+            <a:lin ang="0" scaled="1"/>
+          </a:gradFill>
+          <a:ln>
+            <a:noFill/>
+          </a:ln>
+        </p:spPr>
+        <p:style>
+          <a:lnRef idx="1">
+            <a:schemeClr val="accent1"/>
+          </a:lnRef>
+          <a:fillRef idx="3">
+            <a:schemeClr val="accent1"/>
+          </a:fillRef>
+          <a:effectRef idx="2">
+            <a:schemeClr val="accent1"/>
+          </a:effectRef>
+          <a:fontRef idx="minor">
+            <a:schemeClr val="lt1"/>
+          </a:fontRef>
+        </p:style>
+        <p:txBody>
+          <a:bodyPr rtlCol="0" anchor="ctr"/>
+          <a:lstStyle/>
+          <a:p>
+            <a:pPr algn="ctr"/>
+          </a:p>
+        </p:txBody>
+      </p:sp>
+      <p:sp>
+        <p:nvSpPr>
+          <p:cNvPr id="6" name="TextBox 5"/>
+          <p:cNvSpPr txBox="1"/>
+          <p:nvPr/>
+        </p:nvSpPr>
+        <p:spPr>
+          <a:xfrm>
+            <a:off x="658368" y="1426464"/>
+            <a:ext cx="10972800" cy="457200"/>
+          </a:xfrm>
+          <a:prstGeom prst="rect">
+            <a:avLst/>
+          </a:prstGeom>
+          <a:noFill/>
+        </p:spPr>
+        <p:txBody>
+          <a:bodyPr wrap="square">
+            <a:spAutoFit/>
+          </a:bodyPr>
+          <a:lstStyle/>
+          <a:p>
+            <a:r>
+              <a:rPr sz="1400" b="0" i="1">
+                <a:solidFill>
+                  <a:srgbClr val="5B6472"/>
                 </a:solidFill>
               </a:rPr>
               <a:t>One dial lets an operator choose the operating point; the heuristic is a single fixed point</a:t>
             </a:r>
+          </a:p>
+        </p:txBody>
+      </p:sp>
+      <p:sp>
+        <p:nvSpPr>
+          <p:cNvPr id="7" name="Rectangle 6"/>
+          <p:cNvSpPr/>
+          <p:nvPr/>
+        </p:nvSpPr>
+        <p:spPr>
+          <a:xfrm>
+            <a:off x="640080" y="6437376"/>
+            <a:ext cx="10881360" cy="11887"/>
+          </a:xfrm>
+          <a:prstGeom prst="rect">
+            <a:avLst/>
+          </a:prstGeom>
+          <a:solidFill>
+            <a:srgbClr val="DDE4F0"/>
+          </a:solidFill>
+          <a:ln>
+            <a:noFill/>
+          </a:ln>
+        </p:spPr>
+        <p:style>
+          <a:lnRef idx="1">
+            <a:schemeClr val="accent1"/>
+          </a:lnRef>
+          <a:fillRef idx="3">
+            <a:schemeClr val="accent1"/>
+          </a:fillRef>
+          <a:effectRef idx="2">
+            <a:schemeClr val="accent1"/>
+          </a:effectRef>
+          <a:fontRef idx="minor">
+            <a:schemeClr val="lt1"/>
+          </a:fontRef>
+        </p:style>
+        <p:txBody>
+          <a:bodyPr rtlCol="0" anchor="ctr"/>
+          <a:lstStyle/>
+          <a:p>
+            <a:pPr algn="ctr"/>
+          </a:p>
+        </p:txBody>
+      </p:sp>
+      <p:sp>
+        <p:nvSpPr>
+          <p:cNvPr id="8" name="TextBox 7"/>
+          <p:cNvSpPr txBox="1"/>
+          <p:nvPr/>
+        </p:nvSpPr>
+        <p:spPr>
+          <a:xfrm>
+            <a:off x="640080" y="6455664"/>
+            <a:ext cx="7315200" cy="320040"/>
+          </a:xfrm>
+          <a:prstGeom prst="rect">
+            <a:avLst/>
+          </a:prstGeom>
+          <a:noFill/>
+        </p:spPr>
+        <p:txBody>
+          <a:bodyPr wrap="square">
+            <a:spAutoFit/>
+          </a:bodyPr>
+          <a:lstStyle/>
+          <a:p>
+            <a:r>
+              <a:rPr sz="900" b="0" i="0">
+                <a:solidFill>
+                  <a:srgbClr val="5B6472"/>
+                </a:solidFill>
+              </a:rPr>
+              <a:t>Energy-Saving RL  ·  ns-O-RAN digital twin</a:t>
+            </a:r>
+          </a:p>
+        </p:txBody>
+      </p:sp>
+      <p:sp>
+        <p:nvSpPr>
+          <p:cNvPr id="9" name="TextBox 8"/>
+          <p:cNvSpPr txBox="1"/>
+          <p:nvPr/>
+        </p:nvSpPr>
+        <p:spPr>
+          <a:xfrm>
+            <a:off x="9692640" y="6455664"/>
+            <a:ext cx="1828800" cy="320040"/>
+          </a:xfrm>
+          <a:prstGeom prst="rect">
+            <a:avLst/>
+          </a:prstGeom>
+          <a:noFill/>
+        </p:spPr>
+        <p:txBody>
+          <a:bodyPr wrap="square">
+            <a:spAutoFit/>
+          </a:bodyPr>
+          <a:lstStyle/>
+          <a:p>
+            <a:pPr algn="r"/>
+            <a:r>
+              <a:rPr sz="900" b="0" i="0">
+                <a:solidFill>
+                  <a:srgbClr val="5B6472"/>
+                </a:solidFill>
+              </a:rPr>
+              <a:t>10 / 13</a:t>
+            </a:r>
+          </a:p>
+        </p:txBody>
+      </p:sp>
+      <p:sp>
+        <p:nvSpPr>
+          <p:cNvPr id="10" name="Rounded Rectangle 9"/>
+          <p:cNvSpPr/>
+          <p:nvPr/>
+        </p:nvSpPr>
+        <p:spPr>
+          <a:xfrm>
+            <a:off x="3340690" y="1792224"/>
+            <a:ext cx="5510315" cy="4050792"/>
+          </a:xfrm>
+          <a:prstGeom prst="roundRect">
+            <a:avLst>
+              <a:gd name="adj" fmla="val 2000"/>
+            </a:avLst>
+          </a:prstGeom>
+          <a:solidFill>
+            <a:srgbClr val="FFFFFF"/>
+          </a:solidFill>
+          <a:ln w="12700">
+            <a:solidFill>
+              <a:srgbClr val="DDE4F0"/>
+            </a:solidFill>
+          </a:ln>
+          <a:effectLst>
+            <a:outerShdw blurRad="110000" dist="42000" dir="5400000" rotWithShape="0">
+              <a:srgbClr val="000000">
+                <a:alpha val="60000"/>
+              </a:srgbClr>
+            </a:outerShdw>
+          </a:effectLst>
+        </p:spPr>
+        <p:style>
+          <a:lnRef idx="1">
+            <a:schemeClr val="accent1"/>
+          </a:lnRef>
+          <a:fillRef idx="3">
+            <a:schemeClr val="accent1"/>
+          </a:fillRef>
+          <a:effectRef idx="2">
+            <a:schemeClr val="accent1"/>
+          </a:effectRef>
+          <a:fontRef idx="minor">
+            <a:schemeClr val="lt1"/>
+          </a:fontRef>
+        </p:style>
+        <p:txBody>
+          <a:bodyPr rtlCol="0" anchor="ctr"/>
+          <a:lstStyle/>
+          <a:p>
+            <a:pPr algn="ctr"/>
           </a:p>
         </p:txBody>
       </p:sp>
       <p:pic>
         <p:nvPicPr>
-          <p:cNvPr id="5" name="Picture 4" descr="3_pruning_frontier.png"/>
+          <p:cNvPr id="11" name="Picture 10" descr="3_pruning_frontier.png"/>
           <p:cNvPicPr>
             <a:picLocks noChangeAspect="1"/>
           </p:cNvPicPr>
@@ -3296,8 +3995,8 @@
         </p:blipFill>
         <p:spPr>
           <a:xfrm>
-            <a:off x="1752447" y="1645920"/>
-            <a:ext cx="8686800" cy="6273800"/>
+            <a:off x="3468706" y="1920240"/>
+            <a:ext cx="5254283" cy="3794760"/>
           </a:xfrm>
           <a:prstGeom prst="rect">
             <a:avLst/>
@@ -3306,14 +4005,14 @@
       </p:pic>
       <p:sp>
         <p:nvSpPr>
-          <p:cNvPr id="6" name="TextBox 5"/>
+          <p:cNvPr id="12" name="TextBox 11"/>
           <p:cNvSpPr txBox="1"/>
           <p:nvPr/>
         </p:nvSpPr>
         <p:spPr>
           <a:xfrm>
-            <a:off x="548640" y="6400800"/>
-            <a:ext cx="11064240" cy="365760"/>
+            <a:off x="548640" y="6044184"/>
+            <a:ext cx="11064240" cy="384048"/>
           </a:xfrm>
           <a:prstGeom prst="rect">
             <a:avLst/>
@@ -3328,9 +4027,9 @@
           <a:p>
             <a:pPr algn="ctr"/>
             <a:r>
-              <a:rPr sz="1100" i="1">
-                <a:solidFill>
-                  <a:srgbClr val="666666"/>
+              <a:rPr sz="1100" b="0" i="1">
+                <a:solidFill>
+                  <a:srgbClr val="5B6472"/>
                 </a:solidFill>
               </a:rPr>
               <a:t>Pruning 'grace' dial: from the heuristic's point up to ~57% energy saved, trading throughput as you go.</a:t>
@@ -3358,54 +4057,29 @@
       <p:grpSpPr/>
       <p:sp>
         <p:nvSpPr>
-          <p:cNvPr id="2" name="TextBox 1"/>
-          <p:cNvSpPr txBox="1"/>
-          <p:nvPr/>
-        </p:nvSpPr>
-        <p:spPr>
-          <a:xfrm>
-            <a:off x="548640" y="320040"/>
-            <a:ext cx="11064240" cy="914400"/>
-          </a:xfrm>
-          <a:prstGeom prst="rect">
-            <a:avLst/>
-          </a:prstGeom>
-          <a:noFill/>
-        </p:spPr>
-        <p:txBody>
-          <a:bodyPr wrap="square">
-            <a:spAutoFit/>
-          </a:bodyPr>
-          <a:lstStyle/>
-          <a:p>
-            <a:r>
-              <a:rPr sz="3000" b="1">
-                <a:solidFill>
-                  <a:srgbClr val="222222"/>
-                </a:solidFill>
-              </a:rPr>
-              <a:t>What the controller does over time</a:t>
-            </a:r>
-          </a:p>
-        </p:txBody>
-      </p:sp>
-      <p:sp>
-        <p:nvSpPr>
-          <p:cNvPr id="3" name="Rectangle 2"/>
+          <p:cNvPr id="2" name="Rectangle 1"/>
           <p:cNvSpPr/>
           <p:nvPr/>
         </p:nvSpPr>
         <p:spPr>
           <a:xfrm>
-            <a:off x="566928" y="1170432"/>
-            <a:ext cx="2926080" cy="50800"/>
-          </a:xfrm>
-          <a:prstGeom prst="rect">
-            <a:avLst/>
-          </a:prstGeom>
-          <a:solidFill>
-            <a:srgbClr val="0072B2"/>
-          </a:solidFill>
+            <a:off x="0" y="0"/>
+            <a:ext cx="146304" cy="6858000"/>
+          </a:xfrm>
+          <a:prstGeom prst="rect">
+            <a:avLst/>
+          </a:prstGeom>
+          <a:gradFill>
+            <a:gsLst>
+              <a:gs pos="0">
+                <a:srgbClr val="0072B2"/>
+              </a:gs>
+              <a:gs pos="100000">
+                <a:srgbClr val="009E73"/>
+              </a:gs>
+            </a:gsLst>
+            <a:lin ang="5400000" scaled="1"/>
+          </a:gradFill>
           <a:ln>
             <a:noFill/>
           </a:ln>
@@ -3434,14 +4108,14 @@
       </p:sp>
       <p:sp>
         <p:nvSpPr>
-          <p:cNvPr id="4" name="TextBox 3"/>
+          <p:cNvPr id="3" name="TextBox 2"/>
           <p:cNvSpPr txBox="1"/>
           <p:nvPr/>
         </p:nvSpPr>
         <p:spPr>
           <a:xfrm>
-            <a:off x="566928" y="1280160"/>
-            <a:ext cx="10972800" cy="457200"/>
+            <a:off x="658368" y="329184"/>
+            <a:ext cx="9144000" cy="320040"/>
           </a:xfrm>
           <a:prstGeom prst="rect">
             <a:avLst/>
@@ -3455,19 +4129,300 @@
           <a:lstStyle/>
           <a:p>
             <a:r>
-              <a:rPr sz="1400" i="1">
-                <a:solidFill>
-                  <a:srgbClr val="666666"/>
+              <a:rPr sz="1250" b="1" i="0">
+                <a:solidFill>
+                  <a:srgbClr val="0072B2"/>
+                </a:solidFill>
+              </a:rPr>
+              <a:t>RESULTS</a:t>
+            </a:r>
+          </a:p>
+        </p:txBody>
+      </p:sp>
+      <p:sp>
+        <p:nvSpPr>
+          <p:cNvPr id="4" name="TextBox 3"/>
+          <p:cNvSpPr txBox="1"/>
+          <p:nvPr/>
+        </p:nvSpPr>
+        <p:spPr>
+          <a:xfrm>
+            <a:off x="640080" y="566928"/>
+            <a:ext cx="11155680" cy="822960"/>
+          </a:xfrm>
+          <a:prstGeom prst="rect">
+            <a:avLst/>
+          </a:prstGeom>
+          <a:noFill/>
+        </p:spPr>
+        <p:txBody>
+          <a:bodyPr wrap="square">
+            <a:spAutoFit/>
+          </a:bodyPr>
+          <a:lstStyle/>
+          <a:p>
+            <a:r>
+              <a:rPr sz="2800" b="1" i="0">
+                <a:solidFill>
+                  <a:srgbClr val="1A2233"/>
+                </a:solidFill>
+              </a:rPr>
+              <a:t>What the controller does over time</a:t>
+            </a:r>
+          </a:p>
+        </p:txBody>
+      </p:sp>
+      <p:sp>
+        <p:nvSpPr>
+          <p:cNvPr id="5" name="Rectangle 4"/>
+          <p:cNvSpPr/>
+          <p:nvPr/>
+        </p:nvSpPr>
+        <p:spPr>
+          <a:xfrm>
+            <a:off x="658368" y="1335024"/>
+            <a:ext cx="2468880" cy="68580"/>
+          </a:xfrm>
+          <a:prstGeom prst="rect">
+            <a:avLst/>
+          </a:prstGeom>
+          <a:gradFill>
+            <a:gsLst>
+              <a:gs pos="0">
+                <a:srgbClr val="0072B2"/>
+              </a:gs>
+              <a:gs pos="100000">
+                <a:srgbClr val="009E73"/>
+              </a:gs>
+            </a:gsLst>
+            <a:lin ang="0" scaled="1"/>
+          </a:gradFill>
+          <a:ln>
+            <a:noFill/>
+          </a:ln>
+        </p:spPr>
+        <p:style>
+          <a:lnRef idx="1">
+            <a:schemeClr val="accent1"/>
+          </a:lnRef>
+          <a:fillRef idx="3">
+            <a:schemeClr val="accent1"/>
+          </a:fillRef>
+          <a:effectRef idx="2">
+            <a:schemeClr val="accent1"/>
+          </a:effectRef>
+          <a:fontRef idx="minor">
+            <a:schemeClr val="lt1"/>
+          </a:fontRef>
+        </p:style>
+        <p:txBody>
+          <a:bodyPr rtlCol="0" anchor="ctr"/>
+          <a:lstStyle/>
+          <a:p>
+            <a:pPr algn="ctr"/>
+          </a:p>
+        </p:txBody>
+      </p:sp>
+      <p:sp>
+        <p:nvSpPr>
+          <p:cNvPr id="6" name="TextBox 5"/>
+          <p:cNvSpPr txBox="1"/>
+          <p:nvPr/>
+        </p:nvSpPr>
+        <p:spPr>
+          <a:xfrm>
+            <a:off x="658368" y="1426464"/>
+            <a:ext cx="10972800" cy="457200"/>
+          </a:xfrm>
+          <a:prstGeom prst="rect">
+            <a:avLst/>
+          </a:prstGeom>
+          <a:noFill/>
+        </p:spPr>
+        <p:txBody>
+          <a:bodyPr wrap="square">
+            <a:spAutoFit/>
+          </a:bodyPr>
+          <a:lstStyle/>
+          <a:p>
+            <a:r>
+              <a:rPr sz="1400" b="0" i="1">
+                <a:solidFill>
+                  <a:srgbClr val="5B6472"/>
                 </a:solidFill>
               </a:rPr>
               <a:t>Cells sleep through the lulls and wake for the bursts</a:t>
             </a:r>
+          </a:p>
+        </p:txBody>
+      </p:sp>
+      <p:sp>
+        <p:nvSpPr>
+          <p:cNvPr id="7" name="Rectangle 6"/>
+          <p:cNvSpPr/>
+          <p:nvPr/>
+        </p:nvSpPr>
+        <p:spPr>
+          <a:xfrm>
+            <a:off x="640080" y="6437376"/>
+            <a:ext cx="10881360" cy="11887"/>
+          </a:xfrm>
+          <a:prstGeom prst="rect">
+            <a:avLst/>
+          </a:prstGeom>
+          <a:solidFill>
+            <a:srgbClr val="DDE4F0"/>
+          </a:solidFill>
+          <a:ln>
+            <a:noFill/>
+          </a:ln>
+        </p:spPr>
+        <p:style>
+          <a:lnRef idx="1">
+            <a:schemeClr val="accent1"/>
+          </a:lnRef>
+          <a:fillRef idx="3">
+            <a:schemeClr val="accent1"/>
+          </a:fillRef>
+          <a:effectRef idx="2">
+            <a:schemeClr val="accent1"/>
+          </a:effectRef>
+          <a:fontRef idx="minor">
+            <a:schemeClr val="lt1"/>
+          </a:fontRef>
+        </p:style>
+        <p:txBody>
+          <a:bodyPr rtlCol="0" anchor="ctr"/>
+          <a:lstStyle/>
+          <a:p>
+            <a:pPr algn="ctr"/>
+          </a:p>
+        </p:txBody>
+      </p:sp>
+      <p:sp>
+        <p:nvSpPr>
+          <p:cNvPr id="8" name="TextBox 7"/>
+          <p:cNvSpPr txBox="1"/>
+          <p:nvPr/>
+        </p:nvSpPr>
+        <p:spPr>
+          <a:xfrm>
+            <a:off x="640080" y="6455664"/>
+            <a:ext cx="7315200" cy="320040"/>
+          </a:xfrm>
+          <a:prstGeom prst="rect">
+            <a:avLst/>
+          </a:prstGeom>
+          <a:noFill/>
+        </p:spPr>
+        <p:txBody>
+          <a:bodyPr wrap="square">
+            <a:spAutoFit/>
+          </a:bodyPr>
+          <a:lstStyle/>
+          <a:p>
+            <a:r>
+              <a:rPr sz="900" b="0" i="0">
+                <a:solidFill>
+                  <a:srgbClr val="5B6472"/>
+                </a:solidFill>
+              </a:rPr>
+              <a:t>Energy-Saving RL  ·  ns-O-RAN digital twin</a:t>
+            </a:r>
+          </a:p>
+        </p:txBody>
+      </p:sp>
+      <p:sp>
+        <p:nvSpPr>
+          <p:cNvPr id="9" name="TextBox 8"/>
+          <p:cNvSpPr txBox="1"/>
+          <p:nvPr/>
+        </p:nvSpPr>
+        <p:spPr>
+          <a:xfrm>
+            <a:off x="9692640" y="6455664"/>
+            <a:ext cx="1828800" cy="320040"/>
+          </a:xfrm>
+          <a:prstGeom prst="rect">
+            <a:avLst/>
+          </a:prstGeom>
+          <a:noFill/>
+        </p:spPr>
+        <p:txBody>
+          <a:bodyPr wrap="square">
+            <a:spAutoFit/>
+          </a:bodyPr>
+          <a:lstStyle/>
+          <a:p>
+            <a:pPr algn="r"/>
+            <a:r>
+              <a:rPr sz="900" b="0" i="0">
+                <a:solidFill>
+                  <a:srgbClr val="5B6472"/>
+                </a:solidFill>
+              </a:rPr>
+              <a:t>11 / 13</a:t>
+            </a:r>
+          </a:p>
+        </p:txBody>
+      </p:sp>
+      <p:sp>
+        <p:nvSpPr>
+          <p:cNvPr id="10" name="Rounded Rectangle 9"/>
+          <p:cNvSpPr/>
+          <p:nvPr/>
+        </p:nvSpPr>
+        <p:spPr>
+          <a:xfrm>
+            <a:off x="3512398" y="1792224"/>
+            <a:ext cx="5166897" cy="4050792"/>
+          </a:xfrm>
+          <a:prstGeom prst="roundRect">
+            <a:avLst>
+              <a:gd name="adj" fmla="val 2000"/>
+            </a:avLst>
+          </a:prstGeom>
+          <a:solidFill>
+            <a:srgbClr val="FFFFFF"/>
+          </a:solidFill>
+          <a:ln w="12700">
+            <a:solidFill>
+              <a:srgbClr val="DDE4F0"/>
+            </a:solidFill>
+          </a:ln>
+          <a:effectLst>
+            <a:outerShdw blurRad="110000" dist="42000" dir="5400000" rotWithShape="0">
+              <a:srgbClr val="000000">
+                <a:alpha val="60000"/>
+              </a:srgbClr>
+            </a:outerShdw>
+          </a:effectLst>
+        </p:spPr>
+        <p:style>
+          <a:lnRef idx="1">
+            <a:schemeClr val="accent1"/>
+          </a:lnRef>
+          <a:fillRef idx="3">
+            <a:schemeClr val="accent1"/>
+          </a:fillRef>
+          <a:effectRef idx="2">
+            <a:schemeClr val="accent1"/>
+          </a:effectRef>
+          <a:fontRef idx="minor">
+            <a:schemeClr val="lt1"/>
+          </a:fontRef>
+        </p:style>
+        <p:txBody>
+          <a:bodyPr rtlCol="0" anchor="ctr"/>
+          <a:lstStyle/>
+          <a:p>
+            <a:pPr algn="ctr"/>
           </a:p>
         </p:txBody>
       </p:sp>
       <p:pic>
         <p:nvPicPr>
-          <p:cNvPr id="5" name="Picture 4" descr="4_controller_behavior_over_time.png"/>
+          <p:cNvPr id="11" name="Picture 10" descr="4_controller_behavior_over_time.png"/>
           <p:cNvPicPr>
             <a:picLocks noChangeAspect="1"/>
           </p:cNvPicPr>
@@ -3481,8 +4436,8 @@
         </p:blipFill>
         <p:spPr>
           <a:xfrm>
-            <a:off x="1295247" y="1645920"/>
-            <a:ext cx="9601200" cy="7419109"/>
+            <a:off x="3640414" y="1920240"/>
+            <a:ext cx="4910865" cy="3794759"/>
           </a:xfrm>
           <a:prstGeom prst="rect">
             <a:avLst/>
@@ -3491,14 +4446,14 @@
       </p:pic>
       <p:sp>
         <p:nvSpPr>
-          <p:cNvPr id="6" name="TextBox 5"/>
+          <p:cNvPr id="12" name="TextBox 11"/>
           <p:cNvSpPr txBox="1"/>
           <p:nvPr/>
         </p:nvSpPr>
         <p:spPr>
           <a:xfrm>
-            <a:off x="548640" y="6400800"/>
-            <a:ext cx="11064240" cy="365760"/>
+            <a:off x="548640" y="6044184"/>
+            <a:ext cx="11064240" cy="384048"/>
           </a:xfrm>
           <a:prstGeom prst="rect">
             <a:avLst/>
@@ -3513,9 +4468,9 @@
           <a:p>
             <a:pPr algn="ctr"/>
             <a:r>
-              <a:rPr sz="1100" i="1">
-                <a:solidFill>
-                  <a:srgbClr val="666666"/>
+              <a:rPr sz="1100" b="0" i="1">
+                <a:solidFill>
+                  <a:srgbClr val="5B6472"/>
                 </a:solidFill>
               </a:rPr>
               <a:t>One shaped-RL run (seed 999, ~43% saved). RL's 4-seed AVERAGE is ~40% energy saved; per-seed it varies 25-46%. Idle cells sleep; busy cells stay on.</a:t>
@@ -3543,54 +4498,29 @@
       <p:grpSpPr/>
       <p:sp>
         <p:nvSpPr>
-          <p:cNvPr id="2" name="TextBox 1"/>
-          <p:cNvSpPr txBox="1"/>
-          <p:nvPr/>
-        </p:nvSpPr>
-        <p:spPr>
-          <a:xfrm>
-            <a:off x="548640" y="320040"/>
-            <a:ext cx="11064240" cy="914400"/>
-          </a:xfrm>
-          <a:prstGeom prst="rect">
-            <a:avLst/>
-          </a:prstGeom>
-          <a:noFill/>
-        </p:spPr>
-        <p:txBody>
-          <a:bodyPr wrap="square">
-            <a:spAutoFit/>
-          </a:bodyPr>
-          <a:lstStyle/>
-          <a:p>
-            <a:r>
-              <a:rPr sz="3000" b="1">
-                <a:solidFill>
-                  <a:srgbClr val="222222"/>
-                </a:solidFill>
-              </a:rPr>
-              <a:t>Bottom line &amp; next steps</a:t>
-            </a:r>
-          </a:p>
-        </p:txBody>
-      </p:sp>
-      <p:sp>
-        <p:nvSpPr>
-          <p:cNvPr id="3" name="Rectangle 2"/>
+          <p:cNvPr id="2" name="Rectangle 1"/>
           <p:cNvSpPr/>
           <p:nvPr/>
         </p:nvSpPr>
         <p:spPr>
           <a:xfrm>
-            <a:off x="566928" y="1170432"/>
-            <a:ext cx="2926080" cy="50800"/>
-          </a:xfrm>
-          <a:prstGeom prst="rect">
-            <a:avLst/>
-          </a:prstGeom>
-          <a:solidFill>
-            <a:srgbClr val="0072B2"/>
-          </a:solidFill>
+            <a:off x="0" y="0"/>
+            <a:ext cx="146304" cy="6858000"/>
+          </a:xfrm>
+          <a:prstGeom prst="rect">
+            <a:avLst/>
+          </a:prstGeom>
+          <a:gradFill>
+            <a:gsLst>
+              <a:gs pos="0">
+                <a:srgbClr val="0072B2"/>
+              </a:gs>
+              <a:gs pos="100000">
+                <a:srgbClr val="009E73"/>
+              </a:gs>
+            </a:gsLst>
+            <a:lin ang="5400000" scaled="1"/>
+          </a:gradFill>
           <a:ln>
             <a:noFill/>
           </a:ln>
@@ -3619,14 +4549,14 @@
       </p:sp>
       <p:sp>
         <p:nvSpPr>
-          <p:cNvPr id="4" name="TextBox 3"/>
+          <p:cNvPr id="3" name="TextBox 2"/>
           <p:cNvSpPr txBox="1"/>
           <p:nvPr/>
         </p:nvSpPr>
         <p:spPr>
           <a:xfrm>
-            <a:off x="640080" y="1737360"/>
-            <a:ext cx="11064240" cy="4754880"/>
+            <a:off x="658368" y="329184"/>
+            <a:ext cx="9144000" cy="320040"/>
           </a:xfrm>
           <a:prstGeom prst="rect">
             <a:avLst/>
@@ -3639,123 +4569,492 @@
           </a:bodyPr>
           <a:lstStyle/>
           <a:p>
-            <a:pPr>
+            <a:r>
+              <a:rPr sz="1250" b="1" i="0">
+                <a:solidFill>
+                  <a:srgbClr val="0072B2"/>
+                </a:solidFill>
+              </a:rPr>
+              <a:t>SUMMARY</a:t>
+            </a:r>
+          </a:p>
+        </p:txBody>
+      </p:sp>
+      <p:sp>
+        <p:nvSpPr>
+          <p:cNvPr id="4" name="TextBox 3"/>
+          <p:cNvSpPr txBox="1"/>
+          <p:nvPr/>
+        </p:nvSpPr>
+        <p:spPr>
+          <a:xfrm>
+            <a:off x="640080" y="566928"/>
+            <a:ext cx="11155680" cy="822960"/>
+          </a:xfrm>
+          <a:prstGeom prst="rect">
+            <a:avLst/>
+          </a:prstGeom>
+          <a:noFill/>
+        </p:spPr>
+        <p:txBody>
+          <a:bodyPr wrap="square">
+            <a:spAutoFit/>
+          </a:bodyPr>
+          <a:lstStyle/>
+          <a:p>
+            <a:r>
+              <a:rPr sz="2800" b="1" i="0">
+                <a:solidFill>
+                  <a:srgbClr val="1A2233"/>
+                </a:solidFill>
+              </a:rPr>
+              <a:t>Bottom line &amp; next steps</a:t>
+            </a:r>
+          </a:p>
+        </p:txBody>
+      </p:sp>
+      <p:sp>
+        <p:nvSpPr>
+          <p:cNvPr id="5" name="Rectangle 4"/>
+          <p:cNvSpPr/>
+          <p:nvPr/>
+        </p:nvSpPr>
+        <p:spPr>
+          <a:xfrm>
+            <a:off x="658368" y="1335024"/>
+            <a:ext cx="2468880" cy="68580"/>
+          </a:xfrm>
+          <a:prstGeom prst="rect">
+            <a:avLst/>
+          </a:prstGeom>
+          <a:gradFill>
+            <a:gsLst>
+              <a:gs pos="0">
+                <a:srgbClr val="0072B2"/>
+              </a:gs>
+              <a:gs pos="100000">
+                <a:srgbClr val="009E73"/>
+              </a:gs>
+            </a:gsLst>
+            <a:lin ang="0" scaled="1"/>
+          </a:gradFill>
+          <a:ln>
+            <a:noFill/>
+          </a:ln>
+        </p:spPr>
+        <p:style>
+          <a:lnRef idx="1">
+            <a:schemeClr val="accent1"/>
+          </a:lnRef>
+          <a:fillRef idx="3">
+            <a:schemeClr val="accent1"/>
+          </a:fillRef>
+          <a:effectRef idx="2">
+            <a:schemeClr val="accent1"/>
+          </a:effectRef>
+          <a:fontRef idx="minor">
+            <a:schemeClr val="lt1"/>
+          </a:fontRef>
+        </p:style>
+        <p:txBody>
+          <a:bodyPr rtlCol="0" anchor="ctr"/>
+          <a:lstStyle/>
+          <a:p>
+            <a:pPr algn="ctr"/>
+          </a:p>
+        </p:txBody>
+      </p:sp>
+      <p:sp>
+        <p:nvSpPr>
+          <p:cNvPr id="6" name="Rounded Rectangle 5"/>
+          <p:cNvSpPr/>
+          <p:nvPr/>
+        </p:nvSpPr>
+        <p:spPr>
+          <a:xfrm>
+            <a:off x="548640" y="1810512"/>
+            <a:ext cx="11091672" cy="4462272"/>
+          </a:xfrm>
+          <a:prstGeom prst="roundRect">
+            <a:avLst>
+              <a:gd name="adj" fmla="val 2800"/>
+            </a:avLst>
+          </a:prstGeom>
+          <a:solidFill>
+            <a:srgbClr val="F3F6FB"/>
+          </a:solidFill>
+          <a:ln w="12700">
+            <a:solidFill>
+              <a:srgbClr val="DDE4F0"/>
+            </a:solidFill>
+          </a:ln>
+          <a:effectLst>
+            <a:outerShdw blurRad="90000" dist="32000" dir="5400000" rotWithShape="0">
+              <a:srgbClr val="000000">
+                <a:alpha val="55000"/>
+              </a:srgbClr>
+            </a:outerShdw>
+          </a:effectLst>
+        </p:spPr>
+        <p:style>
+          <a:lnRef idx="1">
+            <a:schemeClr val="accent1"/>
+          </a:lnRef>
+          <a:fillRef idx="3">
+            <a:schemeClr val="accent1"/>
+          </a:fillRef>
+          <a:effectRef idx="2">
+            <a:schemeClr val="accent1"/>
+          </a:effectRef>
+          <a:fontRef idx="minor">
+            <a:schemeClr val="lt1"/>
+          </a:fontRef>
+        </p:style>
+        <p:txBody>
+          <a:bodyPr rtlCol="0" anchor="ctr"/>
+          <a:lstStyle/>
+          <a:p>
+            <a:pPr algn="ctr"/>
+          </a:p>
+        </p:txBody>
+      </p:sp>
+      <p:sp>
+        <p:nvSpPr>
+          <p:cNvPr id="7" name="TextBox 6"/>
+          <p:cNvSpPr txBox="1"/>
+          <p:nvPr/>
+        </p:nvSpPr>
+        <p:spPr>
+          <a:xfrm>
+            <a:off x="932688" y="2048256"/>
+            <a:ext cx="10378440" cy="4023360"/>
+          </a:xfrm>
+          <a:prstGeom prst="rect">
+            <a:avLst/>
+          </a:prstGeom>
+          <a:noFill/>
+        </p:spPr>
+        <p:txBody>
+          <a:bodyPr wrap="square" anchor="t">
+            <a:spAutoFit/>
+          </a:bodyPr>
+          <a:lstStyle/>
+          <a:p>
+            <a:pPr marL="274320" indent="-274320">
+              <a:lnSpc>
+                <a:spcPct val="112000"/>
+              </a:lnSpc>
               <a:spcAft>
-                <a:spcPts val="700"/>
+                <a:spcPts val="1000"/>
               </a:spcAft>
             </a:pPr>
             <a:r>
-              <a:rPr sz="1800">
-                <a:solidFill>
-                  <a:srgbClr val="222222"/>
-                </a:solidFill>
-              </a:rPr>
-              <a:t>• Delivered: a realistic bursty twin, a working imitation+RL pipeline (BC 100% match, stable PPO),</a:t>
-            </a:r>
-          </a:p>
-          <a:p>
-            <a:pPr lvl="1">
+              <a:rPr sz="1600" b="1" i="0">
+                <a:solidFill>
+                  <a:srgbClr val="0072B2"/>
+                </a:solidFill>
+              </a:rPr>
+              <a:t>▪  </a:t>
+            </a:r>
+            <a:r>
+              <a:rPr sz="1600" b="0" i="0">
+                <a:solidFill>
+                  <a:srgbClr val="1A2233"/>
+                </a:solidFill>
+              </a:rPr>
+              <a:t>Delivered: a realistic bursty twin, a working imitation+RL pipeline (BC 100% match, stable PPO),</a:t>
+            </a:r>
+          </a:p>
+          <a:p>
+            <a:pPr marL="603504" indent="-274320">
+              <a:lnSpc>
+                <a:spcPct val="112000"/>
+              </a:lnSpc>
               <a:spcAft>
-                <a:spcPts val="700"/>
+                <a:spcPts val="500"/>
               </a:spcAft>
             </a:pPr>
             <a:r>
-              <a:rPr sz="1500">
-                <a:solidFill>
-                  <a:srgbClr val="666666"/>
-                </a:solidFill>
-              </a:rPr>
-              <a:t>– a rigorous energy-vs-QoS tradeoff, and a tunable energy-saving controller.</a:t>
-            </a:r>
-          </a:p>
-          <a:p>
-            <a:pPr>
+              <a:rPr sz="1400" b="1" i="0">
+                <a:solidFill>
+                  <a:srgbClr val="009E73"/>
+                </a:solidFill>
+              </a:rPr>
+              <a:t>–  </a:t>
+            </a:r>
+            <a:r>
+              <a:rPr sz="1400" b="0" i="0">
+                <a:solidFill>
+                  <a:srgbClr val="5B6472"/>
+                </a:solidFill>
+              </a:rPr>
+              <a:t>a rigorous energy-vs-QoS tradeoff, and a tunable energy-saving controller.</a:t>
+            </a:r>
+          </a:p>
+          <a:p>
+            <a:pPr marL="274320" indent="-274320">
+              <a:lnSpc>
+                <a:spcPct val="112000"/>
+              </a:lnSpc>
               <a:spcAft>
-                <a:spcPts val="700"/>
+                <a:spcPts val="1000"/>
               </a:spcAft>
             </a:pPr>
             <a:r>
-              <a:rPr sz="1800">
-                <a:solidFill>
-                  <a:srgbClr val="222222"/>
-                </a:solidFill>
-              </a:rPr>
-              <a:t>• RL result: with reward shaping, RL learns a greener + more-reliable operating point than the heuristic</a:t>
-            </a:r>
-          </a:p>
-          <a:p>
-            <a:pPr lvl="1">
+              <a:rPr sz="1600" b="1" i="0">
+                <a:solidFill>
+                  <a:srgbClr val="0072B2"/>
+                </a:solidFill>
+              </a:rPr>
+              <a:t>▪  </a:t>
+            </a:r>
+            <a:r>
+              <a:rPr sz="1600" b="0" i="0">
+                <a:solidFill>
+                  <a:srgbClr val="1A2233"/>
+                </a:solidFill>
+              </a:rPr>
+              <a:t>RL result: with reward shaping, RL learns a greener + more-reliable operating point than the heuristic</a:t>
+            </a:r>
+          </a:p>
+          <a:p>
+            <a:pPr marL="603504" indent="-274320">
+              <a:lnSpc>
+                <a:spcPct val="112000"/>
+              </a:lnSpc>
               <a:spcAft>
-                <a:spcPts val="700"/>
+                <a:spcPts val="500"/>
               </a:spcAft>
             </a:pPr>
             <a:r>
-              <a:rPr sz="1500">
-                <a:solidFill>
-                  <a:srgbClr val="666666"/>
-                </a:solidFill>
-              </a:rPr>
-              <a:t>– - better on energy AND dropped-calls, slightly lower throughput: a favourable, honest tradeoff.</a:t>
-            </a:r>
-          </a:p>
-          <a:p>
-            <a:pPr>
+              <a:rPr sz="1400" b="1" i="0">
+                <a:solidFill>
+                  <a:srgbClr val="009E73"/>
+                </a:solidFill>
+              </a:rPr>
+              <a:t>–  </a:t>
+            </a:r>
+            <a:r>
+              <a:rPr sz="1400" b="0" i="0">
+                <a:solidFill>
+                  <a:srgbClr val="5B6472"/>
+                </a:solidFill>
+              </a:rPr>
+              <a:t>- better on energy AND dropped-calls, slightly lower throughput: a favourable, honest tradeoff.</a:t>
+            </a:r>
+          </a:p>
+          <a:p>
+            <a:pPr marL="274320" indent="-274320">
+              <a:lnSpc>
+                <a:spcPct val="112000"/>
+              </a:lnSpc>
               <a:spcAft>
-                <a:spcPts val="700"/>
+                <a:spcPts val="1000"/>
               </a:spcAft>
             </a:pPr>
             <a:r>
-              <a:rPr sz="1800">
-                <a:solidFill>
-                  <a:srgbClr val="222222"/>
-                </a:solidFill>
-              </a:rPr>
-              <a:t>• It does not STRICTLY beat a strong heuristic on all three axes - the real blocker is the slow</a:t>
-            </a:r>
-          </a:p>
-          <a:p>
-            <a:pPr lvl="1">
+              <a:rPr sz="1600" b="1" i="0">
+                <a:solidFill>
+                  <a:srgbClr val="0072B2"/>
+                </a:solidFill>
+              </a:rPr>
+              <a:t>▪  </a:t>
+            </a:r>
+            <a:r>
+              <a:rPr sz="1600" b="0" i="0">
+                <a:solidFill>
+                  <a:srgbClr val="1A2233"/>
+                </a:solidFill>
+              </a:rPr>
+              <a:t>It does not STRICTLY beat a strong heuristic on all three axes - the real blocker is the slow</a:t>
+            </a:r>
+          </a:p>
+          <a:p>
+            <a:pPr marL="603504" indent="-274320">
+              <a:lnSpc>
+                <a:spcPct val="112000"/>
+              </a:lnSpc>
               <a:spcAft>
-                <a:spcPts val="700"/>
+                <a:spcPts val="500"/>
               </a:spcAft>
             </a:pPr>
             <a:r>
-              <a:rPr sz="1500">
-                <a:solidFill>
-                  <a:srgbClr val="666666"/>
-                </a:solidFill>
-              </a:rPr>
-              <a:t>– simulator's tiny sample budget (~640 RL trial-steps), too little to out-tune a good heuristic.</a:t>
-            </a:r>
-          </a:p>
-          <a:p>
-            <a:pPr>
+              <a:rPr sz="1400" b="1" i="0">
+                <a:solidFill>
+                  <a:srgbClr val="009E73"/>
+                </a:solidFill>
+              </a:rPr>
+              <a:t>–  </a:t>
+            </a:r>
+            <a:r>
+              <a:rPr sz="1400" b="0" i="0">
+                <a:solidFill>
+                  <a:srgbClr val="5B6472"/>
+                </a:solidFill>
+              </a:rPr>
+              <a:t>simulator's tiny sample budget (~640 RL trial-steps), too little to out-tune a good heuristic.</a:t>
+            </a:r>
+          </a:p>
+          <a:p>
+            <a:pPr marL="274320" indent="-274320">
+              <a:lnSpc>
+                <a:spcPct val="112000"/>
+              </a:lnSpc>
               <a:spcAft>
-                <a:spcPts val="700"/>
+                <a:spcPts val="1000"/>
               </a:spcAft>
             </a:pPr>
             <a:r>
-              <a:rPr sz="1800">
-                <a:solidFill>
-                  <a:srgbClr val="222222"/>
-                </a:solidFill>
-              </a:rPr>
-              <a:t>• Next steps: (1) sample-efficient RL - offline RL on logged data, or a fast learned surrogate of the</a:t>
-            </a:r>
-          </a:p>
-          <a:p>
-            <a:pPr lvl="1">
+              <a:rPr sz="1600" b="1" i="0">
+                <a:solidFill>
+                  <a:srgbClr val="0072B2"/>
+                </a:solidFill>
+              </a:rPr>
+              <a:t>▪  </a:t>
+            </a:r>
+            <a:r>
+              <a:rPr sz="1600" b="0" i="0">
+                <a:solidFill>
+                  <a:srgbClr val="1A2233"/>
+                </a:solidFill>
+              </a:rPr>
+              <a:t>Next steps: (1) sample-efficient RL - offline RL on logged data, or a fast learned surrogate of the</a:t>
+            </a:r>
+          </a:p>
+          <a:p>
+            <a:pPr marL="603504" indent="-274320">
+              <a:lnSpc>
+                <a:spcPct val="112000"/>
+              </a:lnSpc>
               <a:spcAft>
-                <a:spcPts val="700"/>
+                <a:spcPts val="500"/>
               </a:spcAft>
             </a:pPr>
             <a:r>
-              <a:rPr sz="1500">
-                <a:solidFill>
-                  <a:srgbClr val="666666"/>
-                </a:solidFill>
-              </a:rPr>
-              <a:t>– sim - to escape that budget;  (2) richer / larger network scenarios;  (3) ship the tunable controller.</a:t>
+              <a:rPr sz="1400" b="1" i="0">
+                <a:solidFill>
+                  <a:srgbClr val="009E73"/>
+                </a:solidFill>
+              </a:rPr>
+              <a:t>–  </a:t>
+            </a:r>
+            <a:r>
+              <a:rPr sz="1400" b="0" i="0">
+                <a:solidFill>
+                  <a:srgbClr val="5B6472"/>
+                </a:solidFill>
+              </a:rPr>
+              <a:t>sim - to escape that budget;  (2) richer / larger network scenarios;  (3) ship the tunable controller.</a:t>
+            </a:r>
+          </a:p>
+        </p:txBody>
+      </p:sp>
+      <p:sp>
+        <p:nvSpPr>
+          <p:cNvPr id="8" name="Rectangle 7"/>
+          <p:cNvSpPr/>
+          <p:nvPr/>
+        </p:nvSpPr>
+        <p:spPr>
+          <a:xfrm>
+            <a:off x="640080" y="6437376"/>
+            <a:ext cx="10881360" cy="11887"/>
+          </a:xfrm>
+          <a:prstGeom prst="rect">
+            <a:avLst/>
+          </a:prstGeom>
+          <a:solidFill>
+            <a:srgbClr val="DDE4F0"/>
+          </a:solidFill>
+          <a:ln>
+            <a:noFill/>
+          </a:ln>
+        </p:spPr>
+        <p:style>
+          <a:lnRef idx="1">
+            <a:schemeClr val="accent1"/>
+          </a:lnRef>
+          <a:fillRef idx="3">
+            <a:schemeClr val="accent1"/>
+          </a:fillRef>
+          <a:effectRef idx="2">
+            <a:schemeClr val="accent1"/>
+          </a:effectRef>
+          <a:fontRef idx="minor">
+            <a:schemeClr val="lt1"/>
+          </a:fontRef>
+        </p:style>
+        <p:txBody>
+          <a:bodyPr rtlCol="0" anchor="ctr"/>
+          <a:lstStyle/>
+          <a:p>
+            <a:pPr algn="ctr"/>
+          </a:p>
+        </p:txBody>
+      </p:sp>
+      <p:sp>
+        <p:nvSpPr>
+          <p:cNvPr id="9" name="TextBox 8"/>
+          <p:cNvSpPr txBox="1"/>
+          <p:nvPr/>
+        </p:nvSpPr>
+        <p:spPr>
+          <a:xfrm>
+            <a:off x="640080" y="6455664"/>
+            <a:ext cx="7315200" cy="320040"/>
+          </a:xfrm>
+          <a:prstGeom prst="rect">
+            <a:avLst/>
+          </a:prstGeom>
+          <a:noFill/>
+        </p:spPr>
+        <p:txBody>
+          <a:bodyPr wrap="square">
+            <a:spAutoFit/>
+          </a:bodyPr>
+          <a:lstStyle/>
+          <a:p>
+            <a:r>
+              <a:rPr sz="900" b="0" i="0">
+                <a:solidFill>
+                  <a:srgbClr val="5B6472"/>
+                </a:solidFill>
+              </a:rPr>
+              <a:t>Energy-Saving RL  ·  ns-O-RAN digital twin</a:t>
+            </a:r>
+          </a:p>
+        </p:txBody>
+      </p:sp>
+      <p:sp>
+        <p:nvSpPr>
+          <p:cNvPr id="10" name="TextBox 9"/>
+          <p:cNvSpPr txBox="1"/>
+          <p:nvPr/>
+        </p:nvSpPr>
+        <p:spPr>
+          <a:xfrm>
+            <a:off x="9692640" y="6455664"/>
+            <a:ext cx="1828800" cy="320040"/>
+          </a:xfrm>
+          <a:prstGeom prst="rect">
+            <a:avLst/>
+          </a:prstGeom>
+          <a:noFill/>
+        </p:spPr>
+        <p:txBody>
+          <a:bodyPr wrap="square">
+            <a:spAutoFit/>
+          </a:bodyPr>
+          <a:lstStyle/>
+          <a:p>
+            <a:pPr algn="r"/>
+            <a:r>
+              <a:rPr sz="900" b="0" i="0">
+                <a:solidFill>
+                  <a:srgbClr val="5B6472"/>
+                </a:solidFill>
+              </a:rPr>
+              <a:t>12 / 13</a:t>
             </a:r>
           </a:p>
         </p:txBody>
@@ -3780,54 +5079,29 @@
       <p:grpSpPr/>
       <p:sp>
         <p:nvSpPr>
-          <p:cNvPr id="2" name="TextBox 1"/>
-          <p:cNvSpPr txBox="1"/>
-          <p:nvPr/>
-        </p:nvSpPr>
-        <p:spPr>
-          <a:xfrm>
-            <a:off x="548640" y="320040"/>
-            <a:ext cx="11064240" cy="914400"/>
-          </a:xfrm>
-          <a:prstGeom prst="rect">
-            <a:avLst/>
-          </a:prstGeom>
-          <a:noFill/>
-        </p:spPr>
-        <p:txBody>
-          <a:bodyPr wrap="square">
-            <a:spAutoFit/>
-          </a:bodyPr>
-          <a:lstStyle/>
-          <a:p>
-            <a:r>
-              <a:rPr sz="3000" b="1">
-                <a:solidFill>
-                  <a:srgbClr val="222222"/>
-                </a:solidFill>
-              </a:rPr>
-              <a:t>Reproducibility &amp; deliverables</a:t>
-            </a:r>
-          </a:p>
-        </p:txBody>
-      </p:sp>
-      <p:sp>
-        <p:nvSpPr>
-          <p:cNvPr id="3" name="Rectangle 2"/>
+          <p:cNvPr id="2" name="Rectangle 1"/>
           <p:cNvSpPr/>
           <p:nvPr/>
         </p:nvSpPr>
         <p:spPr>
           <a:xfrm>
-            <a:off x="566928" y="1170432"/>
-            <a:ext cx="2926080" cy="50800"/>
-          </a:xfrm>
-          <a:prstGeom prst="rect">
-            <a:avLst/>
-          </a:prstGeom>
-          <a:solidFill>
-            <a:srgbClr val="0072B2"/>
-          </a:solidFill>
+            <a:off x="0" y="0"/>
+            <a:ext cx="146304" cy="6858000"/>
+          </a:xfrm>
+          <a:prstGeom prst="rect">
+            <a:avLst/>
+          </a:prstGeom>
+          <a:gradFill>
+            <a:gsLst>
+              <a:gs pos="0">
+                <a:srgbClr val="0072B2"/>
+              </a:gs>
+              <a:gs pos="100000">
+                <a:srgbClr val="009E73"/>
+              </a:gs>
+            </a:gsLst>
+            <a:lin ang="5400000" scaled="1"/>
+          </a:gradFill>
           <a:ln>
             <a:noFill/>
           </a:ln>
@@ -3856,14 +5130,14 @@
       </p:sp>
       <p:sp>
         <p:nvSpPr>
-          <p:cNvPr id="4" name="TextBox 3"/>
+          <p:cNvPr id="3" name="TextBox 2"/>
           <p:cNvSpPr txBox="1"/>
           <p:nvPr/>
         </p:nvSpPr>
         <p:spPr>
           <a:xfrm>
-            <a:off x="640080" y="1737360"/>
-            <a:ext cx="11064240" cy="4754880"/>
+            <a:off x="658368" y="329184"/>
+            <a:ext cx="9144000" cy="320040"/>
           </a:xfrm>
           <a:prstGeom prst="rect">
             <a:avLst/>
@@ -3876,78 +5150,414 @@
           </a:bodyPr>
           <a:lstStyle/>
           <a:p>
-            <a:pPr>
+            <a:r>
+              <a:rPr sz="1250" b="1" i="0">
+                <a:solidFill>
+                  <a:srgbClr val="0072B2"/>
+                </a:solidFill>
+              </a:rPr>
+              <a:t>DELIVERABLES</a:t>
+            </a:r>
+          </a:p>
+        </p:txBody>
+      </p:sp>
+      <p:sp>
+        <p:nvSpPr>
+          <p:cNvPr id="4" name="TextBox 3"/>
+          <p:cNvSpPr txBox="1"/>
+          <p:nvPr/>
+        </p:nvSpPr>
+        <p:spPr>
+          <a:xfrm>
+            <a:off x="640080" y="566928"/>
+            <a:ext cx="11155680" cy="822960"/>
+          </a:xfrm>
+          <a:prstGeom prst="rect">
+            <a:avLst/>
+          </a:prstGeom>
+          <a:noFill/>
+        </p:spPr>
+        <p:txBody>
+          <a:bodyPr wrap="square">
+            <a:spAutoFit/>
+          </a:bodyPr>
+          <a:lstStyle/>
+          <a:p>
+            <a:r>
+              <a:rPr sz="2800" b="1" i="0">
+                <a:solidFill>
+                  <a:srgbClr val="1A2233"/>
+                </a:solidFill>
+              </a:rPr>
+              <a:t>Reproducibility &amp; deliverables</a:t>
+            </a:r>
+          </a:p>
+        </p:txBody>
+      </p:sp>
+      <p:sp>
+        <p:nvSpPr>
+          <p:cNvPr id="5" name="Rectangle 4"/>
+          <p:cNvSpPr/>
+          <p:nvPr/>
+        </p:nvSpPr>
+        <p:spPr>
+          <a:xfrm>
+            <a:off x="658368" y="1335024"/>
+            <a:ext cx="2468880" cy="68580"/>
+          </a:xfrm>
+          <a:prstGeom prst="rect">
+            <a:avLst/>
+          </a:prstGeom>
+          <a:gradFill>
+            <a:gsLst>
+              <a:gs pos="0">
+                <a:srgbClr val="0072B2"/>
+              </a:gs>
+              <a:gs pos="100000">
+                <a:srgbClr val="009E73"/>
+              </a:gs>
+            </a:gsLst>
+            <a:lin ang="0" scaled="1"/>
+          </a:gradFill>
+          <a:ln>
+            <a:noFill/>
+          </a:ln>
+        </p:spPr>
+        <p:style>
+          <a:lnRef idx="1">
+            <a:schemeClr val="accent1"/>
+          </a:lnRef>
+          <a:fillRef idx="3">
+            <a:schemeClr val="accent1"/>
+          </a:fillRef>
+          <a:effectRef idx="2">
+            <a:schemeClr val="accent1"/>
+          </a:effectRef>
+          <a:fontRef idx="minor">
+            <a:schemeClr val="lt1"/>
+          </a:fontRef>
+        </p:style>
+        <p:txBody>
+          <a:bodyPr rtlCol="0" anchor="ctr"/>
+          <a:lstStyle/>
+          <a:p>
+            <a:pPr algn="ctr"/>
+          </a:p>
+        </p:txBody>
+      </p:sp>
+      <p:sp>
+        <p:nvSpPr>
+          <p:cNvPr id="6" name="Rounded Rectangle 5"/>
+          <p:cNvSpPr/>
+          <p:nvPr/>
+        </p:nvSpPr>
+        <p:spPr>
+          <a:xfrm>
+            <a:off x="548640" y="1810512"/>
+            <a:ext cx="11091672" cy="4462272"/>
+          </a:xfrm>
+          <a:prstGeom prst="roundRect">
+            <a:avLst>
+              <a:gd name="adj" fmla="val 2800"/>
+            </a:avLst>
+          </a:prstGeom>
+          <a:solidFill>
+            <a:srgbClr val="F3F6FB"/>
+          </a:solidFill>
+          <a:ln w="12700">
+            <a:solidFill>
+              <a:srgbClr val="DDE4F0"/>
+            </a:solidFill>
+          </a:ln>
+          <a:effectLst>
+            <a:outerShdw blurRad="90000" dist="32000" dir="5400000" rotWithShape="0">
+              <a:srgbClr val="000000">
+                <a:alpha val="55000"/>
+              </a:srgbClr>
+            </a:outerShdw>
+          </a:effectLst>
+        </p:spPr>
+        <p:style>
+          <a:lnRef idx="1">
+            <a:schemeClr val="accent1"/>
+          </a:lnRef>
+          <a:fillRef idx="3">
+            <a:schemeClr val="accent1"/>
+          </a:fillRef>
+          <a:effectRef idx="2">
+            <a:schemeClr val="accent1"/>
+          </a:effectRef>
+          <a:fontRef idx="minor">
+            <a:schemeClr val="lt1"/>
+          </a:fontRef>
+        </p:style>
+        <p:txBody>
+          <a:bodyPr rtlCol="0" anchor="ctr"/>
+          <a:lstStyle/>
+          <a:p>
+            <a:pPr algn="ctr"/>
+          </a:p>
+        </p:txBody>
+      </p:sp>
+      <p:sp>
+        <p:nvSpPr>
+          <p:cNvPr id="7" name="TextBox 6"/>
+          <p:cNvSpPr txBox="1"/>
+          <p:nvPr/>
+        </p:nvSpPr>
+        <p:spPr>
+          <a:xfrm>
+            <a:off x="932688" y="2048256"/>
+            <a:ext cx="10378440" cy="4023360"/>
+          </a:xfrm>
+          <a:prstGeom prst="rect">
+            <a:avLst/>
+          </a:prstGeom>
+          <a:noFill/>
+        </p:spPr>
+        <p:txBody>
+          <a:bodyPr wrap="square" anchor="t">
+            <a:spAutoFit/>
+          </a:bodyPr>
+          <a:lstStyle/>
+          <a:p>
+            <a:pPr marL="274320" indent="-274320">
+              <a:lnSpc>
+                <a:spcPct val="112000"/>
+              </a:lnSpc>
               <a:spcAft>
-                <a:spcPts val="700"/>
+                <a:spcPts val="1000"/>
               </a:spcAft>
             </a:pPr>
             <a:r>
-              <a:rPr sz="1800">
-                <a:solidFill>
-                  <a:srgbClr val="222222"/>
-                </a:solidFill>
-              </a:rPr>
-              <a:t>• Two git repos: ns-3-mmwave-oran (the twin) + ns-o-ran-gym (gym / RL / analysis).</a:t>
-            </a:r>
-          </a:p>
-          <a:p>
-            <a:pPr>
+              <a:rPr sz="1800" b="1" i="0">
+                <a:solidFill>
+                  <a:srgbClr val="0072B2"/>
+                </a:solidFill>
+              </a:rPr>
+              <a:t>▪  </a:t>
+            </a:r>
+            <a:r>
+              <a:rPr sz="1800" b="0" i="0">
+                <a:solidFill>
+                  <a:srgbClr val="1A2233"/>
+                </a:solidFill>
+              </a:rPr>
+              <a:t>Two git repos: ns-3-mmwave-oran (the twin) + ns-o-ran-gym (gym / RL / analysis).</a:t>
+            </a:r>
+          </a:p>
+          <a:p>
+            <a:pPr marL="274320" indent="-274320">
+              <a:lnSpc>
+                <a:spcPct val="112000"/>
+              </a:lnSpc>
               <a:spcAft>
-                <a:spcPts val="700"/>
+                <a:spcPts val="1000"/>
               </a:spcAft>
             </a:pPr>
             <a:r>
-              <a:rPr sz="1800">
-                <a:solidFill>
-                  <a:srgbClr val="222222"/>
-                </a:solidFill>
-              </a:rPr>
-              <a:t>• Committed: trained model + demos + obs-stats; all scripts; figures computed live from run folders.</a:t>
-            </a:r>
-          </a:p>
-          <a:p>
-            <a:pPr>
+              <a:rPr sz="1800" b="1" i="0">
+                <a:solidFill>
+                  <a:srgbClr val="0072B2"/>
+                </a:solidFill>
+              </a:rPr>
+              <a:t>▪  </a:t>
+            </a:r>
+            <a:r>
+              <a:rPr sz="1800" b="0" i="0">
+                <a:solidFill>
+                  <a:srgbClr val="1A2233"/>
+                </a:solidFill>
+              </a:rPr>
+              <a:t>Committed: trained model + demos + obs-stats; all scripts; figures computed live from run folders.</a:t>
+            </a:r>
+          </a:p>
+          <a:p>
+            <a:pPr marL="274320" indent="-274320">
+              <a:lnSpc>
+                <a:spcPct val="112000"/>
+              </a:lnSpc>
               <a:spcAft>
-                <a:spcPts val="700"/>
+                <a:spcPts val="1000"/>
               </a:spcAft>
             </a:pPr>
             <a:r>
-              <a:rPr sz="1800">
-                <a:solidFill>
-                  <a:srgbClr val="222222"/>
-                </a:solidFill>
-              </a:rPr>
-              <a:t>• Docs (self-contained): OVERVIEW.md (how it all works), RESULTS.md (findings &amp; numbers),</a:t>
-            </a:r>
-          </a:p>
-          <a:p>
-            <a:pPr lvl="1">
+              <a:rPr sz="1800" b="1" i="0">
+                <a:solidFill>
+                  <a:srgbClr val="0072B2"/>
+                </a:solidFill>
+              </a:rPr>
+              <a:t>▪  </a:t>
+            </a:r>
+            <a:r>
+              <a:rPr sz="1800" b="0" i="0">
+                <a:solidFill>
+                  <a:srgbClr val="1A2233"/>
+                </a:solidFill>
+              </a:rPr>
+              <a:t>Docs (self-contained): OVERVIEW.md (how it all works), RESULTS.md (findings &amp; numbers),</a:t>
+            </a:r>
+          </a:p>
+          <a:p>
+            <a:pPr marL="603504" indent="-274320">
+              <a:lnSpc>
+                <a:spcPct val="112000"/>
+              </a:lnSpc>
               <a:spcAft>
-                <a:spcPts val="700"/>
+                <a:spcPts val="500"/>
               </a:spcAft>
             </a:pPr>
             <a:r>
-              <a:rPr sz="1500">
-                <a:solidFill>
-                  <a:srgbClr val="666666"/>
-                </a:solidFill>
-              </a:rPr>
-              <a:t>– REPRODUCE.md (build &amp; run from scratch), CONTEXT.md (full-journey primer).</a:t>
-            </a:r>
-          </a:p>
-          <a:p>
-            <a:pPr>
+              <a:rPr sz="1600" b="1" i="0">
+                <a:solidFill>
+                  <a:srgbClr val="009E73"/>
+                </a:solidFill>
+              </a:rPr>
+              <a:t>–  </a:t>
+            </a:r>
+            <a:r>
+              <a:rPr sz="1600" b="0" i="0">
+                <a:solidFill>
+                  <a:srgbClr val="5B6472"/>
+                </a:solidFill>
+              </a:rPr>
+              <a:t>REPRODUCE.md (build &amp; run from scratch), CONTEXT.md (full-journey primer).</a:t>
+            </a:r>
+          </a:p>
+          <a:p>
+            <a:pPr marL="274320" indent="-274320">
+              <a:lnSpc>
+                <a:spcPct val="112000"/>
+              </a:lnSpc>
               <a:spcAft>
-                <a:spcPts val="700"/>
+                <a:spcPts val="1000"/>
               </a:spcAft>
             </a:pPr>
             <a:r>
-              <a:rPr sz="1800">
-                <a:solidFill>
-                  <a:srgbClr val="222222"/>
-                </a:solidFill>
-              </a:rPr>
-              <a:t>• Figures: energy-vs-QoS tradeoff, per-metric comparison, pruning frontier, controller-over-time.</a:t>
+              <a:rPr sz="1800" b="1" i="0">
+                <a:solidFill>
+                  <a:srgbClr val="0072B2"/>
+                </a:solidFill>
+              </a:rPr>
+              <a:t>▪  </a:t>
+            </a:r>
+            <a:r>
+              <a:rPr sz="1800" b="0" i="0">
+                <a:solidFill>
+                  <a:srgbClr val="1A2233"/>
+                </a:solidFill>
+              </a:rPr>
+              <a:t>Figures: energy-vs-QoS tradeoff, per-metric comparison, pruning frontier, controller-over-time.</a:t>
+            </a:r>
+          </a:p>
+        </p:txBody>
+      </p:sp>
+      <p:sp>
+        <p:nvSpPr>
+          <p:cNvPr id="8" name="Rectangle 7"/>
+          <p:cNvSpPr/>
+          <p:nvPr/>
+        </p:nvSpPr>
+        <p:spPr>
+          <a:xfrm>
+            <a:off x="640080" y="6437376"/>
+            <a:ext cx="10881360" cy="11887"/>
+          </a:xfrm>
+          <a:prstGeom prst="rect">
+            <a:avLst/>
+          </a:prstGeom>
+          <a:solidFill>
+            <a:srgbClr val="DDE4F0"/>
+          </a:solidFill>
+          <a:ln>
+            <a:noFill/>
+          </a:ln>
+        </p:spPr>
+        <p:style>
+          <a:lnRef idx="1">
+            <a:schemeClr val="accent1"/>
+          </a:lnRef>
+          <a:fillRef idx="3">
+            <a:schemeClr val="accent1"/>
+          </a:fillRef>
+          <a:effectRef idx="2">
+            <a:schemeClr val="accent1"/>
+          </a:effectRef>
+          <a:fontRef idx="minor">
+            <a:schemeClr val="lt1"/>
+          </a:fontRef>
+        </p:style>
+        <p:txBody>
+          <a:bodyPr rtlCol="0" anchor="ctr"/>
+          <a:lstStyle/>
+          <a:p>
+            <a:pPr algn="ctr"/>
+          </a:p>
+        </p:txBody>
+      </p:sp>
+      <p:sp>
+        <p:nvSpPr>
+          <p:cNvPr id="9" name="TextBox 8"/>
+          <p:cNvSpPr txBox="1"/>
+          <p:nvPr/>
+        </p:nvSpPr>
+        <p:spPr>
+          <a:xfrm>
+            <a:off x="640080" y="6455664"/>
+            <a:ext cx="7315200" cy="320040"/>
+          </a:xfrm>
+          <a:prstGeom prst="rect">
+            <a:avLst/>
+          </a:prstGeom>
+          <a:noFill/>
+        </p:spPr>
+        <p:txBody>
+          <a:bodyPr wrap="square">
+            <a:spAutoFit/>
+          </a:bodyPr>
+          <a:lstStyle/>
+          <a:p>
+            <a:r>
+              <a:rPr sz="900" b="0" i="0">
+                <a:solidFill>
+                  <a:srgbClr val="5B6472"/>
+                </a:solidFill>
+              </a:rPr>
+              <a:t>Energy-Saving RL  ·  ns-O-RAN digital twin</a:t>
+            </a:r>
+          </a:p>
+        </p:txBody>
+      </p:sp>
+      <p:sp>
+        <p:nvSpPr>
+          <p:cNvPr id="10" name="TextBox 9"/>
+          <p:cNvSpPr txBox="1"/>
+          <p:nvPr/>
+        </p:nvSpPr>
+        <p:spPr>
+          <a:xfrm>
+            <a:off x="9692640" y="6455664"/>
+            <a:ext cx="1828800" cy="320040"/>
+          </a:xfrm>
+          <a:prstGeom prst="rect">
+            <a:avLst/>
+          </a:prstGeom>
+          <a:noFill/>
+        </p:spPr>
+        <p:txBody>
+          <a:bodyPr wrap="square">
+            <a:spAutoFit/>
+          </a:bodyPr>
+          <a:lstStyle/>
+          <a:p>
+            <a:pPr algn="r"/>
+            <a:r>
+              <a:rPr sz="900" b="0" i="0">
+                <a:solidFill>
+                  <a:srgbClr val="5B6472"/>
+                </a:solidFill>
+              </a:rPr>
+              <a:t>13 / 13</a:t>
             </a:r>
           </a:p>
         </p:txBody>
@@ -3972,54 +5582,29 @@
       <p:grpSpPr/>
       <p:sp>
         <p:nvSpPr>
-          <p:cNvPr id="2" name="TextBox 1"/>
-          <p:cNvSpPr txBox="1"/>
-          <p:nvPr/>
-        </p:nvSpPr>
-        <p:spPr>
-          <a:xfrm>
-            <a:off x="548640" y="320040"/>
-            <a:ext cx="11064240" cy="914400"/>
-          </a:xfrm>
-          <a:prstGeom prst="rect">
-            <a:avLst/>
-          </a:prstGeom>
-          <a:noFill/>
-        </p:spPr>
-        <p:txBody>
-          <a:bodyPr wrap="square">
-            <a:spAutoFit/>
-          </a:bodyPr>
-          <a:lstStyle/>
-          <a:p>
-            <a:r>
-              <a:rPr sz="3000" b="1">
-                <a:solidFill>
-                  <a:srgbClr val="222222"/>
-                </a:solidFill>
-              </a:rPr>
-              <a:t>The problem &amp; the goal</a:t>
-            </a:r>
-          </a:p>
-        </p:txBody>
-      </p:sp>
-      <p:sp>
-        <p:nvSpPr>
-          <p:cNvPr id="3" name="Rectangle 2"/>
+          <p:cNvPr id="2" name="Rectangle 1"/>
           <p:cNvSpPr/>
           <p:nvPr/>
         </p:nvSpPr>
         <p:spPr>
           <a:xfrm>
-            <a:off x="566928" y="1170432"/>
-            <a:ext cx="2926080" cy="50800"/>
-          </a:xfrm>
-          <a:prstGeom prst="rect">
-            <a:avLst/>
-          </a:prstGeom>
-          <a:solidFill>
-            <a:srgbClr val="0072B2"/>
-          </a:solidFill>
+            <a:off x="0" y="0"/>
+            <a:ext cx="146304" cy="6858000"/>
+          </a:xfrm>
+          <a:prstGeom prst="rect">
+            <a:avLst/>
+          </a:prstGeom>
+          <a:gradFill>
+            <a:gsLst>
+              <a:gs pos="0">
+                <a:srgbClr val="0072B2"/>
+              </a:gs>
+              <a:gs pos="100000">
+                <a:srgbClr val="009E73"/>
+              </a:gs>
+            </a:gsLst>
+            <a:lin ang="5400000" scaled="1"/>
+          </a:gradFill>
           <a:ln>
             <a:noFill/>
           </a:ln>
@@ -4048,14 +5633,14 @@
       </p:sp>
       <p:sp>
         <p:nvSpPr>
-          <p:cNvPr id="4" name="TextBox 3"/>
+          <p:cNvPr id="3" name="TextBox 2"/>
           <p:cNvSpPr txBox="1"/>
           <p:nvPr/>
         </p:nvSpPr>
         <p:spPr>
           <a:xfrm>
-            <a:off x="640080" y="1737360"/>
-            <a:ext cx="11064240" cy="4754880"/>
+            <a:off x="658368" y="329184"/>
+            <a:ext cx="9144000" cy="320040"/>
           </a:xfrm>
           <a:prstGeom prst="rect">
             <a:avLst/>
@@ -4068,78 +5653,414 @@
           </a:bodyPr>
           <a:lstStyle/>
           <a:p>
-            <a:pPr>
+            <a:r>
+              <a:rPr sz="1250" b="1" i="0">
+                <a:solidFill>
+                  <a:srgbClr val="0072B2"/>
+                </a:solidFill>
+              </a:rPr>
+              <a:t>CONTEXT</a:t>
+            </a:r>
+          </a:p>
+        </p:txBody>
+      </p:sp>
+      <p:sp>
+        <p:nvSpPr>
+          <p:cNvPr id="4" name="TextBox 3"/>
+          <p:cNvSpPr txBox="1"/>
+          <p:nvPr/>
+        </p:nvSpPr>
+        <p:spPr>
+          <a:xfrm>
+            <a:off x="640080" y="566928"/>
+            <a:ext cx="11155680" cy="822960"/>
+          </a:xfrm>
+          <a:prstGeom prst="rect">
+            <a:avLst/>
+          </a:prstGeom>
+          <a:noFill/>
+        </p:spPr>
+        <p:txBody>
+          <a:bodyPr wrap="square">
+            <a:spAutoFit/>
+          </a:bodyPr>
+          <a:lstStyle/>
+          <a:p>
+            <a:r>
+              <a:rPr sz="2800" b="1" i="0">
+                <a:solidFill>
+                  <a:srgbClr val="1A2233"/>
+                </a:solidFill>
+              </a:rPr>
+              <a:t>The problem &amp; the goal</a:t>
+            </a:r>
+          </a:p>
+        </p:txBody>
+      </p:sp>
+      <p:sp>
+        <p:nvSpPr>
+          <p:cNvPr id="5" name="Rectangle 4"/>
+          <p:cNvSpPr/>
+          <p:nvPr/>
+        </p:nvSpPr>
+        <p:spPr>
+          <a:xfrm>
+            <a:off x="658368" y="1335024"/>
+            <a:ext cx="2468880" cy="68580"/>
+          </a:xfrm>
+          <a:prstGeom prst="rect">
+            <a:avLst/>
+          </a:prstGeom>
+          <a:gradFill>
+            <a:gsLst>
+              <a:gs pos="0">
+                <a:srgbClr val="0072B2"/>
+              </a:gs>
+              <a:gs pos="100000">
+                <a:srgbClr val="009E73"/>
+              </a:gs>
+            </a:gsLst>
+            <a:lin ang="0" scaled="1"/>
+          </a:gradFill>
+          <a:ln>
+            <a:noFill/>
+          </a:ln>
+        </p:spPr>
+        <p:style>
+          <a:lnRef idx="1">
+            <a:schemeClr val="accent1"/>
+          </a:lnRef>
+          <a:fillRef idx="3">
+            <a:schemeClr val="accent1"/>
+          </a:fillRef>
+          <a:effectRef idx="2">
+            <a:schemeClr val="accent1"/>
+          </a:effectRef>
+          <a:fontRef idx="minor">
+            <a:schemeClr val="lt1"/>
+          </a:fontRef>
+        </p:style>
+        <p:txBody>
+          <a:bodyPr rtlCol="0" anchor="ctr"/>
+          <a:lstStyle/>
+          <a:p>
+            <a:pPr algn="ctr"/>
+          </a:p>
+        </p:txBody>
+      </p:sp>
+      <p:sp>
+        <p:nvSpPr>
+          <p:cNvPr id="6" name="Rounded Rectangle 5"/>
+          <p:cNvSpPr/>
+          <p:nvPr/>
+        </p:nvSpPr>
+        <p:spPr>
+          <a:xfrm>
+            <a:off x="548640" y="1810512"/>
+            <a:ext cx="11091672" cy="4462272"/>
+          </a:xfrm>
+          <a:prstGeom prst="roundRect">
+            <a:avLst>
+              <a:gd name="adj" fmla="val 2800"/>
+            </a:avLst>
+          </a:prstGeom>
+          <a:solidFill>
+            <a:srgbClr val="F3F6FB"/>
+          </a:solidFill>
+          <a:ln w="12700">
+            <a:solidFill>
+              <a:srgbClr val="DDE4F0"/>
+            </a:solidFill>
+          </a:ln>
+          <a:effectLst>
+            <a:outerShdw blurRad="90000" dist="32000" dir="5400000" rotWithShape="0">
+              <a:srgbClr val="000000">
+                <a:alpha val="55000"/>
+              </a:srgbClr>
+            </a:outerShdw>
+          </a:effectLst>
+        </p:spPr>
+        <p:style>
+          <a:lnRef idx="1">
+            <a:schemeClr val="accent1"/>
+          </a:lnRef>
+          <a:fillRef idx="3">
+            <a:schemeClr val="accent1"/>
+          </a:fillRef>
+          <a:effectRef idx="2">
+            <a:schemeClr val="accent1"/>
+          </a:effectRef>
+          <a:fontRef idx="minor">
+            <a:schemeClr val="lt1"/>
+          </a:fontRef>
+        </p:style>
+        <p:txBody>
+          <a:bodyPr rtlCol="0" anchor="ctr"/>
+          <a:lstStyle/>
+          <a:p>
+            <a:pPr algn="ctr"/>
+          </a:p>
+        </p:txBody>
+      </p:sp>
+      <p:sp>
+        <p:nvSpPr>
+          <p:cNvPr id="7" name="TextBox 6"/>
+          <p:cNvSpPr txBox="1"/>
+          <p:nvPr/>
+        </p:nvSpPr>
+        <p:spPr>
+          <a:xfrm>
+            <a:off x="932688" y="2048256"/>
+            <a:ext cx="10378440" cy="4023360"/>
+          </a:xfrm>
+          <a:prstGeom prst="rect">
+            <a:avLst/>
+          </a:prstGeom>
+          <a:noFill/>
+        </p:spPr>
+        <p:txBody>
+          <a:bodyPr wrap="square" anchor="t">
+            <a:spAutoFit/>
+          </a:bodyPr>
+          <a:lstStyle/>
+          <a:p>
+            <a:pPr marL="274320" indent="-274320">
+              <a:lnSpc>
+                <a:spcPct val="112000"/>
+              </a:lnSpc>
               <a:spcAft>
-                <a:spcPts val="700"/>
+                <a:spcPts val="1000"/>
               </a:spcAft>
             </a:pPr>
             <a:r>
-              <a:rPr sz="1800">
-                <a:solidFill>
-                  <a:srgbClr val="222222"/>
-                </a:solidFill>
-              </a:rPr>
-              <a:t>• 5G base stations (gNBs) draw ~600 W even when almost idle — a large, avoidable energy cost.</a:t>
-            </a:r>
-          </a:p>
-          <a:p>
-            <a:pPr>
+              <a:rPr sz="1800" b="1" i="0">
+                <a:solidFill>
+                  <a:srgbClr val="0072B2"/>
+                </a:solidFill>
+              </a:rPr>
+              <a:t>▪  </a:t>
+            </a:r>
+            <a:r>
+              <a:rPr sz="1800" b="0" i="0">
+                <a:solidFill>
+                  <a:srgbClr val="1A2233"/>
+                </a:solidFill>
+              </a:rPr>
+              <a:t>5G base stations (gNBs) draw ~600 W even when almost idle — a large, avoidable energy cost.</a:t>
+            </a:r>
+          </a:p>
+          <a:p>
+            <a:pPr marL="274320" indent="-274320">
+              <a:lnSpc>
+                <a:spcPct val="112000"/>
+              </a:lnSpc>
               <a:spcAft>
-                <a:spcPts val="700"/>
+                <a:spcPts val="1000"/>
               </a:spcAft>
             </a:pPr>
             <a:r>
-              <a:rPr sz="1800">
-                <a:solidFill>
-                  <a:srgbClr val="222222"/>
-                </a:solidFill>
-              </a:rPr>
-              <a:t>• Idea: an intelligent controller that puts unused gNBs to sleep, waking them when demand returns.</a:t>
-            </a:r>
-          </a:p>
-          <a:p>
-            <a:pPr>
+              <a:rPr sz="1800" b="1" i="0">
+                <a:solidFill>
+                  <a:srgbClr val="0072B2"/>
+                </a:solidFill>
+              </a:rPr>
+              <a:t>▪  </a:t>
+            </a:r>
+            <a:r>
+              <a:rPr sz="1800" b="0" i="0">
+                <a:solidFill>
+                  <a:srgbClr val="1A2233"/>
+                </a:solidFill>
+              </a:rPr>
+              <a:t>Idea: an intelligent controller that puts unused gNBs to sleep, waking them when demand returns.</a:t>
+            </a:r>
+          </a:p>
+          <a:p>
+            <a:pPr marL="274320" indent="-274320">
+              <a:lnSpc>
+                <a:spcPct val="112000"/>
+              </a:lnSpc>
               <a:spcAft>
-                <a:spcPts val="700"/>
+                <a:spcPts val="1000"/>
               </a:spcAft>
             </a:pPr>
             <a:r>
-              <a:rPr sz="1800">
-                <a:solidFill>
-                  <a:srgbClr val="222222"/>
-                </a:solidFill>
-              </a:rPr>
-              <a:t>• The tension: sleep too aggressively and you drop calls / lose throughput (QoS).</a:t>
-            </a:r>
-          </a:p>
-          <a:p>
-            <a:pPr>
+              <a:rPr sz="1800" b="1" i="0">
+                <a:solidFill>
+                  <a:srgbClr val="0072B2"/>
+                </a:solidFill>
+              </a:rPr>
+              <a:t>▪  </a:t>
+            </a:r>
+            <a:r>
+              <a:rPr sz="1800" b="0" i="0">
+                <a:solidFill>
+                  <a:srgbClr val="1A2233"/>
+                </a:solidFill>
+              </a:rPr>
+              <a:t>The tension: sleep too aggressively and you drop calls / lose throughput (QoS).</a:t>
+            </a:r>
+          </a:p>
+          <a:p>
+            <a:pPr marL="274320" indent="-274320">
+              <a:lnSpc>
+                <a:spcPct val="112000"/>
+              </a:lnSpc>
               <a:spcAft>
-                <a:spcPts val="700"/>
+                <a:spcPts val="1000"/>
               </a:spcAft>
             </a:pPr>
             <a:r>
-              <a:rPr sz="1800">
-                <a:solidFill>
-                  <a:srgbClr val="222222"/>
-                </a:solidFill>
-              </a:rPr>
-              <a:t>• Company goal: a reinforcement-learning (RL) controller that beats the hand-coded heuristic on the</a:t>
-            </a:r>
-          </a:p>
-          <a:p>
-            <a:pPr lvl="1">
+              <a:rPr sz="1800" b="1" i="0">
+                <a:solidFill>
+                  <a:srgbClr val="0072B2"/>
+                </a:solidFill>
+              </a:rPr>
+              <a:t>▪  </a:t>
+            </a:r>
+            <a:r>
+              <a:rPr sz="1800" b="0" i="0">
+                <a:solidFill>
+                  <a:srgbClr val="1A2233"/>
+                </a:solidFill>
+              </a:rPr>
+              <a:t>Company goal: a reinforcement-learning (RL) controller that beats the hand-coded heuristic on the</a:t>
+            </a:r>
+          </a:p>
+          <a:p>
+            <a:pPr marL="603504" indent="-274320">
+              <a:lnSpc>
+                <a:spcPct val="112000"/>
+              </a:lnSpc>
               <a:spcAft>
-                <a:spcPts val="700"/>
+                <a:spcPts val="500"/>
               </a:spcAft>
             </a:pPr>
             <a:r>
-              <a:rPr sz="1500">
-                <a:solidFill>
-                  <a:srgbClr val="666666"/>
-                </a:solidFill>
-              </a:rPr>
-              <a:t>– energy-vs-QoS tradeoff — more energy saved without hurting throughput or reliability.</a:t>
+              <a:rPr sz="1600" b="1" i="0">
+                <a:solidFill>
+                  <a:srgbClr val="009E73"/>
+                </a:solidFill>
+              </a:rPr>
+              <a:t>–  </a:t>
+            </a:r>
+            <a:r>
+              <a:rPr sz="1600" b="0" i="0">
+                <a:solidFill>
+                  <a:srgbClr val="5B6472"/>
+                </a:solidFill>
+              </a:rPr>
+              <a:t>energy-vs-QoS tradeoff — more energy saved without hurting throughput or reliability.</a:t>
+            </a:r>
+          </a:p>
+        </p:txBody>
+      </p:sp>
+      <p:sp>
+        <p:nvSpPr>
+          <p:cNvPr id="8" name="Rectangle 7"/>
+          <p:cNvSpPr/>
+          <p:nvPr/>
+        </p:nvSpPr>
+        <p:spPr>
+          <a:xfrm>
+            <a:off x="640080" y="6437376"/>
+            <a:ext cx="10881360" cy="11887"/>
+          </a:xfrm>
+          <a:prstGeom prst="rect">
+            <a:avLst/>
+          </a:prstGeom>
+          <a:solidFill>
+            <a:srgbClr val="DDE4F0"/>
+          </a:solidFill>
+          <a:ln>
+            <a:noFill/>
+          </a:ln>
+        </p:spPr>
+        <p:style>
+          <a:lnRef idx="1">
+            <a:schemeClr val="accent1"/>
+          </a:lnRef>
+          <a:fillRef idx="3">
+            <a:schemeClr val="accent1"/>
+          </a:fillRef>
+          <a:effectRef idx="2">
+            <a:schemeClr val="accent1"/>
+          </a:effectRef>
+          <a:fontRef idx="minor">
+            <a:schemeClr val="lt1"/>
+          </a:fontRef>
+        </p:style>
+        <p:txBody>
+          <a:bodyPr rtlCol="0" anchor="ctr"/>
+          <a:lstStyle/>
+          <a:p>
+            <a:pPr algn="ctr"/>
+          </a:p>
+        </p:txBody>
+      </p:sp>
+      <p:sp>
+        <p:nvSpPr>
+          <p:cNvPr id="9" name="TextBox 8"/>
+          <p:cNvSpPr txBox="1"/>
+          <p:nvPr/>
+        </p:nvSpPr>
+        <p:spPr>
+          <a:xfrm>
+            <a:off x="640080" y="6455664"/>
+            <a:ext cx="7315200" cy="320040"/>
+          </a:xfrm>
+          <a:prstGeom prst="rect">
+            <a:avLst/>
+          </a:prstGeom>
+          <a:noFill/>
+        </p:spPr>
+        <p:txBody>
+          <a:bodyPr wrap="square">
+            <a:spAutoFit/>
+          </a:bodyPr>
+          <a:lstStyle/>
+          <a:p>
+            <a:r>
+              <a:rPr sz="900" b="0" i="0">
+                <a:solidFill>
+                  <a:srgbClr val="5B6472"/>
+                </a:solidFill>
+              </a:rPr>
+              <a:t>Energy-Saving RL  ·  ns-O-RAN digital twin</a:t>
+            </a:r>
+          </a:p>
+        </p:txBody>
+      </p:sp>
+      <p:sp>
+        <p:nvSpPr>
+          <p:cNvPr id="10" name="TextBox 9"/>
+          <p:cNvSpPr txBox="1"/>
+          <p:nvPr/>
+        </p:nvSpPr>
+        <p:spPr>
+          <a:xfrm>
+            <a:off x="9692640" y="6455664"/>
+            <a:ext cx="1828800" cy="320040"/>
+          </a:xfrm>
+          <a:prstGeom prst="rect">
+            <a:avLst/>
+          </a:prstGeom>
+          <a:noFill/>
+        </p:spPr>
+        <p:txBody>
+          <a:bodyPr wrap="square">
+            <a:spAutoFit/>
+          </a:bodyPr>
+          <a:lstStyle/>
+          <a:p>
+            <a:pPr algn="r"/>
+            <a:r>
+              <a:rPr sz="900" b="0" i="0">
+                <a:solidFill>
+                  <a:srgbClr val="5B6472"/>
+                </a:solidFill>
+              </a:rPr>
+              <a:t>02 / 13</a:t>
             </a:r>
           </a:p>
         </p:txBody>
@@ -4164,54 +6085,29 @@
       <p:grpSpPr/>
       <p:sp>
         <p:nvSpPr>
-          <p:cNvPr id="2" name="TextBox 1"/>
-          <p:cNvSpPr txBox="1"/>
-          <p:nvPr/>
-        </p:nvSpPr>
-        <p:spPr>
-          <a:xfrm>
-            <a:off x="548640" y="320040"/>
-            <a:ext cx="11064240" cy="914400"/>
-          </a:xfrm>
-          <a:prstGeom prst="rect">
-            <a:avLst/>
-          </a:prstGeom>
-          <a:noFill/>
-        </p:spPr>
-        <p:txBody>
-          <a:bodyPr wrap="square">
-            <a:spAutoFit/>
-          </a:bodyPr>
-          <a:lstStyle/>
-          <a:p>
-            <a:r>
-              <a:rPr sz="3000" b="1">
-                <a:solidFill>
-                  <a:srgbClr val="222222"/>
-                </a:solidFill>
-              </a:rPr>
-              <a:t>The digital twin (what we simulate)</a:t>
-            </a:r>
-          </a:p>
-        </p:txBody>
-      </p:sp>
-      <p:sp>
-        <p:nvSpPr>
-          <p:cNvPr id="3" name="Rectangle 2"/>
+          <p:cNvPr id="2" name="Rectangle 1"/>
           <p:cNvSpPr/>
           <p:nvPr/>
         </p:nvSpPr>
         <p:spPr>
           <a:xfrm>
-            <a:off x="566928" y="1170432"/>
-            <a:ext cx="2926080" cy="50800"/>
-          </a:xfrm>
-          <a:prstGeom prst="rect">
-            <a:avLst/>
-          </a:prstGeom>
-          <a:solidFill>
-            <a:srgbClr val="0072B2"/>
-          </a:solidFill>
+            <a:off x="0" y="0"/>
+            <a:ext cx="146304" cy="6858000"/>
+          </a:xfrm>
+          <a:prstGeom prst="rect">
+            <a:avLst/>
+          </a:prstGeom>
+          <a:gradFill>
+            <a:gsLst>
+              <a:gs pos="0">
+                <a:srgbClr val="0072B2"/>
+              </a:gs>
+              <a:gs pos="100000">
+                <a:srgbClr val="009E73"/>
+              </a:gs>
+            </a:gsLst>
+            <a:lin ang="5400000" scaled="1"/>
+          </a:gradFill>
           <a:ln>
             <a:noFill/>
           </a:ln>
@@ -4240,14 +6136,14 @@
       </p:sp>
       <p:sp>
         <p:nvSpPr>
-          <p:cNvPr id="4" name="TextBox 3"/>
+          <p:cNvPr id="3" name="TextBox 2"/>
           <p:cNvSpPr txBox="1"/>
           <p:nvPr/>
         </p:nvSpPr>
         <p:spPr>
           <a:xfrm>
-            <a:off x="640080" y="1737360"/>
-            <a:ext cx="11064240" cy="4754880"/>
+            <a:off x="658368" y="329184"/>
+            <a:ext cx="9144000" cy="320040"/>
           </a:xfrm>
           <a:prstGeom prst="rect">
             <a:avLst/>
@@ -4260,78 +6156,414 @@
           </a:bodyPr>
           <a:lstStyle/>
           <a:p>
-            <a:pPr>
+            <a:r>
+              <a:rPr sz="1250" b="1" i="0">
+                <a:solidFill>
+                  <a:srgbClr val="0072B2"/>
+                </a:solidFill>
+              </a:rPr>
+              <a:t>SYSTEM</a:t>
+            </a:r>
+          </a:p>
+        </p:txBody>
+      </p:sp>
+      <p:sp>
+        <p:nvSpPr>
+          <p:cNvPr id="4" name="TextBox 3"/>
+          <p:cNvSpPr txBox="1"/>
+          <p:nvPr/>
+        </p:nvSpPr>
+        <p:spPr>
+          <a:xfrm>
+            <a:off x="640080" y="566928"/>
+            <a:ext cx="11155680" cy="822960"/>
+          </a:xfrm>
+          <a:prstGeom prst="rect">
+            <a:avLst/>
+          </a:prstGeom>
+          <a:noFill/>
+        </p:spPr>
+        <p:txBody>
+          <a:bodyPr wrap="square">
+            <a:spAutoFit/>
+          </a:bodyPr>
+          <a:lstStyle/>
+          <a:p>
+            <a:r>
+              <a:rPr sz="2800" b="1" i="0">
+                <a:solidFill>
+                  <a:srgbClr val="1A2233"/>
+                </a:solidFill>
+              </a:rPr>
+              <a:t>The digital twin (what we simulate)</a:t>
+            </a:r>
+          </a:p>
+        </p:txBody>
+      </p:sp>
+      <p:sp>
+        <p:nvSpPr>
+          <p:cNvPr id="5" name="Rectangle 4"/>
+          <p:cNvSpPr/>
+          <p:nvPr/>
+        </p:nvSpPr>
+        <p:spPr>
+          <a:xfrm>
+            <a:off x="658368" y="1335024"/>
+            <a:ext cx="2468880" cy="68580"/>
+          </a:xfrm>
+          <a:prstGeom prst="rect">
+            <a:avLst/>
+          </a:prstGeom>
+          <a:gradFill>
+            <a:gsLst>
+              <a:gs pos="0">
+                <a:srgbClr val="0072B2"/>
+              </a:gs>
+              <a:gs pos="100000">
+                <a:srgbClr val="009E73"/>
+              </a:gs>
+            </a:gsLst>
+            <a:lin ang="0" scaled="1"/>
+          </a:gradFill>
+          <a:ln>
+            <a:noFill/>
+          </a:ln>
+        </p:spPr>
+        <p:style>
+          <a:lnRef idx="1">
+            <a:schemeClr val="accent1"/>
+          </a:lnRef>
+          <a:fillRef idx="3">
+            <a:schemeClr val="accent1"/>
+          </a:fillRef>
+          <a:effectRef idx="2">
+            <a:schemeClr val="accent1"/>
+          </a:effectRef>
+          <a:fontRef idx="minor">
+            <a:schemeClr val="lt1"/>
+          </a:fontRef>
+        </p:style>
+        <p:txBody>
+          <a:bodyPr rtlCol="0" anchor="ctr"/>
+          <a:lstStyle/>
+          <a:p>
+            <a:pPr algn="ctr"/>
+          </a:p>
+        </p:txBody>
+      </p:sp>
+      <p:sp>
+        <p:nvSpPr>
+          <p:cNvPr id="6" name="Rounded Rectangle 5"/>
+          <p:cNvSpPr/>
+          <p:nvPr/>
+        </p:nvSpPr>
+        <p:spPr>
+          <a:xfrm>
+            <a:off x="548640" y="1810512"/>
+            <a:ext cx="11091672" cy="4462272"/>
+          </a:xfrm>
+          <a:prstGeom prst="roundRect">
+            <a:avLst>
+              <a:gd name="adj" fmla="val 2800"/>
+            </a:avLst>
+          </a:prstGeom>
+          <a:solidFill>
+            <a:srgbClr val="F3F6FB"/>
+          </a:solidFill>
+          <a:ln w="12700">
+            <a:solidFill>
+              <a:srgbClr val="DDE4F0"/>
+            </a:solidFill>
+          </a:ln>
+          <a:effectLst>
+            <a:outerShdw blurRad="90000" dist="32000" dir="5400000" rotWithShape="0">
+              <a:srgbClr val="000000">
+                <a:alpha val="55000"/>
+              </a:srgbClr>
+            </a:outerShdw>
+          </a:effectLst>
+        </p:spPr>
+        <p:style>
+          <a:lnRef idx="1">
+            <a:schemeClr val="accent1"/>
+          </a:lnRef>
+          <a:fillRef idx="3">
+            <a:schemeClr val="accent1"/>
+          </a:fillRef>
+          <a:effectRef idx="2">
+            <a:schemeClr val="accent1"/>
+          </a:effectRef>
+          <a:fontRef idx="minor">
+            <a:schemeClr val="lt1"/>
+          </a:fontRef>
+        </p:style>
+        <p:txBody>
+          <a:bodyPr rtlCol="0" anchor="ctr"/>
+          <a:lstStyle/>
+          <a:p>
+            <a:pPr algn="ctr"/>
+          </a:p>
+        </p:txBody>
+      </p:sp>
+      <p:sp>
+        <p:nvSpPr>
+          <p:cNvPr id="7" name="TextBox 6"/>
+          <p:cNvSpPr txBox="1"/>
+          <p:nvPr/>
+        </p:nvSpPr>
+        <p:spPr>
+          <a:xfrm>
+            <a:off x="932688" y="2048256"/>
+            <a:ext cx="10378440" cy="4023360"/>
+          </a:xfrm>
+          <a:prstGeom prst="rect">
+            <a:avLst/>
+          </a:prstGeom>
+          <a:noFill/>
+        </p:spPr>
+        <p:txBody>
+          <a:bodyPr wrap="square" anchor="t">
+            <a:spAutoFit/>
+          </a:bodyPr>
+          <a:lstStyle/>
+          <a:p>
+            <a:pPr marL="274320" indent="-274320">
+              <a:lnSpc>
+                <a:spcPct val="112000"/>
+              </a:lnSpc>
               <a:spcAft>
-                <a:spcPts val="700"/>
+                <a:spcPts val="1000"/>
               </a:spcAft>
             </a:pPr>
             <a:r>
-              <a:rPr sz="1800">
-                <a:solidFill>
-                  <a:srgbClr val="222222"/>
-                </a:solidFill>
-              </a:rPr>
-              <a:t>• ns-3 mmWave O-RAN simulator, scenario-three: 1 LTE anchor cell + 7 mmWave gNBs (can sleep), 6 users.</a:t>
-            </a:r>
-          </a:p>
-          <a:p>
-            <a:pPr>
+              <a:rPr sz="1800" b="1" i="0">
+                <a:solidFill>
+                  <a:srgbClr val="0072B2"/>
+                </a:solidFill>
+              </a:rPr>
+              <a:t>▪  </a:t>
+            </a:r>
+            <a:r>
+              <a:rPr sz="1800" b="0" i="0">
+                <a:solidFill>
+                  <a:srgbClr val="1A2233"/>
+                </a:solidFill>
+              </a:rPr>
+              <a:t>ns-3 mmWave O-RAN simulator, scenario-three: 1 LTE anchor cell + 7 mmWave gNBs (can sleep), 6 users.</a:t>
+            </a:r>
+          </a:p>
+          <a:p>
+            <a:pPr marL="274320" indent="-274320">
+              <a:lnSpc>
+                <a:spcPct val="112000"/>
+              </a:lnSpc>
               <a:spcAft>
-                <a:spcPts val="700"/>
+                <a:spcPts val="1000"/>
               </a:spcAft>
             </a:pPr>
             <a:r>
-              <a:rPr sz="1800">
-                <a:solidFill>
-                  <a:srgbClr val="222222"/>
-                </a:solidFill>
-              </a:rPr>
-              <a:t>• Traffic redesigned to 3 sharp bursts per episode (+ an always-on baseline user) — so the controller</a:t>
-            </a:r>
-          </a:p>
-          <a:p>
-            <a:pPr lvl="1">
+              <a:rPr sz="1800" b="1" i="0">
+                <a:solidFill>
+                  <a:srgbClr val="0072B2"/>
+                </a:solidFill>
+              </a:rPr>
+              <a:t>▪  </a:t>
+            </a:r>
+            <a:r>
+              <a:rPr sz="1800" b="0" i="0">
+                <a:solidFill>
+                  <a:srgbClr val="1A2233"/>
+                </a:solidFill>
+              </a:rPr>
+              <a:t>Traffic redesigned to 3 sharp bursts per episode (+ an always-on baseline user) — so the controller</a:t>
+            </a:r>
+          </a:p>
+          <a:p>
+            <a:pPr marL="603504" indent="-274320">
+              <a:lnSpc>
+                <a:spcPct val="112000"/>
+              </a:lnSpc>
               <a:spcAft>
-                <a:spcPts val="700"/>
+                <a:spcPts val="500"/>
               </a:spcAft>
             </a:pPr>
             <a:r>
-              <a:rPr sz="1500">
-                <a:solidFill>
-                  <a:srgbClr val="666666"/>
-                </a:solidFill>
-              </a:rPr>
-              <a:t>– must adapt in real time (sleep in the lulls, wake for the bursts).</a:t>
-            </a:r>
-          </a:p>
-          <a:p>
-            <a:pPr>
+              <a:rPr sz="1600" b="1" i="0">
+                <a:solidFill>
+                  <a:srgbClr val="009E73"/>
+                </a:solidFill>
+              </a:rPr>
+              <a:t>–  </a:t>
+            </a:r>
+            <a:r>
+              <a:rPr sz="1600" b="0" i="0">
+                <a:solidFill>
+                  <a:srgbClr val="5B6472"/>
+                </a:solidFill>
+              </a:rPr>
+              <a:t>must adapt in real time (sleep in the lulls, wake for the bursts).</a:t>
+            </a:r>
+          </a:p>
+          <a:p>
+            <a:pPr marL="274320" indent="-274320">
+              <a:lnSpc>
+                <a:spcPct val="112000"/>
+              </a:lnSpc>
               <a:spcAft>
-                <a:spcPts val="700"/>
+                <a:spcPts val="1000"/>
               </a:spcAft>
             </a:pPr>
             <a:r>
-              <a:rPr sz="1800">
-                <a:solidFill>
-                  <a:srgbClr val="222222"/>
-                </a:solidFill>
-              </a:rPr>
-              <a:t>• Energy model: each ON gNB = 600 W static + 400 W x utilisation; a sleeping gNB ~ 0 W.</a:t>
-            </a:r>
-          </a:p>
-          <a:p>
-            <a:pPr>
+              <a:rPr sz="1800" b="1" i="0">
+                <a:solidFill>
+                  <a:srgbClr val="0072B2"/>
+                </a:solidFill>
+              </a:rPr>
+              <a:t>▪  </a:t>
+            </a:r>
+            <a:r>
+              <a:rPr sz="1800" b="0" i="0">
+                <a:solidFill>
+                  <a:srgbClr val="1A2233"/>
+                </a:solidFill>
+              </a:rPr>
+              <a:t>Energy model: each ON gNB = 600 W static + 400 W x utilisation; a sleeping gNB ~ 0 W.</a:t>
+            </a:r>
+          </a:p>
+          <a:p>
+            <a:pPr marL="274320" indent="-274320">
+              <a:lnSpc>
+                <a:spcPct val="112000"/>
+              </a:lnSpc>
               <a:spcAft>
-                <a:spcPts val="700"/>
+                <a:spcPts val="1000"/>
               </a:spcAft>
             </a:pPr>
             <a:r>
-              <a:rPr sz="1800">
-                <a:solidFill>
-                  <a:srgbClr val="222222"/>
-                </a:solidFill>
-              </a:rPr>
-              <a:t>• Key constraint: the simulator runs ~15-20 s per 100 ms control step (CPU-bound) — this shapes everything.</a:t>
+              <a:rPr sz="1800" b="1" i="0">
+                <a:solidFill>
+                  <a:srgbClr val="0072B2"/>
+                </a:solidFill>
+              </a:rPr>
+              <a:t>▪  </a:t>
+            </a:r>
+            <a:r>
+              <a:rPr sz="1800" b="0" i="0">
+                <a:solidFill>
+                  <a:srgbClr val="1A2233"/>
+                </a:solidFill>
+              </a:rPr>
+              <a:t>Key constraint: the simulator runs ~15-20 s per 100 ms control step (CPU-bound) — this shapes everything.</a:t>
+            </a:r>
+          </a:p>
+        </p:txBody>
+      </p:sp>
+      <p:sp>
+        <p:nvSpPr>
+          <p:cNvPr id="8" name="Rectangle 7"/>
+          <p:cNvSpPr/>
+          <p:nvPr/>
+        </p:nvSpPr>
+        <p:spPr>
+          <a:xfrm>
+            <a:off x="640080" y="6437376"/>
+            <a:ext cx="10881360" cy="11887"/>
+          </a:xfrm>
+          <a:prstGeom prst="rect">
+            <a:avLst/>
+          </a:prstGeom>
+          <a:solidFill>
+            <a:srgbClr val="DDE4F0"/>
+          </a:solidFill>
+          <a:ln>
+            <a:noFill/>
+          </a:ln>
+        </p:spPr>
+        <p:style>
+          <a:lnRef idx="1">
+            <a:schemeClr val="accent1"/>
+          </a:lnRef>
+          <a:fillRef idx="3">
+            <a:schemeClr val="accent1"/>
+          </a:fillRef>
+          <a:effectRef idx="2">
+            <a:schemeClr val="accent1"/>
+          </a:effectRef>
+          <a:fontRef idx="minor">
+            <a:schemeClr val="lt1"/>
+          </a:fontRef>
+        </p:style>
+        <p:txBody>
+          <a:bodyPr rtlCol="0" anchor="ctr"/>
+          <a:lstStyle/>
+          <a:p>
+            <a:pPr algn="ctr"/>
+          </a:p>
+        </p:txBody>
+      </p:sp>
+      <p:sp>
+        <p:nvSpPr>
+          <p:cNvPr id="9" name="TextBox 8"/>
+          <p:cNvSpPr txBox="1"/>
+          <p:nvPr/>
+        </p:nvSpPr>
+        <p:spPr>
+          <a:xfrm>
+            <a:off x="640080" y="6455664"/>
+            <a:ext cx="7315200" cy="320040"/>
+          </a:xfrm>
+          <a:prstGeom prst="rect">
+            <a:avLst/>
+          </a:prstGeom>
+          <a:noFill/>
+        </p:spPr>
+        <p:txBody>
+          <a:bodyPr wrap="square">
+            <a:spAutoFit/>
+          </a:bodyPr>
+          <a:lstStyle/>
+          <a:p>
+            <a:r>
+              <a:rPr sz="900" b="0" i="0">
+                <a:solidFill>
+                  <a:srgbClr val="5B6472"/>
+                </a:solidFill>
+              </a:rPr>
+              <a:t>Energy-Saving RL  ·  ns-O-RAN digital twin</a:t>
+            </a:r>
+          </a:p>
+        </p:txBody>
+      </p:sp>
+      <p:sp>
+        <p:nvSpPr>
+          <p:cNvPr id="10" name="TextBox 9"/>
+          <p:cNvSpPr txBox="1"/>
+          <p:nvPr/>
+        </p:nvSpPr>
+        <p:spPr>
+          <a:xfrm>
+            <a:off x="9692640" y="6455664"/>
+            <a:ext cx="1828800" cy="320040"/>
+          </a:xfrm>
+          <a:prstGeom prst="rect">
+            <a:avLst/>
+          </a:prstGeom>
+          <a:noFill/>
+        </p:spPr>
+        <p:txBody>
+          <a:bodyPr wrap="square">
+            <a:spAutoFit/>
+          </a:bodyPr>
+          <a:lstStyle/>
+          <a:p>
+            <a:pPr algn="r"/>
+            <a:r>
+              <a:rPr sz="900" b="0" i="0">
+                <a:solidFill>
+                  <a:srgbClr val="5B6472"/>
+                </a:solidFill>
+              </a:rPr>
+              <a:t>03 / 13</a:t>
             </a:r>
           </a:p>
         </p:txBody>
@@ -4356,54 +6588,29 @@
       <p:grpSpPr/>
       <p:sp>
         <p:nvSpPr>
-          <p:cNvPr id="2" name="TextBox 1"/>
-          <p:cNvSpPr txBox="1"/>
-          <p:nvPr/>
-        </p:nvSpPr>
-        <p:spPr>
-          <a:xfrm>
-            <a:off x="548640" y="320040"/>
-            <a:ext cx="11064240" cy="914400"/>
-          </a:xfrm>
-          <a:prstGeom prst="rect">
-            <a:avLst/>
-          </a:prstGeom>
-          <a:noFill/>
-        </p:spPr>
-        <p:txBody>
-          <a:bodyPr wrap="square">
-            <a:spAutoFit/>
-          </a:bodyPr>
-          <a:lstStyle/>
-          <a:p>
-            <a:r>
-              <a:rPr sz="3000" b="1">
-                <a:solidFill>
-                  <a:srgbClr val="222222"/>
-                </a:solidFill>
-              </a:rPr>
-              <a:t>How it works — real-time closed-loop control</a:t>
-            </a:r>
-          </a:p>
-        </p:txBody>
-      </p:sp>
-      <p:sp>
-        <p:nvSpPr>
-          <p:cNvPr id="3" name="Rectangle 2"/>
+          <p:cNvPr id="2" name="Rectangle 1"/>
           <p:cNvSpPr/>
           <p:nvPr/>
         </p:nvSpPr>
         <p:spPr>
           <a:xfrm>
-            <a:off x="566928" y="1170432"/>
-            <a:ext cx="2926080" cy="50800"/>
-          </a:xfrm>
-          <a:prstGeom prst="rect">
-            <a:avLst/>
-          </a:prstGeom>
-          <a:solidFill>
-            <a:srgbClr val="0072B2"/>
-          </a:solidFill>
+            <a:off x="0" y="0"/>
+            <a:ext cx="146304" cy="6858000"/>
+          </a:xfrm>
+          <a:prstGeom prst="rect">
+            <a:avLst/>
+          </a:prstGeom>
+          <a:gradFill>
+            <a:gsLst>
+              <a:gs pos="0">
+                <a:srgbClr val="0072B2"/>
+              </a:gs>
+              <a:gs pos="100000">
+                <a:srgbClr val="009E73"/>
+              </a:gs>
+            </a:gsLst>
+            <a:lin ang="5400000" scaled="1"/>
+          </a:gradFill>
           <a:ln>
             <a:noFill/>
           </a:ln>
@@ -4432,14 +6639,14 @@
       </p:sp>
       <p:sp>
         <p:nvSpPr>
-          <p:cNvPr id="4" name="TextBox 3"/>
+          <p:cNvPr id="3" name="TextBox 2"/>
           <p:cNvSpPr txBox="1"/>
           <p:nvPr/>
         </p:nvSpPr>
         <p:spPr>
           <a:xfrm>
-            <a:off x="640080" y="1737360"/>
-            <a:ext cx="11064240" cy="4754880"/>
+            <a:off x="658368" y="329184"/>
+            <a:ext cx="9144000" cy="320040"/>
           </a:xfrm>
           <a:prstGeom prst="rect">
             <a:avLst/>
@@ -4452,93 +6659,440 @@
           </a:bodyPr>
           <a:lstStyle/>
           <a:p>
-            <a:pPr>
+            <a:r>
+              <a:rPr sz="1250" b="1" i="0">
+                <a:solidFill>
+                  <a:srgbClr val="0072B2"/>
+                </a:solidFill>
+              </a:rPr>
+              <a:t>SYSTEM</a:t>
+            </a:r>
+          </a:p>
+        </p:txBody>
+      </p:sp>
+      <p:sp>
+        <p:nvSpPr>
+          <p:cNvPr id="4" name="TextBox 3"/>
+          <p:cNvSpPr txBox="1"/>
+          <p:nvPr/>
+        </p:nvSpPr>
+        <p:spPr>
+          <a:xfrm>
+            <a:off x="640080" y="566928"/>
+            <a:ext cx="11155680" cy="822960"/>
+          </a:xfrm>
+          <a:prstGeom prst="rect">
+            <a:avLst/>
+          </a:prstGeom>
+          <a:noFill/>
+        </p:spPr>
+        <p:txBody>
+          <a:bodyPr wrap="square">
+            <a:spAutoFit/>
+          </a:bodyPr>
+          <a:lstStyle/>
+          <a:p>
+            <a:r>
+              <a:rPr sz="2800" b="1" i="0">
+                <a:solidFill>
+                  <a:srgbClr val="1A2233"/>
+                </a:solidFill>
+              </a:rPr>
+              <a:t>How it works — real-time closed-loop control</a:t>
+            </a:r>
+          </a:p>
+        </p:txBody>
+      </p:sp>
+      <p:sp>
+        <p:nvSpPr>
+          <p:cNvPr id="5" name="Rectangle 4"/>
+          <p:cNvSpPr/>
+          <p:nvPr/>
+        </p:nvSpPr>
+        <p:spPr>
+          <a:xfrm>
+            <a:off x="658368" y="1335024"/>
+            <a:ext cx="2468880" cy="68580"/>
+          </a:xfrm>
+          <a:prstGeom prst="rect">
+            <a:avLst/>
+          </a:prstGeom>
+          <a:gradFill>
+            <a:gsLst>
+              <a:gs pos="0">
+                <a:srgbClr val="0072B2"/>
+              </a:gs>
+              <a:gs pos="100000">
+                <a:srgbClr val="009E73"/>
+              </a:gs>
+            </a:gsLst>
+            <a:lin ang="0" scaled="1"/>
+          </a:gradFill>
+          <a:ln>
+            <a:noFill/>
+          </a:ln>
+        </p:spPr>
+        <p:style>
+          <a:lnRef idx="1">
+            <a:schemeClr val="accent1"/>
+          </a:lnRef>
+          <a:fillRef idx="3">
+            <a:schemeClr val="accent1"/>
+          </a:fillRef>
+          <a:effectRef idx="2">
+            <a:schemeClr val="accent1"/>
+          </a:effectRef>
+          <a:fontRef idx="minor">
+            <a:schemeClr val="lt1"/>
+          </a:fontRef>
+        </p:style>
+        <p:txBody>
+          <a:bodyPr rtlCol="0" anchor="ctr"/>
+          <a:lstStyle/>
+          <a:p>
+            <a:pPr algn="ctr"/>
+          </a:p>
+        </p:txBody>
+      </p:sp>
+      <p:sp>
+        <p:nvSpPr>
+          <p:cNvPr id="6" name="Rounded Rectangle 5"/>
+          <p:cNvSpPr/>
+          <p:nvPr/>
+        </p:nvSpPr>
+        <p:spPr>
+          <a:xfrm>
+            <a:off x="548640" y="1810512"/>
+            <a:ext cx="11091672" cy="4462272"/>
+          </a:xfrm>
+          <a:prstGeom prst="roundRect">
+            <a:avLst>
+              <a:gd name="adj" fmla="val 2800"/>
+            </a:avLst>
+          </a:prstGeom>
+          <a:solidFill>
+            <a:srgbClr val="F3F6FB"/>
+          </a:solidFill>
+          <a:ln w="12700">
+            <a:solidFill>
+              <a:srgbClr val="DDE4F0"/>
+            </a:solidFill>
+          </a:ln>
+          <a:effectLst>
+            <a:outerShdw blurRad="90000" dist="32000" dir="5400000" rotWithShape="0">
+              <a:srgbClr val="000000">
+                <a:alpha val="55000"/>
+              </a:srgbClr>
+            </a:outerShdw>
+          </a:effectLst>
+        </p:spPr>
+        <p:style>
+          <a:lnRef idx="1">
+            <a:schemeClr val="accent1"/>
+          </a:lnRef>
+          <a:fillRef idx="3">
+            <a:schemeClr val="accent1"/>
+          </a:fillRef>
+          <a:effectRef idx="2">
+            <a:schemeClr val="accent1"/>
+          </a:effectRef>
+          <a:fontRef idx="minor">
+            <a:schemeClr val="lt1"/>
+          </a:fontRef>
+        </p:style>
+        <p:txBody>
+          <a:bodyPr rtlCol="0" anchor="ctr"/>
+          <a:lstStyle/>
+          <a:p>
+            <a:pPr algn="ctr"/>
+          </a:p>
+        </p:txBody>
+      </p:sp>
+      <p:sp>
+        <p:nvSpPr>
+          <p:cNvPr id="7" name="TextBox 6"/>
+          <p:cNvSpPr txBox="1"/>
+          <p:nvPr/>
+        </p:nvSpPr>
+        <p:spPr>
+          <a:xfrm>
+            <a:off x="932688" y="2048256"/>
+            <a:ext cx="10378440" cy="4023360"/>
+          </a:xfrm>
+          <a:prstGeom prst="rect">
+            <a:avLst/>
+          </a:prstGeom>
+          <a:noFill/>
+        </p:spPr>
+        <p:txBody>
+          <a:bodyPr wrap="square" anchor="t">
+            <a:spAutoFit/>
+          </a:bodyPr>
+          <a:lstStyle/>
+          <a:p>
+            <a:pPr marL="274320" indent="-274320">
+              <a:lnSpc>
+                <a:spcPct val="112000"/>
+              </a:lnSpc>
               <a:spcAft>
-                <a:spcPts val="700"/>
+                <a:spcPts val="1000"/>
               </a:spcAft>
             </a:pPr>
             <a:r>
-              <a:rPr sz="1800">
-                <a:solidFill>
-                  <a:srgbClr val="222222"/>
-                </a:solidFill>
-              </a:rPr>
-              <a:t>• Every 100 ms, a handshake over shared memory (files + semaphores):</a:t>
-            </a:r>
-          </a:p>
-          <a:p>
-            <a:pPr lvl="1">
+              <a:rPr sz="1800" b="1" i="0">
+                <a:solidFill>
+                  <a:srgbClr val="0072B2"/>
+                </a:solidFill>
+              </a:rPr>
+              <a:t>▪  </a:t>
+            </a:r>
+            <a:r>
+              <a:rPr sz="1800" b="0" i="0">
+                <a:solidFill>
+                  <a:srgbClr val="1A2233"/>
+                </a:solidFill>
+              </a:rPr>
+              <a:t>Every 100 ms, a handshake over shared memory (files + semaphores):</a:t>
+            </a:r>
+          </a:p>
+          <a:p>
+            <a:pPr marL="603504" indent="-274320">
+              <a:lnSpc>
+                <a:spcPct val="112000"/>
+              </a:lnSpc>
               <a:spcAft>
-                <a:spcPts val="700"/>
+                <a:spcPts val="500"/>
               </a:spcAft>
             </a:pPr>
             <a:r>
-              <a:rPr sz="1500">
-                <a:solidFill>
-                  <a:srgbClr val="666666"/>
-                </a:solidFill>
-              </a:rPr>
-              <a:t>– ns-3 emits per-cell KPMs (load, throughput, dropped calls) -&gt; a 61-number observation.</a:t>
-            </a:r>
-          </a:p>
-          <a:p>
-            <a:pPr lvl="1">
+              <a:rPr sz="1600" b="1" i="0">
+                <a:solidFill>
+                  <a:srgbClr val="009E73"/>
+                </a:solidFill>
+              </a:rPr>
+              <a:t>–  </a:t>
+            </a:r>
+            <a:r>
+              <a:rPr sz="1600" b="0" i="0">
+                <a:solidFill>
+                  <a:srgbClr val="5B6472"/>
+                </a:solidFill>
+              </a:rPr>
+              <a:t>ns-3 emits per-cell KPMs (load, throughput, dropped calls) -&gt; a 61-number observation.</a:t>
+            </a:r>
+          </a:p>
+          <a:p>
+            <a:pPr marL="603504" indent="-274320">
+              <a:lnSpc>
+                <a:spcPct val="112000"/>
+              </a:lnSpc>
               <a:spcAft>
-                <a:spcPts val="700"/>
+                <a:spcPts val="500"/>
               </a:spcAft>
             </a:pPr>
             <a:r>
-              <a:rPr sz="1500">
-                <a:solidFill>
-                  <a:srgbClr val="666666"/>
-                </a:solidFill>
-              </a:rPr>
-              <a:t>– the controller picks a 7-bit ON/OFF action (one bit per gNB; anchor always ON).</a:t>
-            </a:r>
-          </a:p>
-          <a:p>
-            <a:pPr lvl="1">
+              <a:rPr sz="1600" b="1" i="0">
+                <a:solidFill>
+                  <a:srgbClr val="009E73"/>
+                </a:solidFill>
+              </a:rPr>
+              <a:t>–  </a:t>
+            </a:r>
+            <a:r>
+              <a:rPr sz="1600" b="0" i="0">
+                <a:solidFill>
+                  <a:srgbClr val="5B6472"/>
+                </a:solidFill>
+              </a:rPr>
+              <a:t>the controller picks a 7-bit ON/OFF action (one bit per gNB; anchor always ON).</a:t>
+            </a:r>
+          </a:p>
+          <a:p>
+            <a:pPr marL="603504" indent="-274320">
+              <a:lnSpc>
+                <a:spcPct val="112000"/>
+              </a:lnSpc>
               <a:spcAft>
-                <a:spcPts val="700"/>
+                <a:spcPts val="500"/>
               </a:spcAft>
             </a:pPr>
             <a:r>
-              <a:rPr sz="1500">
-                <a:solidFill>
-                  <a:srgbClr val="666666"/>
-                </a:solidFill>
-              </a:rPr>
-              <a:t>– the action is written back; ns-3 applies it and advances 100 ms.</a:t>
-            </a:r>
-          </a:p>
-          <a:p>
-            <a:pPr>
+              <a:rPr sz="1600" b="1" i="0">
+                <a:solidFill>
+                  <a:srgbClr val="009E73"/>
+                </a:solidFill>
+              </a:rPr>
+              <a:t>–  </a:t>
+            </a:r>
+            <a:r>
+              <a:rPr sz="1600" b="0" i="0">
+                <a:solidFill>
+                  <a:srgbClr val="5B6472"/>
+                </a:solidFill>
+              </a:rPr>
+              <a:t>the action is written back; ns-3 applies it and advances 100 ms.</a:t>
+            </a:r>
+          </a:p>
+          <a:p>
+            <a:pPr marL="274320" indent="-274320">
+              <a:lnSpc>
+                <a:spcPct val="112000"/>
+              </a:lnSpc>
               <a:spcAft>
-                <a:spcPts val="700"/>
+                <a:spcPts val="1000"/>
               </a:spcAft>
             </a:pPr>
             <a:r>
-              <a:rPr sz="1800">
-                <a:solidFill>
-                  <a:srgbClr val="222222"/>
-                </a:solidFill>
-              </a:rPr>
-              <a:t>• Reward the RL optimises:  throughput(Mbps) - energy(kW) - 2 x dropped-calls(RLF).</a:t>
-            </a:r>
-          </a:p>
-          <a:p>
-            <a:pPr>
+              <a:rPr sz="1800" b="1" i="0">
+                <a:solidFill>
+                  <a:srgbClr val="0072B2"/>
+                </a:solidFill>
+              </a:rPr>
+              <a:t>▪  </a:t>
+            </a:r>
+            <a:r>
+              <a:rPr sz="1800" b="0" i="0">
+                <a:solidFill>
+                  <a:srgbClr val="1A2233"/>
+                </a:solidFill>
+              </a:rPr>
+              <a:t>Reward the RL optimises:  throughput(Mbps) - energy(kW) - 2 x dropped-calls(RLF).</a:t>
+            </a:r>
+          </a:p>
+          <a:p>
+            <a:pPr marL="274320" indent="-274320">
+              <a:lnSpc>
+                <a:spcPct val="112000"/>
+              </a:lnSpc>
               <a:spcAft>
-                <a:spcPts val="700"/>
+                <a:spcPts val="1000"/>
               </a:spcAft>
             </a:pPr>
             <a:r>
-              <a:rPr sz="1800">
-                <a:solidFill>
-                  <a:srgbClr val="222222"/>
-                </a:solidFill>
-              </a:rPr>
-              <a:t>• The controller plays the role of an O-RAN 'xApp'; we drive the sim directly (no live RIC needed).</a:t>
+              <a:rPr sz="1800" b="1" i="0">
+                <a:solidFill>
+                  <a:srgbClr val="0072B2"/>
+                </a:solidFill>
+              </a:rPr>
+              <a:t>▪  </a:t>
+            </a:r>
+            <a:r>
+              <a:rPr sz="1800" b="0" i="0">
+                <a:solidFill>
+                  <a:srgbClr val="1A2233"/>
+                </a:solidFill>
+              </a:rPr>
+              <a:t>The controller plays the role of an O-RAN 'xApp'; we drive the sim directly (no live RIC needed).</a:t>
+            </a:r>
+          </a:p>
+        </p:txBody>
+      </p:sp>
+      <p:sp>
+        <p:nvSpPr>
+          <p:cNvPr id="8" name="Rectangle 7"/>
+          <p:cNvSpPr/>
+          <p:nvPr/>
+        </p:nvSpPr>
+        <p:spPr>
+          <a:xfrm>
+            <a:off x="640080" y="6437376"/>
+            <a:ext cx="10881360" cy="11887"/>
+          </a:xfrm>
+          <a:prstGeom prst="rect">
+            <a:avLst/>
+          </a:prstGeom>
+          <a:solidFill>
+            <a:srgbClr val="DDE4F0"/>
+          </a:solidFill>
+          <a:ln>
+            <a:noFill/>
+          </a:ln>
+        </p:spPr>
+        <p:style>
+          <a:lnRef idx="1">
+            <a:schemeClr val="accent1"/>
+          </a:lnRef>
+          <a:fillRef idx="3">
+            <a:schemeClr val="accent1"/>
+          </a:fillRef>
+          <a:effectRef idx="2">
+            <a:schemeClr val="accent1"/>
+          </a:effectRef>
+          <a:fontRef idx="minor">
+            <a:schemeClr val="lt1"/>
+          </a:fontRef>
+        </p:style>
+        <p:txBody>
+          <a:bodyPr rtlCol="0" anchor="ctr"/>
+          <a:lstStyle/>
+          <a:p>
+            <a:pPr algn="ctr"/>
+          </a:p>
+        </p:txBody>
+      </p:sp>
+      <p:sp>
+        <p:nvSpPr>
+          <p:cNvPr id="9" name="TextBox 8"/>
+          <p:cNvSpPr txBox="1"/>
+          <p:nvPr/>
+        </p:nvSpPr>
+        <p:spPr>
+          <a:xfrm>
+            <a:off x="640080" y="6455664"/>
+            <a:ext cx="7315200" cy="320040"/>
+          </a:xfrm>
+          <a:prstGeom prst="rect">
+            <a:avLst/>
+          </a:prstGeom>
+          <a:noFill/>
+        </p:spPr>
+        <p:txBody>
+          <a:bodyPr wrap="square">
+            <a:spAutoFit/>
+          </a:bodyPr>
+          <a:lstStyle/>
+          <a:p>
+            <a:r>
+              <a:rPr sz="900" b="0" i="0">
+                <a:solidFill>
+                  <a:srgbClr val="5B6472"/>
+                </a:solidFill>
+              </a:rPr>
+              <a:t>Energy-Saving RL  ·  ns-O-RAN digital twin</a:t>
+            </a:r>
+          </a:p>
+        </p:txBody>
+      </p:sp>
+      <p:sp>
+        <p:nvSpPr>
+          <p:cNvPr id="10" name="TextBox 9"/>
+          <p:cNvSpPr txBox="1"/>
+          <p:nvPr/>
+        </p:nvSpPr>
+        <p:spPr>
+          <a:xfrm>
+            <a:off x="9692640" y="6455664"/>
+            <a:ext cx="1828800" cy="320040"/>
+          </a:xfrm>
+          <a:prstGeom prst="rect">
+            <a:avLst/>
+          </a:prstGeom>
+          <a:noFill/>
+        </p:spPr>
+        <p:txBody>
+          <a:bodyPr wrap="square">
+            <a:spAutoFit/>
+          </a:bodyPr>
+          <a:lstStyle/>
+          <a:p>
+            <a:pPr algn="r"/>
+            <a:r>
+              <a:rPr sz="900" b="0" i="0">
+                <a:solidFill>
+                  <a:srgbClr val="5B6472"/>
+                </a:solidFill>
+              </a:rPr>
+              <a:t>04 / 13</a:t>
             </a:r>
           </a:p>
         </p:txBody>
@@ -4563,54 +7117,29 @@
       <p:grpSpPr/>
       <p:sp>
         <p:nvSpPr>
-          <p:cNvPr id="2" name="TextBox 1"/>
-          <p:cNvSpPr txBox="1"/>
-          <p:nvPr/>
-        </p:nvSpPr>
-        <p:spPr>
-          <a:xfrm>
-            <a:off x="548640" y="320040"/>
-            <a:ext cx="11064240" cy="914400"/>
-          </a:xfrm>
-          <a:prstGeom prst="rect">
-            <a:avLst/>
-          </a:prstGeom>
-          <a:noFill/>
-        </p:spPr>
-        <p:txBody>
-          <a:bodyPr wrap="square">
-            <a:spAutoFit/>
-          </a:bodyPr>
-          <a:lstStyle/>
-          <a:p>
-            <a:r>
-              <a:rPr sz="3000" b="1">
-                <a:solidFill>
-                  <a:srgbClr val="222222"/>
-                </a:solidFill>
-              </a:rPr>
-              <a:t>The controllers we compared</a:t>
-            </a:r>
-          </a:p>
-        </p:txBody>
-      </p:sp>
-      <p:sp>
-        <p:nvSpPr>
-          <p:cNvPr id="3" name="Rectangle 2"/>
+          <p:cNvPr id="2" name="Rectangle 1"/>
           <p:cNvSpPr/>
           <p:nvPr/>
         </p:nvSpPr>
         <p:spPr>
           <a:xfrm>
-            <a:off x="566928" y="1170432"/>
-            <a:ext cx="2926080" cy="50800"/>
-          </a:xfrm>
-          <a:prstGeom prst="rect">
-            <a:avLst/>
-          </a:prstGeom>
-          <a:solidFill>
-            <a:srgbClr val="0072B2"/>
-          </a:solidFill>
+            <a:off x="0" y="0"/>
+            <a:ext cx="146304" cy="6858000"/>
+          </a:xfrm>
+          <a:prstGeom prst="rect">
+            <a:avLst/>
+          </a:prstGeom>
+          <a:gradFill>
+            <a:gsLst>
+              <a:gs pos="0">
+                <a:srgbClr val="0072B2"/>
+              </a:gs>
+              <a:gs pos="100000">
+                <a:srgbClr val="009E73"/>
+              </a:gs>
+            </a:gsLst>
+            <a:lin ang="5400000" scaled="1"/>
+          </a:gradFill>
           <a:ln>
             <a:noFill/>
           </a:ln>
@@ -4639,14 +7168,14 @@
       </p:sp>
       <p:sp>
         <p:nvSpPr>
-          <p:cNvPr id="4" name="TextBox 3"/>
+          <p:cNvPr id="3" name="TextBox 2"/>
           <p:cNvSpPr txBox="1"/>
           <p:nvPr/>
         </p:nvSpPr>
         <p:spPr>
           <a:xfrm>
-            <a:off x="640080" y="1737360"/>
-            <a:ext cx="11064240" cy="4754880"/>
+            <a:off x="658368" y="329184"/>
+            <a:ext cx="9144000" cy="320040"/>
           </a:xfrm>
           <a:prstGeom prst="rect">
             <a:avLst/>
@@ -4659,78 +7188,414 @@
           </a:bodyPr>
           <a:lstStyle/>
           <a:p>
-            <a:pPr>
+            <a:r>
+              <a:rPr sz="1250" b="1" i="0">
+                <a:solidFill>
+                  <a:srgbClr val="0072B2"/>
+                </a:solidFill>
+              </a:rPr>
+              <a:t>METHOD</a:t>
+            </a:r>
+          </a:p>
+        </p:txBody>
+      </p:sp>
+      <p:sp>
+        <p:nvSpPr>
+          <p:cNvPr id="4" name="TextBox 3"/>
+          <p:cNvSpPr txBox="1"/>
+          <p:nvPr/>
+        </p:nvSpPr>
+        <p:spPr>
+          <a:xfrm>
+            <a:off x="640080" y="566928"/>
+            <a:ext cx="11155680" cy="822960"/>
+          </a:xfrm>
+          <a:prstGeom prst="rect">
+            <a:avLst/>
+          </a:prstGeom>
+          <a:noFill/>
+        </p:spPr>
+        <p:txBody>
+          <a:bodyPr wrap="square">
+            <a:spAutoFit/>
+          </a:bodyPr>
+          <a:lstStyle/>
+          <a:p>
+            <a:r>
+              <a:rPr sz="2800" b="1" i="0">
+                <a:solidFill>
+                  <a:srgbClr val="1A2233"/>
+                </a:solidFill>
+              </a:rPr>
+              <a:t>The controllers we compared</a:t>
+            </a:r>
+          </a:p>
+        </p:txBody>
+      </p:sp>
+      <p:sp>
+        <p:nvSpPr>
+          <p:cNvPr id="5" name="Rectangle 4"/>
+          <p:cNvSpPr/>
+          <p:nvPr/>
+        </p:nvSpPr>
+        <p:spPr>
+          <a:xfrm>
+            <a:off x="658368" y="1335024"/>
+            <a:ext cx="2468880" cy="68580"/>
+          </a:xfrm>
+          <a:prstGeom prst="rect">
+            <a:avLst/>
+          </a:prstGeom>
+          <a:gradFill>
+            <a:gsLst>
+              <a:gs pos="0">
+                <a:srgbClr val="0072B2"/>
+              </a:gs>
+              <a:gs pos="100000">
+                <a:srgbClr val="009E73"/>
+              </a:gs>
+            </a:gsLst>
+            <a:lin ang="0" scaled="1"/>
+          </a:gradFill>
+          <a:ln>
+            <a:noFill/>
+          </a:ln>
+        </p:spPr>
+        <p:style>
+          <a:lnRef idx="1">
+            <a:schemeClr val="accent1"/>
+          </a:lnRef>
+          <a:fillRef idx="3">
+            <a:schemeClr val="accent1"/>
+          </a:fillRef>
+          <a:effectRef idx="2">
+            <a:schemeClr val="accent1"/>
+          </a:effectRef>
+          <a:fontRef idx="minor">
+            <a:schemeClr val="lt1"/>
+          </a:fontRef>
+        </p:style>
+        <p:txBody>
+          <a:bodyPr rtlCol="0" anchor="ctr"/>
+          <a:lstStyle/>
+          <a:p>
+            <a:pPr algn="ctr"/>
+          </a:p>
+        </p:txBody>
+      </p:sp>
+      <p:sp>
+        <p:nvSpPr>
+          <p:cNvPr id="6" name="Rounded Rectangle 5"/>
+          <p:cNvSpPr/>
+          <p:nvPr/>
+        </p:nvSpPr>
+        <p:spPr>
+          <a:xfrm>
+            <a:off x="548640" y="1810512"/>
+            <a:ext cx="11091672" cy="4462272"/>
+          </a:xfrm>
+          <a:prstGeom prst="roundRect">
+            <a:avLst>
+              <a:gd name="adj" fmla="val 2800"/>
+            </a:avLst>
+          </a:prstGeom>
+          <a:solidFill>
+            <a:srgbClr val="F3F6FB"/>
+          </a:solidFill>
+          <a:ln w="12700">
+            <a:solidFill>
+              <a:srgbClr val="DDE4F0"/>
+            </a:solidFill>
+          </a:ln>
+          <a:effectLst>
+            <a:outerShdw blurRad="90000" dist="32000" dir="5400000" rotWithShape="0">
+              <a:srgbClr val="000000">
+                <a:alpha val="55000"/>
+              </a:srgbClr>
+            </a:outerShdw>
+          </a:effectLst>
+        </p:spPr>
+        <p:style>
+          <a:lnRef idx="1">
+            <a:schemeClr val="accent1"/>
+          </a:lnRef>
+          <a:fillRef idx="3">
+            <a:schemeClr val="accent1"/>
+          </a:fillRef>
+          <a:effectRef idx="2">
+            <a:schemeClr val="accent1"/>
+          </a:effectRef>
+          <a:fontRef idx="minor">
+            <a:schemeClr val="lt1"/>
+          </a:fontRef>
+        </p:style>
+        <p:txBody>
+          <a:bodyPr rtlCol="0" anchor="ctr"/>
+          <a:lstStyle/>
+          <a:p>
+            <a:pPr algn="ctr"/>
+          </a:p>
+        </p:txBody>
+      </p:sp>
+      <p:sp>
+        <p:nvSpPr>
+          <p:cNvPr id="7" name="TextBox 6"/>
+          <p:cNvSpPr txBox="1"/>
+          <p:nvPr/>
+        </p:nvSpPr>
+        <p:spPr>
+          <a:xfrm>
+            <a:off x="932688" y="2048256"/>
+            <a:ext cx="10378440" cy="4023360"/>
+          </a:xfrm>
+          <a:prstGeom prst="rect">
+            <a:avLst/>
+          </a:prstGeom>
+          <a:noFill/>
+        </p:spPr>
+        <p:txBody>
+          <a:bodyPr wrap="square" anchor="t">
+            <a:spAutoFit/>
+          </a:bodyPr>
+          <a:lstStyle/>
+          <a:p>
+            <a:pPr marL="274320" indent="-274320">
+              <a:lnSpc>
+                <a:spcPct val="112000"/>
+              </a:lnSpc>
               <a:spcAft>
-                <a:spcPts val="700"/>
+                <a:spcPts val="1000"/>
               </a:spcAft>
             </a:pPr>
             <a:r>
-              <a:rPr sz="1800">
-                <a:solidFill>
-                  <a:srgbClr val="222222"/>
-                </a:solidFill>
-              </a:rPr>
-              <a:t>• Heuristic (TwinHeuristic) - the company baseline: load-adaptive, sleeps idle cells, wakes on neighbour load.</a:t>
-            </a:r>
-          </a:p>
-          <a:p>
-            <a:pPr>
+              <a:rPr sz="1800" b="1" i="0">
+                <a:solidFill>
+                  <a:srgbClr val="0072B2"/>
+                </a:solidFill>
+              </a:rPr>
+              <a:t>▪  </a:t>
+            </a:r>
+            <a:r>
+              <a:rPr sz="1800" b="0" i="0">
+                <a:solidFill>
+                  <a:srgbClr val="1A2233"/>
+                </a:solidFill>
+              </a:rPr>
+              <a:t>Heuristic (TwinHeuristic) - the company baseline: load-adaptive, sleeps idle cells, wakes on neighbour load.</a:t>
+            </a:r>
+          </a:p>
+          <a:p>
+            <a:pPr marL="274320" indent="-274320">
+              <a:lnSpc>
+                <a:spcPct val="112000"/>
+              </a:lnSpc>
               <a:spcAft>
-                <a:spcPts val="700"/>
+                <a:spcPts val="1000"/>
               </a:spcAft>
             </a:pPr>
             <a:r>
-              <a:rPr sz="1800">
-                <a:solidFill>
-                  <a:srgbClr val="222222"/>
-                </a:solidFill>
-              </a:rPr>
-              <a:t>• Behaviour Cloning (BC) - a neural net trained to copy the heuristic (reached 100% match).</a:t>
-            </a:r>
-          </a:p>
-          <a:p>
-            <a:pPr>
+              <a:rPr sz="1800" b="1" i="0">
+                <a:solidFill>
+                  <a:srgbClr val="0072B2"/>
+                </a:solidFill>
+              </a:rPr>
+              <a:t>▪  </a:t>
+            </a:r>
+            <a:r>
+              <a:rPr sz="1800" b="0" i="0">
+                <a:solidFill>
+                  <a:srgbClr val="1A2233"/>
+                </a:solidFill>
+              </a:rPr>
+              <a:t>Behaviour Cloning (BC) - a neural net trained to copy the heuristic (reached 100% match).</a:t>
+            </a:r>
+          </a:p>
+          <a:p>
+            <a:pPr marL="274320" indent="-274320">
+              <a:lnSpc>
+                <a:spcPct val="112000"/>
+              </a:lnSpc>
               <a:spcAft>
-                <a:spcPts val="700"/>
+                <a:spcPts val="1000"/>
               </a:spcAft>
             </a:pPr>
             <a:r>
-              <a:rPr sz="1800">
-                <a:solidFill>
-                  <a:srgbClr val="222222"/>
-                </a:solidFill>
-              </a:rPr>
-              <a:t>• PPO (reinforcement learning) - warm-started from BC, then fine-tuned on the reward. The one that can surpass.</a:t>
-            </a:r>
-          </a:p>
-          <a:p>
-            <a:pPr>
+              <a:rPr sz="1800" b="1" i="0">
+                <a:solidFill>
+                  <a:srgbClr val="0072B2"/>
+                </a:solidFill>
+              </a:rPr>
+              <a:t>▪  </a:t>
+            </a:r>
+            <a:r>
+              <a:rPr sz="1800" b="0" i="0">
+                <a:solidFill>
+                  <a:srgbClr val="1A2233"/>
+                </a:solidFill>
+              </a:rPr>
+              <a:t>PPO (reinforcement learning) - warm-started from BC, then fine-tuned on the reward. The one that can surpass.</a:t>
+            </a:r>
+          </a:p>
+          <a:p>
+            <a:pPr marL="274320" indent="-274320">
+              <a:lnSpc>
+                <a:spcPct val="112000"/>
+              </a:lnSpc>
               <a:spcAft>
-                <a:spcPts val="700"/>
+                <a:spcPts val="1000"/>
               </a:spcAft>
             </a:pPr>
             <a:r>
-              <a:rPr sz="1800">
-                <a:solidFill>
-                  <a:srgbClr val="222222"/>
-                </a:solidFill>
-              </a:rPr>
-              <a:t>• Pruning controller - an aggressive energy-saver with a tunable 'grace' dial (energy-vs-reliability).</a:t>
-            </a:r>
-          </a:p>
-          <a:p>
-            <a:pPr>
+              <a:rPr sz="1800" b="1" i="0">
+                <a:solidFill>
+                  <a:srgbClr val="0072B2"/>
+                </a:solidFill>
+              </a:rPr>
+              <a:t>▪  </a:t>
+            </a:r>
+            <a:r>
+              <a:rPr sz="1800" b="0" i="0">
+                <a:solidFill>
+                  <a:srgbClr val="1A2233"/>
+                </a:solidFill>
+              </a:rPr>
+              <a:t>Pruning controller - an aggressive energy-saver with a tunable 'grace' dial (energy-vs-reliability).</a:t>
+            </a:r>
+          </a:p>
+          <a:p>
+            <a:pPr marL="274320" indent="-274320">
+              <a:lnSpc>
+                <a:spcPct val="112000"/>
+              </a:lnSpc>
               <a:spcAft>
-                <a:spcPts val="700"/>
+                <a:spcPts val="1000"/>
               </a:spcAft>
             </a:pPr>
             <a:r>
-              <a:rPr sz="1800">
-                <a:solidFill>
-                  <a:srgbClr val="222222"/>
-                </a:solidFill>
-              </a:rPr>
-              <a:t>• (ns-3's own built-in heuristic is quota-driven and can't adapt to load - hence the custom one.)</a:t>
+              <a:rPr sz="1800" b="1" i="0">
+                <a:solidFill>
+                  <a:srgbClr val="0072B2"/>
+                </a:solidFill>
+              </a:rPr>
+              <a:t>▪  </a:t>
+            </a:r>
+            <a:r>
+              <a:rPr sz="1800" b="0" i="0">
+                <a:solidFill>
+                  <a:srgbClr val="1A2233"/>
+                </a:solidFill>
+              </a:rPr>
+              <a:t>(ns-3's own built-in heuristic is quota-driven and can't adapt to load - hence the custom one.)</a:t>
+            </a:r>
+          </a:p>
+        </p:txBody>
+      </p:sp>
+      <p:sp>
+        <p:nvSpPr>
+          <p:cNvPr id="8" name="Rectangle 7"/>
+          <p:cNvSpPr/>
+          <p:nvPr/>
+        </p:nvSpPr>
+        <p:spPr>
+          <a:xfrm>
+            <a:off x="640080" y="6437376"/>
+            <a:ext cx="10881360" cy="11887"/>
+          </a:xfrm>
+          <a:prstGeom prst="rect">
+            <a:avLst/>
+          </a:prstGeom>
+          <a:solidFill>
+            <a:srgbClr val="DDE4F0"/>
+          </a:solidFill>
+          <a:ln>
+            <a:noFill/>
+          </a:ln>
+        </p:spPr>
+        <p:style>
+          <a:lnRef idx="1">
+            <a:schemeClr val="accent1"/>
+          </a:lnRef>
+          <a:fillRef idx="3">
+            <a:schemeClr val="accent1"/>
+          </a:fillRef>
+          <a:effectRef idx="2">
+            <a:schemeClr val="accent1"/>
+          </a:effectRef>
+          <a:fontRef idx="minor">
+            <a:schemeClr val="lt1"/>
+          </a:fontRef>
+        </p:style>
+        <p:txBody>
+          <a:bodyPr rtlCol="0" anchor="ctr"/>
+          <a:lstStyle/>
+          <a:p>
+            <a:pPr algn="ctr"/>
+          </a:p>
+        </p:txBody>
+      </p:sp>
+      <p:sp>
+        <p:nvSpPr>
+          <p:cNvPr id="9" name="TextBox 8"/>
+          <p:cNvSpPr txBox="1"/>
+          <p:nvPr/>
+        </p:nvSpPr>
+        <p:spPr>
+          <a:xfrm>
+            <a:off x="640080" y="6455664"/>
+            <a:ext cx="7315200" cy="320040"/>
+          </a:xfrm>
+          <a:prstGeom prst="rect">
+            <a:avLst/>
+          </a:prstGeom>
+          <a:noFill/>
+        </p:spPr>
+        <p:txBody>
+          <a:bodyPr wrap="square">
+            <a:spAutoFit/>
+          </a:bodyPr>
+          <a:lstStyle/>
+          <a:p>
+            <a:r>
+              <a:rPr sz="900" b="0" i="0">
+                <a:solidFill>
+                  <a:srgbClr val="5B6472"/>
+                </a:solidFill>
+              </a:rPr>
+              <a:t>Energy-Saving RL  ·  ns-O-RAN digital twin</a:t>
+            </a:r>
+          </a:p>
+        </p:txBody>
+      </p:sp>
+      <p:sp>
+        <p:nvSpPr>
+          <p:cNvPr id="10" name="TextBox 9"/>
+          <p:cNvSpPr txBox="1"/>
+          <p:nvPr/>
+        </p:nvSpPr>
+        <p:spPr>
+          <a:xfrm>
+            <a:off x="9692640" y="6455664"/>
+            <a:ext cx="1828800" cy="320040"/>
+          </a:xfrm>
+          <a:prstGeom prst="rect">
+            <a:avLst/>
+          </a:prstGeom>
+          <a:noFill/>
+        </p:spPr>
+        <p:txBody>
+          <a:bodyPr wrap="square">
+            <a:spAutoFit/>
+          </a:bodyPr>
+          <a:lstStyle/>
+          <a:p>
+            <a:pPr algn="r"/>
+            <a:r>
+              <a:rPr sz="900" b="0" i="0">
+                <a:solidFill>
+                  <a:srgbClr val="5B6472"/>
+                </a:solidFill>
+              </a:rPr>
+              <a:t>05 / 13</a:t>
             </a:r>
           </a:p>
         </p:txBody>
@@ -4755,54 +7620,29 @@
       <p:grpSpPr/>
       <p:sp>
         <p:nvSpPr>
-          <p:cNvPr id="2" name="TextBox 1"/>
-          <p:cNvSpPr txBox="1"/>
-          <p:nvPr/>
-        </p:nvSpPr>
-        <p:spPr>
-          <a:xfrm>
-            <a:off x="548640" y="320040"/>
-            <a:ext cx="11064240" cy="914400"/>
-          </a:xfrm>
-          <a:prstGeom prst="rect">
-            <a:avLst/>
-          </a:prstGeom>
-          <a:noFill/>
-        </p:spPr>
-        <p:txBody>
-          <a:bodyPr wrap="square">
-            <a:spAutoFit/>
-          </a:bodyPr>
-          <a:lstStyle/>
-          <a:p>
-            <a:r>
-              <a:rPr sz="3000" b="1">
-                <a:solidFill>
-                  <a:srgbClr val="222222"/>
-                </a:solidFill>
-              </a:rPr>
-              <a:t>The learning pipeline</a:t>
-            </a:r>
-          </a:p>
-        </p:txBody>
-      </p:sp>
-      <p:sp>
-        <p:nvSpPr>
-          <p:cNvPr id="3" name="Rectangle 2"/>
+          <p:cNvPr id="2" name="Rectangle 1"/>
           <p:cNvSpPr/>
           <p:nvPr/>
         </p:nvSpPr>
         <p:spPr>
           <a:xfrm>
-            <a:off x="566928" y="1170432"/>
-            <a:ext cx="2926080" cy="50800"/>
-          </a:xfrm>
-          <a:prstGeom prst="rect">
-            <a:avLst/>
-          </a:prstGeom>
-          <a:solidFill>
-            <a:srgbClr val="0072B2"/>
-          </a:solidFill>
+            <a:off x="0" y="0"/>
+            <a:ext cx="146304" cy="6858000"/>
+          </a:xfrm>
+          <a:prstGeom prst="rect">
+            <a:avLst/>
+          </a:prstGeom>
+          <a:gradFill>
+            <a:gsLst>
+              <a:gs pos="0">
+                <a:srgbClr val="0072B2"/>
+              </a:gs>
+              <a:gs pos="100000">
+                <a:srgbClr val="009E73"/>
+              </a:gs>
+            </a:gsLst>
+            <a:lin ang="5400000" scaled="1"/>
+          </a:gradFill>
           <a:ln>
             <a:noFill/>
           </a:ln>
@@ -4831,14 +7671,14 @@
       </p:sp>
       <p:sp>
         <p:nvSpPr>
-          <p:cNvPr id="4" name="TextBox 3"/>
+          <p:cNvPr id="3" name="TextBox 2"/>
           <p:cNvSpPr txBox="1"/>
           <p:nvPr/>
         </p:nvSpPr>
         <p:spPr>
           <a:xfrm>
-            <a:off x="640080" y="1737360"/>
-            <a:ext cx="11064240" cy="4754880"/>
+            <a:off x="658368" y="329184"/>
+            <a:ext cx="9144000" cy="320040"/>
           </a:xfrm>
           <a:prstGeom prst="rect">
             <a:avLst/>
@@ -4851,93 +7691,440 @@
           </a:bodyPr>
           <a:lstStyle/>
           <a:p>
-            <a:pPr>
+            <a:r>
+              <a:rPr sz="1250" b="1" i="0">
+                <a:solidFill>
+                  <a:srgbClr val="0072B2"/>
+                </a:solidFill>
+              </a:rPr>
+              <a:t>METHOD</a:t>
+            </a:r>
+          </a:p>
+        </p:txBody>
+      </p:sp>
+      <p:sp>
+        <p:nvSpPr>
+          <p:cNvPr id="4" name="TextBox 3"/>
+          <p:cNvSpPr txBox="1"/>
+          <p:nvPr/>
+        </p:nvSpPr>
+        <p:spPr>
+          <a:xfrm>
+            <a:off x="640080" y="566928"/>
+            <a:ext cx="11155680" cy="822960"/>
+          </a:xfrm>
+          <a:prstGeom prst="rect">
+            <a:avLst/>
+          </a:prstGeom>
+          <a:noFill/>
+        </p:spPr>
+        <p:txBody>
+          <a:bodyPr wrap="square">
+            <a:spAutoFit/>
+          </a:bodyPr>
+          <a:lstStyle/>
+          <a:p>
+            <a:r>
+              <a:rPr sz="2800" b="1" i="0">
+                <a:solidFill>
+                  <a:srgbClr val="1A2233"/>
+                </a:solidFill>
+              </a:rPr>
+              <a:t>The learning pipeline</a:t>
+            </a:r>
+          </a:p>
+        </p:txBody>
+      </p:sp>
+      <p:sp>
+        <p:nvSpPr>
+          <p:cNvPr id="5" name="Rectangle 4"/>
+          <p:cNvSpPr/>
+          <p:nvPr/>
+        </p:nvSpPr>
+        <p:spPr>
+          <a:xfrm>
+            <a:off x="658368" y="1335024"/>
+            <a:ext cx="2468880" cy="68580"/>
+          </a:xfrm>
+          <a:prstGeom prst="rect">
+            <a:avLst/>
+          </a:prstGeom>
+          <a:gradFill>
+            <a:gsLst>
+              <a:gs pos="0">
+                <a:srgbClr val="0072B2"/>
+              </a:gs>
+              <a:gs pos="100000">
+                <a:srgbClr val="009E73"/>
+              </a:gs>
+            </a:gsLst>
+            <a:lin ang="0" scaled="1"/>
+          </a:gradFill>
+          <a:ln>
+            <a:noFill/>
+          </a:ln>
+        </p:spPr>
+        <p:style>
+          <a:lnRef idx="1">
+            <a:schemeClr val="accent1"/>
+          </a:lnRef>
+          <a:fillRef idx="3">
+            <a:schemeClr val="accent1"/>
+          </a:fillRef>
+          <a:effectRef idx="2">
+            <a:schemeClr val="accent1"/>
+          </a:effectRef>
+          <a:fontRef idx="minor">
+            <a:schemeClr val="lt1"/>
+          </a:fontRef>
+        </p:style>
+        <p:txBody>
+          <a:bodyPr rtlCol="0" anchor="ctr"/>
+          <a:lstStyle/>
+          <a:p>
+            <a:pPr algn="ctr"/>
+          </a:p>
+        </p:txBody>
+      </p:sp>
+      <p:sp>
+        <p:nvSpPr>
+          <p:cNvPr id="6" name="Rounded Rectangle 5"/>
+          <p:cNvSpPr/>
+          <p:nvPr/>
+        </p:nvSpPr>
+        <p:spPr>
+          <a:xfrm>
+            <a:off x="548640" y="1810512"/>
+            <a:ext cx="11091672" cy="4462272"/>
+          </a:xfrm>
+          <a:prstGeom prst="roundRect">
+            <a:avLst>
+              <a:gd name="adj" fmla="val 2800"/>
+            </a:avLst>
+          </a:prstGeom>
+          <a:solidFill>
+            <a:srgbClr val="F3F6FB"/>
+          </a:solidFill>
+          <a:ln w="12700">
+            <a:solidFill>
+              <a:srgbClr val="DDE4F0"/>
+            </a:solidFill>
+          </a:ln>
+          <a:effectLst>
+            <a:outerShdw blurRad="90000" dist="32000" dir="5400000" rotWithShape="0">
+              <a:srgbClr val="000000">
+                <a:alpha val="55000"/>
+              </a:srgbClr>
+            </a:outerShdw>
+          </a:effectLst>
+        </p:spPr>
+        <p:style>
+          <a:lnRef idx="1">
+            <a:schemeClr val="accent1"/>
+          </a:lnRef>
+          <a:fillRef idx="3">
+            <a:schemeClr val="accent1"/>
+          </a:fillRef>
+          <a:effectRef idx="2">
+            <a:schemeClr val="accent1"/>
+          </a:effectRef>
+          <a:fontRef idx="minor">
+            <a:schemeClr val="lt1"/>
+          </a:fontRef>
+        </p:style>
+        <p:txBody>
+          <a:bodyPr rtlCol="0" anchor="ctr"/>
+          <a:lstStyle/>
+          <a:p>
+            <a:pPr algn="ctr"/>
+          </a:p>
+        </p:txBody>
+      </p:sp>
+      <p:sp>
+        <p:nvSpPr>
+          <p:cNvPr id="7" name="TextBox 6"/>
+          <p:cNvSpPr txBox="1"/>
+          <p:nvPr/>
+        </p:nvSpPr>
+        <p:spPr>
+          <a:xfrm>
+            <a:off x="932688" y="2048256"/>
+            <a:ext cx="10378440" cy="4023360"/>
+          </a:xfrm>
+          <a:prstGeom prst="rect">
+            <a:avLst/>
+          </a:prstGeom>
+          <a:noFill/>
+        </p:spPr>
+        <p:txBody>
+          <a:bodyPr wrap="square" anchor="t">
+            <a:spAutoFit/>
+          </a:bodyPr>
+          <a:lstStyle/>
+          <a:p>
+            <a:pPr marL="274320" indent="-274320">
+              <a:lnSpc>
+                <a:spcPct val="112000"/>
+              </a:lnSpc>
               <a:spcAft>
-                <a:spcPts val="700"/>
+                <a:spcPts val="1000"/>
               </a:spcAft>
             </a:pPr>
             <a:r>
-              <a:rPr sz="1800">
-                <a:solidFill>
-                  <a:srgbClr val="222222"/>
-                </a:solidFill>
-              </a:rPr>
-              <a:t>• 1)  Collect expert demonstrations - run the heuristic on the twin, log (observation, action) pairs.</a:t>
-            </a:r>
-          </a:p>
-          <a:p>
-            <a:pPr>
+              <a:rPr sz="1800" b="1" i="0">
+                <a:solidFill>
+                  <a:srgbClr val="0072B2"/>
+                </a:solidFill>
+              </a:rPr>
+              <a:t>▪  </a:t>
+            </a:r>
+            <a:r>
+              <a:rPr sz="1800" b="0" i="0">
+                <a:solidFill>
+                  <a:srgbClr val="1A2233"/>
+                </a:solidFill>
+              </a:rPr>
+              <a:t>1)  Collect expert demonstrations - run the heuristic on the twin, log (observation, action) pairs.</a:t>
+            </a:r>
+          </a:p>
+          <a:p>
+            <a:pPr marL="274320" indent="-274320">
+              <a:lnSpc>
+                <a:spcPct val="112000"/>
+              </a:lnSpc>
               <a:spcAft>
-                <a:spcPts val="700"/>
+                <a:spcPts val="1000"/>
               </a:spcAft>
             </a:pPr>
             <a:r>
-              <a:rPr sz="1800">
-                <a:solidFill>
-                  <a:srgbClr val="222222"/>
-                </a:solidFill>
-              </a:rPr>
-              <a:t>• 2)  Behaviour Cloning (+ critic warm-up) - clone the heuristic into the policy AND pre-train its value</a:t>
-            </a:r>
-          </a:p>
-          <a:p>
-            <a:pPr lvl="1">
+              <a:rPr sz="1800" b="1" i="0">
+                <a:solidFill>
+                  <a:srgbClr val="0072B2"/>
+                </a:solidFill>
+              </a:rPr>
+              <a:t>▪  </a:t>
+            </a:r>
+            <a:r>
+              <a:rPr sz="1800" b="0" i="0">
+                <a:solidFill>
+                  <a:srgbClr val="1A2233"/>
+                </a:solidFill>
+              </a:rPr>
+              <a:t>2)  Behaviour Cloning (+ critic warm-up) - clone the heuristic into the policy AND pre-train its value</a:t>
+            </a:r>
+          </a:p>
+          <a:p>
+            <a:pPr marL="603504" indent="-274320">
+              <a:lnSpc>
+                <a:spcPct val="112000"/>
+              </a:lnSpc>
               <a:spcAft>
-                <a:spcPts val="700"/>
+                <a:spcPts val="500"/>
               </a:spcAft>
             </a:pPr>
             <a:r>
-              <a:rPr sz="1500">
-                <a:solidFill>
-                  <a:srgbClr val="666666"/>
-                </a:solidFill>
-              </a:rPr>
-              <a:t>– estimator; the warm-up fixes a classic BC-&gt;PPO collapse we hit and diagnosed.</a:t>
-            </a:r>
-          </a:p>
-          <a:p>
-            <a:pPr>
+              <a:rPr sz="1600" b="1" i="0">
+                <a:solidFill>
+                  <a:srgbClr val="009E73"/>
+                </a:solidFill>
+              </a:rPr>
+              <a:t>–  </a:t>
+            </a:r>
+            <a:r>
+              <a:rPr sz="1600" b="0" i="0">
+                <a:solidFill>
+                  <a:srgbClr val="5B6472"/>
+                </a:solidFill>
+              </a:rPr>
+              <a:t>estimator; the warm-up fixes a classic BC-&gt;PPO collapse we hit and diagnosed.</a:t>
+            </a:r>
+          </a:p>
+          <a:p>
+            <a:pPr marL="274320" indent="-274320">
+              <a:lnSpc>
+                <a:spcPct val="112000"/>
+              </a:lnSpc>
               <a:spcAft>
-                <a:spcPts val="700"/>
+                <a:spcPts val="1000"/>
               </a:spcAft>
             </a:pPr>
             <a:r>
-              <a:rPr sz="1800">
-                <a:solidFill>
-                  <a:srgbClr val="222222"/>
-                </a:solidFill>
-              </a:rPr>
-              <a:t>• 3)  PPO fine-tune (~4 h, live ns-3 rollouts) - improve on the true reward.</a:t>
-            </a:r>
-          </a:p>
-          <a:p>
-            <a:pPr>
+              <a:rPr sz="1800" b="1" i="0">
+                <a:solidFill>
+                  <a:srgbClr val="0072B2"/>
+                </a:solidFill>
+              </a:rPr>
+              <a:t>▪  </a:t>
+            </a:r>
+            <a:r>
+              <a:rPr sz="1800" b="0" i="0">
+                <a:solidFill>
+                  <a:srgbClr val="1A2233"/>
+                </a:solidFill>
+              </a:rPr>
+              <a:t>3)  PPO fine-tune (~4 h, live ns-3 rollouts) - improve on the true reward.</a:t>
+            </a:r>
+          </a:p>
+          <a:p>
+            <a:pPr marL="274320" indent="-274320">
+              <a:lnSpc>
+                <a:spcPct val="112000"/>
+              </a:lnSpc>
               <a:spcAft>
-                <a:spcPts val="700"/>
+                <a:spcPts val="1000"/>
               </a:spcAft>
             </a:pPr>
             <a:r>
-              <a:rPr sz="1800">
-                <a:solidFill>
-                  <a:srgbClr val="222222"/>
-                </a:solidFill>
-              </a:rPr>
-              <a:t>• 4)  Evaluate deterministically vs the heuristic across 4 seeds; score energy / throughput / RLF.</a:t>
-            </a:r>
-          </a:p>
-          <a:p>
-            <a:pPr>
+              <a:rPr sz="1800" b="1" i="0">
+                <a:solidFill>
+                  <a:srgbClr val="0072B2"/>
+                </a:solidFill>
+              </a:rPr>
+              <a:t>▪  </a:t>
+            </a:r>
+            <a:r>
+              <a:rPr sz="1800" b="0" i="0">
+                <a:solidFill>
+                  <a:srgbClr val="1A2233"/>
+                </a:solidFill>
+              </a:rPr>
+              <a:t>4)  Evaluate deterministically vs the heuristic across 4 seeds; score energy / throughput / RLF.</a:t>
+            </a:r>
+          </a:p>
+          <a:p>
+            <a:pPr marL="274320" indent="-274320">
+              <a:lnSpc>
+                <a:spcPct val="112000"/>
+              </a:lnSpc>
               <a:spcAft>
-                <a:spcPts val="700"/>
+                <a:spcPts val="1000"/>
               </a:spcAft>
             </a:pPr>
             <a:r>
-              <a:rPr sz="1800">
-                <a:solidFill>
-                  <a:srgbClr val="222222"/>
-                </a:solidFill>
-              </a:rPr>
-              <a:t>• All reproducible; trained model + demos committed to the repo.</a:t>
+              <a:rPr sz="1800" b="1" i="0">
+                <a:solidFill>
+                  <a:srgbClr val="0072B2"/>
+                </a:solidFill>
+              </a:rPr>
+              <a:t>▪  </a:t>
+            </a:r>
+            <a:r>
+              <a:rPr sz="1800" b="0" i="0">
+                <a:solidFill>
+                  <a:srgbClr val="1A2233"/>
+                </a:solidFill>
+              </a:rPr>
+              <a:t>All reproducible; trained model + demos committed to the repo.</a:t>
+            </a:r>
+          </a:p>
+        </p:txBody>
+      </p:sp>
+      <p:sp>
+        <p:nvSpPr>
+          <p:cNvPr id="8" name="Rectangle 7"/>
+          <p:cNvSpPr/>
+          <p:nvPr/>
+        </p:nvSpPr>
+        <p:spPr>
+          <a:xfrm>
+            <a:off x="640080" y="6437376"/>
+            <a:ext cx="10881360" cy="11887"/>
+          </a:xfrm>
+          <a:prstGeom prst="rect">
+            <a:avLst/>
+          </a:prstGeom>
+          <a:solidFill>
+            <a:srgbClr val="DDE4F0"/>
+          </a:solidFill>
+          <a:ln>
+            <a:noFill/>
+          </a:ln>
+        </p:spPr>
+        <p:style>
+          <a:lnRef idx="1">
+            <a:schemeClr val="accent1"/>
+          </a:lnRef>
+          <a:fillRef idx="3">
+            <a:schemeClr val="accent1"/>
+          </a:fillRef>
+          <a:effectRef idx="2">
+            <a:schemeClr val="accent1"/>
+          </a:effectRef>
+          <a:fontRef idx="minor">
+            <a:schemeClr val="lt1"/>
+          </a:fontRef>
+        </p:style>
+        <p:txBody>
+          <a:bodyPr rtlCol="0" anchor="ctr"/>
+          <a:lstStyle/>
+          <a:p>
+            <a:pPr algn="ctr"/>
+          </a:p>
+        </p:txBody>
+      </p:sp>
+      <p:sp>
+        <p:nvSpPr>
+          <p:cNvPr id="9" name="TextBox 8"/>
+          <p:cNvSpPr txBox="1"/>
+          <p:nvPr/>
+        </p:nvSpPr>
+        <p:spPr>
+          <a:xfrm>
+            <a:off x="640080" y="6455664"/>
+            <a:ext cx="7315200" cy="320040"/>
+          </a:xfrm>
+          <a:prstGeom prst="rect">
+            <a:avLst/>
+          </a:prstGeom>
+          <a:noFill/>
+        </p:spPr>
+        <p:txBody>
+          <a:bodyPr wrap="square">
+            <a:spAutoFit/>
+          </a:bodyPr>
+          <a:lstStyle/>
+          <a:p>
+            <a:r>
+              <a:rPr sz="900" b="0" i="0">
+                <a:solidFill>
+                  <a:srgbClr val="5B6472"/>
+                </a:solidFill>
+              </a:rPr>
+              <a:t>Energy-Saving RL  ·  ns-O-RAN digital twin</a:t>
+            </a:r>
+          </a:p>
+        </p:txBody>
+      </p:sp>
+      <p:sp>
+        <p:nvSpPr>
+          <p:cNvPr id="10" name="TextBox 9"/>
+          <p:cNvSpPr txBox="1"/>
+          <p:nvPr/>
+        </p:nvSpPr>
+        <p:spPr>
+          <a:xfrm>
+            <a:off x="9692640" y="6455664"/>
+            <a:ext cx="1828800" cy="320040"/>
+          </a:xfrm>
+          <a:prstGeom prst="rect">
+            <a:avLst/>
+          </a:prstGeom>
+          <a:noFill/>
+        </p:spPr>
+        <p:txBody>
+          <a:bodyPr wrap="square">
+            <a:spAutoFit/>
+          </a:bodyPr>
+          <a:lstStyle/>
+          <a:p>
+            <a:pPr algn="r"/>
+            <a:r>
+              <a:rPr sz="900" b="0" i="0">
+                <a:solidFill>
+                  <a:srgbClr val="5B6472"/>
+                </a:solidFill>
+              </a:rPr>
+              <a:t>06 / 13</a:t>
             </a:r>
           </a:p>
         </p:txBody>
@@ -4962,54 +8149,29 @@
       <p:grpSpPr/>
       <p:sp>
         <p:nvSpPr>
-          <p:cNvPr id="2" name="TextBox 1"/>
-          <p:cNvSpPr txBox="1"/>
-          <p:nvPr/>
-        </p:nvSpPr>
-        <p:spPr>
-          <a:xfrm>
-            <a:off x="548640" y="320040"/>
-            <a:ext cx="11064240" cy="914400"/>
-          </a:xfrm>
-          <a:prstGeom prst="rect">
-            <a:avLst/>
-          </a:prstGeom>
-          <a:noFill/>
-        </p:spPr>
-        <p:txBody>
-          <a:bodyPr wrap="square">
-            <a:spAutoFit/>
-          </a:bodyPr>
-          <a:lstStyle/>
-          <a:p>
-            <a:r>
-              <a:rPr sz="3000" b="1">
-                <a:solidFill>
-                  <a:srgbClr val="222222"/>
-                </a:solidFill>
-              </a:rPr>
-              <a:t>Result 1 — the energy-vs-QoS tradeoff</a:t>
-            </a:r>
-          </a:p>
-        </p:txBody>
-      </p:sp>
-      <p:sp>
-        <p:nvSpPr>
-          <p:cNvPr id="3" name="Rectangle 2"/>
+          <p:cNvPr id="2" name="Rectangle 1"/>
           <p:cNvSpPr/>
           <p:nvPr/>
         </p:nvSpPr>
         <p:spPr>
           <a:xfrm>
-            <a:off x="566928" y="1170432"/>
-            <a:ext cx="2926080" cy="50800"/>
-          </a:xfrm>
-          <a:prstGeom prst="rect">
-            <a:avLst/>
-          </a:prstGeom>
-          <a:solidFill>
-            <a:srgbClr val="0072B2"/>
-          </a:solidFill>
+            <a:off x="0" y="0"/>
+            <a:ext cx="146304" cy="6858000"/>
+          </a:xfrm>
+          <a:prstGeom prst="rect">
+            <a:avLst/>
+          </a:prstGeom>
+          <a:gradFill>
+            <a:gsLst>
+              <a:gs pos="0">
+                <a:srgbClr val="0072B2"/>
+              </a:gs>
+              <a:gs pos="100000">
+                <a:srgbClr val="009E73"/>
+              </a:gs>
+            </a:gsLst>
+            <a:lin ang="5400000" scaled="1"/>
+          </a:gradFill>
           <a:ln>
             <a:noFill/>
           </a:ln>
@@ -5038,14 +8200,14 @@
       </p:sp>
       <p:sp>
         <p:nvSpPr>
-          <p:cNvPr id="4" name="TextBox 3"/>
+          <p:cNvPr id="3" name="TextBox 2"/>
           <p:cNvSpPr txBox="1"/>
           <p:nvPr/>
         </p:nvSpPr>
         <p:spPr>
           <a:xfrm>
-            <a:off x="566928" y="1280160"/>
-            <a:ext cx="10972800" cy="457200"/>
+            <a:off x="658368" y="329184"/>
+            <a:ext cx="9144000" cy="320040"/>
           </a:xfrm>
           <a:prstGeom prst="rect">
             <a:avLst/>
@@ -5059,19 +8221,300 @@
           <a:lstStyle/>
           <a:p>
             <a:r>
-              <a:rPr sz="1400" i="1">
-                <a:solidFill>
-                  <a:srgbClr val="666666"/>
+              <a:rPr sz="1250" b="1" i="0">
+                <a:solidFill>
+                  <a:srgbClr val="0072B2"/>
+                </a:solidFill>
+              </a:rPr>
+              <a:t>RESULTS</a:t>
+            </a:r>
+          </a:p>
+        </p:txBody>
+      </p:sp>
+      <p:sp>
+        <p:nvSpPr>
+          <p:cNvPr id="4" name="TextBox 3"/>
+          <p:cNvSpPr txBox="1"/>
+          <p:nvPr/>
+        </p:nvSpPr>
+        <p:spPr>
+          <a:xfrm>
+            <a:off x="640080" y="566928"/>
+            <a:ext cx="11155680" cy="822960"/>
+          </a:xfrm>
+          <a:prstGeom prst="rect">
+            <a:avLst/>
+          </a:prstGeom>
+          <a:noFill/>
+        </p:spPr>
+        <p:txBody>
+          <a:bodyPr wrap="square">
+            <a:spAutoFit/>
+          </a:bodyPr>
+          <a:lstStyle/>
+          <a:p>
+            <a:r>
+              <a:rPr sz="2800" b="1" i="0">
+                <a:solidFill>
+                  <a:srgbClr val="1A2233"/>
+                </a:solidFill>
+              </a:rPr>
+              <a:t>Result 1 — the energy-vs-QoS tradeoff</a:t>
+            </a:r>
+          </a:p>
+        </p:txBody>
+      </p:sp>
+      <p:sp>
+        <p:nvSpPr>
+          <p:cNvPr id="5" name="Rectangle 4"/>
+          <p:cNvSpPr/>
+          <p:nvPr/>
+        </p:nvSpPr>
+        <p:spPr>
+          <a:xfrm>
+            <a:off x="658368" y="1335024"/>
+            <a:ext cx="2468880" cy="68580"/>
+          </a:xfrm>
+          <a:prstGeom prst="rect">
+            <a:avLst/>
+          </a:prstGeom>
+          <a:gradFill>
+            <a:gsLst>
+              <a:gs pos="0">
+                <a:srgbClr val="0072B2"/>
+              </a:gs>
+              <a:gs pos="100000">
+                <a:srgbClr val="009E73"/>
+              </a:gs>
+            </a:gsLst>
+            <a:lin ang="0" scaled="1"/>
+          </a:gradFill>
+          <a:ln>
+            <a:noFill/>
+          </a:ln>
+        </p:spPr>
+        <p:style>
+          <a:lnRef idx="1">
+            <a:schemeClr val="accent1"/>
+          </a:lnRef>
+          <a:fillRef idx="3">
+            <a:schemeClr val="accent1"/>
+          </a:fillRef>
+          <a:effectRef idx="2">
+            <a:schemeClr val="accent1"/>
+          </a:effectRef>
+          <a:fontRef idx="minor">
+            <a:schemeClr val="lt1"/>
+          </a:fontRef>
+        </p:style>
+        <p:txBody>
+          <a:bodyPr rtlCol="0" anchor="ctr"/>
+          <a:lstStyle/>
+          <a:p>
+            <a:pPr algn="ctr"/>
+          </a:p>
+        </p:txBody>
+      </p:sp>
+      <p:sp>
+        <p:nvSpPr>
+          <p:cNvPr id="6" name="TextBox 5"/>
+          <p:cNvSpPr txBox="1"/>
+          <p:nvPr/>
+        </p:nvSpPr>
+        <p:spPr>
+          <a:xfrm>
+            <a:off x="658368" y="1426464"/>
+            <a:ext cx="10972800" cy="457200"/>
+          </a:xfrm>
+          <a:prstGeom prst="rect">
+            <a:avLst/>
+          </a:prstGeom>
+          <a:noFill/>
+        </p:spPr>
+        <p:txBody>
+          <a:bodyPr wrap="square">
+            <a:spAutoFit/>
+          </a:bodyPr>
+          <a:lstStyle/>
+          <a:p>
+            <a:r>
+              <a:rPr sz="1400" b="0" i="1">
+                <a:solidFill>
+                  <a:srgbClr val="5B6472"/>
                 </a:solidFill>
               </a:rPr>
               <a:t>Heuristic sits near the efficient frontier; plain-reward PPO ties it byte-for-byte</a:t>
             </a:r>
+          </a:p>
+        </p:txBody>
+      </p:sp>
+      <p:sp>
+        <p:nvSpPr>
+          <p:cNvPr id="7" name="Rectangle 6"/>
+          <p:cNvSpPr/>
+          <p:nvPr/>
+        </p:nvSpPr>
+        <p:spPr>
+          <a:xfrm>
+            <a:off x="640080" y="6437376"/>
+            <a:ext cx="10881360" cy="11887"/>
+          </a:xfrm>
+          <a:prstGeom prst="rect">
+            <a:avLst/>
+          </a:prstGeom>
+          <a:solidFill>
+            <a:srgbClr val="DDE4F0"/>
+          </a:solidFill>
+          <a:ln>
+            <a:noFill/>
+          </a:ln>
+        </p:spPr>
+        <p:style>
+          <a:lnRef idx="1">
+            <a:schemeClr val="accent1"/>
+          </a:lnRef>
+          <a:fillRef idx="3">
+            <a:schemeClr val="accent1"/>
+          </a:fillRef>
+          <a:effectRef idx="2">
+            <a:schemeClr val="accent1"/>
+          </a:effectRef>
+          <a:fontRef idx="minor">
+            <a:schemeClr val="lt1"/>
+          </a:fontRef>
+        </p:style>
+        <p:txBody>
+          <a:bodyPr rtlCol="0" anchor="ctr"/>
+          <a:lstStyle/>
+          <a:p>
+            <a:pPr algn="ctr"/>
+          </a:p>
+        </p:txBody>
+      </p:sp>
+      <p:sp>
+        <p:nvSpPr>
+          <p:cNvPr id="8" name="TextBox 7"/>
+          <p:cNvSpPr txBox="1"/>
+          <p:nvPr/>
+        </p:nvSpPr>
+        <p:spPr>
+          <a:xfrm>
+            <a:off x="640080" y="6455664"/>
+            <a:ext cx="7315200" cy="320040"/>
+          </a:xfrm>
+          <a:prstGeom prst="rect">
+            <a:avLst/>
+          </a:prstGeom>
+          <a:noFill/>
+        </p:spPr>
+        <p:txBody>
+          <a:bodyPr wrap="square">
+            <a:spAutoFit/>
+          </a:bodyPr>
+          <a:lstStyle/>
+          <a:p>
+            <a:r>
+              <a:rPr sz="900" b="0" i="0">
+                <a:solidFill>
+                  <a:srgbClr val="5B6472"/>
+                </a:solidFill>
+              </a:rPr>
+              <a:t>Energy-Saving RL  ·  ns-O-RAN digital twin</a:t>
+            </a:r>
+          </a:p>
+        </p:txBody>
+      </p:sp>
+      <p:sp>
+        <p:nvSpPr>
+          <p:cNvPr id="9" name="TextBox 8"/>
+          <p:cNvSpPr txBox="1"/>
+          <p:nvPr/>
+        </p:nvSpPr>
+        <p:spPr>
+          <a:xfrm>
+            <a:off x="9692640" y="6455664"/>
+            <a:ext cx="1828800" cy="320040"/>
+          </a:xfrm>
+          <a:prstGeom prst="rect">
+            <a:avLst/>
+          </a:prstGeom>
+          <a:noFill/>
+        </p:spPr>
+        <p:txBody>
+          <a:bodyPr wrap="square">
+            <a:spAutoFit/>
+          </a:bodyPr>
+          <a:lstStyle/>
+          <a:p>
+            <a:pPr algn="r"/>
+            <a:r>
+              <a:rPr sz="900" b="0" i="0">
+                <a:solidFill>
+                  <a:srgbClr val="5B6472"/>
+                </a:solidFill>
+              </a:rPr>
+              <a:t>07 / 13</a:t>
+            </a:r>
+          </a:p>
+        </p:txBody>
+      </p:sp>
+      <p:sp>
+        <p:nvSpPr>
+          <p:cNvPr id="10" name="Rounded Rectangle 9"/>
+          <p:cNvSpPr/>
+          <p:nvPr/>
+        </p:nvSpPr>
+        <p:spPr>
+          <a:xfrm>
+            <a:off x="3121761" y="1746503"/>
+            <a:ext cx="5948172" cy="4050792"/>
+          </a:xfrm>
+          <a:prstGeom prst="roundRect">
+            <a:avLst>
+              <a:gd name="adj" fmla="val 2000"/>
+            </a:avLst>
+          </a:prstGeom>
+          <a:solidFill>
+            <a:srgbClr val="FFFFFF"/>
+          </a:solidFill>
+          <a:ln w="12700">
+            <a:solidFill>
+              <a:srgbClr val="DDE4F0"/>
+            </a:solidFill>
+          </a:ln>
+          <a:effectLst>
+            <a:outerShdw blurRad="110000" dist="42000" dir="5400000" rotWithShape="0">
+              <a:srgbClr val="000000">
+                <a:alpha val="60000"/>
+              </a:srgbClr>
+            </a:outerShdw>
+          </a:effectLst>
+        </p:spPr>
+        <p:style>
+          <a:lnRef idx="1">
+            <a:schemeClr val="accent1"/>
+          </a:lnRef>
+          <a:fillRef idx="3">
+            <a:schemeClr val="accent1"/>
+          </a:fillRef>
+          <a:effectRef idx="2">
+            <a:schemeClr val="accent1"/>
+          </a:effectRef>
+          <a:fontRef idx="minor">
+            <a:schemeClr val="lt1"/>
+          </a:fontRef>
+        </p:style>
+        <p:txBody>
+          <a:bodyPr rtlCol="0" anchor="ctr"/>
+          <a:lstStyle/>
+          <a:p>
+            <a:pPr algn="ctr"/>
           </a:p>
         </p:txBody>
       </p:sp>
       <p:pic>
         <p:nvPicPr>
-          <p:cNvPr id="5" name="Picture 4" descr="summary_tradeoff.png"/>
+          <p:cNvPr id="11" name="Picture 10" descr="summary_tradeoff.png"/>
           <p:cNvPicPr>
             <a:picLocks noChangeAspect="1"/>
           </p:cNvPicPr>
@@ -5085,8 +8528,8 @@
         </p:blipFill>
         <p:spPr>
           <a:xfrm>
-            <a:off x="1295247" y="1600200"/>
-            <a:ext cx="9601200" cy="6400800"/>
+            <a:off x="3249777" y="1874519"/>
+            <a:ext cx="5692140" cy="3794760"/>
           </a:xfrm>
           <a:prstGeom prst="rect">
             <a:avLst/>
@@ -5095,14 +8538,14 @@
       </p:pic>
       <p:sp>
         <p:nvSpPr>
-          <p:cNvPr id="6" name="TextBox 5"/>
+          <p:cNvPr id="12" name="TextBox 11"/>
           <p:cNvSpPr txBox="1"/>
           <p:nvPr/>
         </p:nvSpPr>
         <p:spPr>
           <a:xfrm>
-            <a:off x="548640" y="6400800"/>
-            <a:ext cx="11064240" cy="365760"/>
+            <a:off x="548640" y="5998464"/>
+            <a:ext cx="11064240" cy="384048"/>
           </a:xfrm>
           <a:prstGeom prst="rect">
             <a:avLst/>
@@ -5117,9 +8560,9 @@
           <a:p>
             <a:pPr algn="ctr"/>
             <a:r>
-              <a:rPr sz="1100" i="1">
-                <a:solidFill>
-                  <a:srgbClr val="666666"/>
+              <a:rPr sz="1100" b="0" i="1">
+                <a:solidFill>
+                  <a:srgbClr val="5B6472"/>
                 </a:solidFill>
               </a:rPr>
               <a:t>4-seed averages. PPO reproduces the heuristic (a tie). Aggressive pruning saves more energy but costs reliability.</a:t>
@@ -5147,54 +8590,29 @@
       <p:grpSpPr/>
       <p:sp>
         <p:nvSpPr>
-          <p:cNvPr id="2" name="TextBox 1"/>
-          <p:cNvSpPr txBox="1"/>
-          <p:nvPr/>
-        </p:nvSpPr>
-        <p:spPr>
-          <a:xfrm>
-            <a:off x="548640" y="320040"/>
-            <a:ext cx="11064240" cy="914400"/>
-          </a:xfrm>
-          <a:prstGeom prst="rect">
-            <a:avLst/>
-          </a:prstGeom>
-          <a:noFill/>
-        </p:spPr>
-        <p:txBody>
-          <a:bodyPr wrap="square">
-            <a:spAutoFit/>
-          </a:bodyPr>
-          <a:lstStyle/>
-          <a:p>
-            <a:r>
-              <a:rPr sz="3000" b="1">
-                <a:solidFill>
-                  <a:srgbClr val="222222"/>
-                </a:solidFill>
-              </a:rPr>
-              <a:t>Result 2 — an improved reward moved RL off the tie</a:t>
-            </a:r>
-          </a:p>
-        </p:txBody>
-      </p:sp>
-      <p:sp>
-        <p:nvSpPr>
-          <p:cNvPr id="3" name="Rectangle 2"/>
+          <p:cNvPr id="2" name="Rectangle 1"/>
           <p:cNvSpPr/>
           <p:nvPr/>
         </p:nvSpPr>
         <p:spPr>
           <a:xfrm>
-            <a:off x="566928" y="1170432"/>
-            <a:ext cx="2926080" cy="50800"/>
-          </a:xfrm>
-          <a:prstGeom prst="rect">
-            <a:avLst/>
-          </a:prstGeom>
-          <a:solidFill>
-            <a:srgbClr val="0072B2"/>
-          </a:solidFill>
+            <a:off x="0" y="0"/>
+            <a:ext cx="146304" cy="6858000"/>
+          </a:xfrm>
+          <a:prstGeom prst="rect">
+            <a:avLst/>
+          </a:prstGeom>
+          <a:gradFill>
+            <a:gsLst>
+              <a:gs pos="0">
+                <a:srgbClr val="0072B2"/>
+              </a:gs>
+              <a:gs pos="100000">
+                <a:srgbClr val="009E73"/>
+              </a:gs>
+            </a:gsLst>
+            <a:lin ang="5400000" scaled="1"/>
+          </a:gradFill>
           <a:ln>
             <a:noFill/>
           </a:ln>
@@ -5223,14 +8641,14 @@
       </p:sp>
       <p:sp>
         <p:nvSpPr>
-          <p:cNvPr id="4" name="TextBox 3"/>
+          <p:cNvPr id="3" name="TextBox 2"/>
           <p:cNvSpPr txBox="1"/>
           <p:nvPr/>
         </p:nvSpPr>
         <p:spPr>
           <a:xfrm>
-            <a:off x="566928" y="1280160"/>
-            <a:ext cx="10972800" cy="457200"/>
+            <a:off x="658368" y="329184"/>
+            <a:ext cx="9144000" cy="320040"/>
           </a:xfrm>
           <a:prstGeom prst="rect">
             <a:avLst/>
@@ -5244,19 +8662,300 @@
           <a:lstStyle/>
           <a:p>
             <a:r>
-              <a:rPr sz="1400" i="1">
-                <a:solidFill>
-                  <a:srgbClr val="666666"/>
+              <a:rPr sz="1250" b="1" i="0">
+                <a:solidFill>
+                  <a:srgbClr val="0072B2"/>
+                </a:solidFill>
+              </a:rPr>
+              <a:t>RESULTS</a:t>
+            </a:r>
+          </a:p>
+        </p:txBody>
+      </p:sp>
+      <p:sp>
+        <p:nvSpPr>
+          <p:cNvPr id="4" name="TextBox 3"/>
+          <p:cNvSpPr txBox="1"/>
+          <p:nvPr/>
+        </p:nvSpPr>
+        <p:spPr>
+          <a:xfrm>
+            <a:off x="640080" y="566928"/>
+            <a:ext cx="11155680" cy="822960"/>
+          </a:xfrm>
+          <a:prstGeom prst="rect">
+            <a:avLst/>
+          </a:prstGeom>
+          <a:noFill/>
+        </p:spPr>
+        <p:txBody>
+          <a:bodyPr wrap="square">
+            <a:spAutoFit/>
+          </a:bodyPr>
+          <a:lstStyle/>
+          <a:p>
+            <a:r>
+              <a:rPr sz="2800" b="1" i="0">
+                <a:solidFill>
+                  <a:srgbClr val="1A2233"/>
+                </a:solidFill>
+              </a:rPr>
+              <a:t>Result 2 — an improved reward moved RL off the tie</a:t>
+            </a:r>
+          </a:p>
+        </p:txBody>
+      </p:sp>
+      <p:sp>
+        <p:nvSpPr>
+          <p:cNvPr id="5" name="Rectangle 4"/>
+          <p:cNvSpPr/>
+          <p:nvPr/>
+        </p:nvSpPr>
+        <p:spPr>
+          <a:xfrm>
+            <a:off x="658368" y="1335024"/>
+            <a:ext cx="2468880" cy="68580"/>
+          </a:xfrm>
+          <a:prstGeom prst="rect">
+            <a:avLst/>
+          </a:prstGeom>
+          <a:gradFill>
+            <a:gsLst>
+              <a:gs pos="0">
+                <a:srgbClr val="0072B2"/>
+              </a:gs>
+              <a:gs pos="100000">
+                <a:srgbClr val="009E73"/>
+              </a:gs>
+            </a:gsLst>
+            <a:lin ang="0" scaled="1"/>
+          </a:gradFill>
+          <a:ln>
+            <a:noFill/>
+          </a:ln>
+        </p:spPr>
+        <p:style>
+          <a:lnRef idx="1">
+            <a:schemeClr val="accent1"/>
+          </a:lnRef>
+          <a:fillRef idx="3">
+            <a:schemeClr val="accent1"/>
+          </a:fillRef>
+          <a:effectRef idx="2">
+            <a:schemeClr val="accent1"/>
+          </a:effectRef>
+          <a:fontRef idx="minor">
+            <a:schemeClr val="lt1"/>
+          </a:fontRef>
+        </p:style>
+        <p:txBody>
+          <a:bodyPr rtlCol="0" anchor="ctr"/>
+          <a:lstStyle/>
+          <a:p>
+            <a:pPr algn="ctr"/>
+          </a:p>
+        </p:txBody>
+      </p:sp>
+      <p:sp>
+        <p:nvSpPr>
+          <p:cNvPr id="6" name="TextBox 5"/>
+          <p:cNvSpPr txBox="1"/>
+          <p:nvPr/>
+        </p:nvSpPr>
+        <p:spPr>
+          <a:xfrm>
+            <a:off x="658368" y="1426464"/>
+            <a:ext cx="10972800" cy="457200"/>
+          </a:xfrm>
+          <a:prstGeom prst="rect">
+            <a:avLst/>
+          </a:prstGeom>
+          <a:noFill/>
+        </p:spPr>
+        <p:txBody>
+          <a:bodyPr wrap="square">
+            <a:spAutoFit/>
+          </a:bodyPr>
+          <a:lstStyle/>
+          <a:p>
+            <a:r>
+              <a:rPr sz="1400" b="0" i="1">
+                <a:solidFill>
+                  <a:srgbClr val="5B6472"/>
                 </a:solidFill>
               </a:rPr>
               <a:t>Potential-based reward shaping -&gt; a distinct, greener + more-reliable policy</a:t>
             </a:r>
+          </a:p>
+        </p:txBody>
+      </p:sp>
+      <p:sp>
+        <p:nvSpPr>
+          <p:cNvPr id="7" name="Rectangle 6"/>
+          <p:cNvSpPr/>
+          <p:nvPr/>
+        </p:nvSpPr>
+        <p:spPr>
+          <a:xfrm>
+            <a:off x="640080" y="6437376"/>
+            <a:ext cx="10881360" cy="11887"/>
+          </a:xfrm>
+          <a:prstGeom prst="rect">
+            <a:avLst/>
+          </a:prstGeom>
+          <a:solidFill>
+            <a:srgbClr val="DDE4F0"/>
+          </a:solidFill>
+          <a:ln>
+            <a:noFill/>
+          </a:ln>
+        </p:spPr>
+        <p:style>
+          <a:lnRef idx="1">
+            <a:schemeClr val="accent1"/>
+          </a:lnRef>
+          <a:fillRef idx="3">
+            <a:schemeClr val="accent1"/>
+          </a:fillRef>
+          <a:effectRef idx="2">
+            <a:schemeClr val="accent1"/>
+          </a:effectRef>
+          <a:fontRef idx="minor">
+            <a:schemeClr val="lt1"/>
+          </a:fontRef>
+        </p:style>
+        <p:txBody>
+          <a:bodyPr rtlCol="0" anchor="ctr"/>
+          <a:lstStyle/>
+          <a:p>
+            <a:pPr algn="ctr"/>
+          </a:p>
+        </p:txBody>
+      </p:sp>
+      <p:sp>
+        <p:nvSpPr>
+          <p:cNvPr id="8" name="TextBox 7"/>
+          <p:cNvSpPr txBox="1"/>
+          <p:nvPr/>
+        </p:nvSpPr>
+        <p:spPr>
+          <a:xfrm>
+            <a:off x="640080" y="6455664"/>
+            <a:ext cx="7315200" cy="320040"/>
+          </a:xfrm>
+          <a:prstGeom prst="rect">
+            <a:avLst/>
+          </a:prstGeom>
+          <a:noFill/>
+        </p:spPr>
+        <p:txBody>
+          <a:bodyPr wrap="square">
+            <a:spAutoFit/>
+          </a:bodyPr>
+          <a:lstStyle/>
+          <a:p>
+            <a:r>
+              <a:rPr sz="900" b="0" i="0">
+                <a:solidFill>
+                  <a:srgbClr val="5B6472"/>
+                </a:solidFill>
+              </a:rPr>
+              <a:t>Energy-Saving RL  ·  ns-O-RAN digital twin</a:t>
+            </a:r>
+          </a:p>
+        </p:txBody>
+      </p:sp>
+      <p:sp>
+        <p:nvSpPr>
+          <p:cNvPr id="9" name="TextBox 8"/>
+          <p:cNvSpPr txBox="1"/>
+          <p:nvPr/>
+        </p:nvSpPr>
+        <p:spPr>
+          <a:xfrm>
+            <a:off x="9692640" y="6455664"/>
+            <a:ext cx="1828800" cy="320040"/>
+          </a:xfrm>
+          <a:prstGeom prst="rect">
+            <a:avLst/>
+          </a:prstGeom>
+          <a:noFill/>
+        </p:spPr>
+        <p:txBody>
+          <a:bodyPr wrap="square">
+            <a:spAutoFit/>
+          </a:bodyPr>
+          <a:lstStyle/>
+          <a:p>
+            <a:pPr algn="r"/>
+            <a:r>
+              <a:rPr sz="900" b="0" i="0">
+                <a:solidFill>
+                  <a:srgbClr val="5B6472"/>
+                </a:solidFill>
+              </a:rPr>
+              <a:t>08 / 13</a:t>
+            </a:r>
+          </a:p>
+        </p:txBody>
+      </p:sp>
+      <p:sp>
+        <p:nvSpPr>
+          <p:cNvPr id="10" name="Rounded Rectangle 9"/>
+          <p:cNvSpPr/>
+          <p:nvPr/>
+        </p:nvSpPr>
+        <p:spPr>
+          <a:xfrm>
+            <a:off x="1335016" y="1792224"/>
+            <a:ext cx="9521663" cy="4050792"/>
+          </a:xfrm>
+          <a:prstGeom prst="roundRect">
+            <a:avLst>
+              <a:gd name="adj" fmla="val 2000"/>
+            </a:avLst>
+          </a:prstGeom>
+          <a:solidFill>
+            <a:srgbClr val="FFFFFF"/>
+          </a:solidFill>
+          <a:ln w="12700">
+            <a:solidFill>
+              <a:srgbClr val="DDE4F0"/>
+            </a:solidFill>
+          </a:ln>
+          <a:effectLst>
+            <a:outerShdw blurRad="110000" dist="42000" dir="5400000" rotWithShape="0">
+              <a:srgbClr val="000000">
+                <a:alpha val="60000"/>
+              </a:srgbClr>
+            </a:outerShdw>
+          </a:effectLst>
+        </p:spPr>
+        <p:style>
+          <a:lnRef idx="1">
+            <a:schemeClr val="accent1"/>
+          </a:lnRef>
+          <a:fillRef idx="3">
+            <a:schemeClr val="accent1"/>
+          </a:fillRef>
+          <a:effectRef idx="2">
+            <a:schemeClr val="accent1"/>
+          </a:effectRef>
+          <a:fontRef idx="minor">
+            <a:schemeClr val="lt1"/>
+          </a:fontRef>
+        </p:style>
+        <p:txBody>
+          <a:bodyPr rtlCol="0" anchor="ctr"/>
+          <a:lstStyle/>
+          <a:p>
+            <a:pPr algn="ctr"/>
           </a:p>
         </p:txBody>
       </p:sp>
       <p:pic>
         <p:nvPicPr>
-          <p:cNvPr id="5" name="Picture 4" descr="2_rl_vs_heuristic_by_metric.png"/>
+          <p:cNvPr id="11" name="Picture 10" descr="2_rl_vs_heuristic_by_metric.png"/>
           <p:cNvPicPr>
             <a:picLocks noChangeAspect="1"/>
           </p:cNvPicPr>
@@ -5270,8 +8969,8 @@
         </p:blipFill>
         <p:spPr>
           <a:xfrm>
-            <a:off x="838047" y="1645920"/>
-            <a:ext cx="10515600" cy="4306687"/>
+            <a:off x="1463032" y="1920240"/>
+            <a:ext cx="9265631" cy="3794760"/>
           </a:xfrm>
           <a:prstGeom prst="rect">
             <a:avLst/>
@@ -5280,14 +8979,14 @@
       </p:pic>
       <p:sp>
         <p:nvSpPr>
-          <p:cNvPr id="6" name="TextBox 5"/>
+          <p:cNvPr id="12" name="TextBox 11"/>
           <p:cNvSpPr txBox="1"/>
           <p:nvPr/>
         </p:nvSpPr>
         <p:spPr>
           <a:xfrm>
-            <a:off x="548640" y="6400800"/>
-            <a:ext cx="11064240" cy="365760"/>
+            <a:off x="548640" y="6044184"/>
+            <a:ext cx="11064240" cy="384048"/>
           </a:xfrm>
           <a:prstGeom prst="rect">
             <a:avLst/>
@@ -5302,9 +9001,9 @@
           <a:p>
             <a:pPr algn="ctr"/>
             <a:r>
-              <a:rPr sz="1100" i="1">
-                <a:solidFill>
-                  <a:srgbClr val="666666"/>
+              <a:rPr sz="1100" b="0" i="1">
+                <a:solidFill>
+                  <a:srgbClr val="5B6472"/>
                 </a:solidFill>
               </a:rPr>
               <a:t>Shaped-reward RL vs balanced heuristic (4-seed avg): +6 pts energy AND ~25% fewer dropped calls, ~9% less throughput.</a:t>
@@ -5332,54 +9031,29 @@
       <p:grpSpPr/>
       <p:sp>
         <p:nvSpPr>
-          <p:cNvPr id="2" name="TextBox 1"/>
-          <p:cNvSpPr txBox="1"/>
-          <p:nvPr/>
-        </p:nvSpPr>
-        <p:spPr>
-          <a:xfrm>
-            <a:off x="548640" y="320040"/>
-            <a:ext cx="11064240" cy="914400"/>
-          </a:xfrm>
-          <a:prstGeom prst="rect">
-            <a:avLst/>
-          </a:prstGeom>
-          <a:noFill/>
-        </p:spPr>
-        <p:txBody>
-          <a:bodyPr wrap="square">
-            <a:spAutoFit/>
-          </a:bodyPr>
-          <a:lstStyle/>
-          <a:p>
-            <a:r>
-              <a:rPr sz="3000" b="1">
-                <a:solidFill>
-                  <a:srgbClr val="222222"/>
-                </a:solidFill>
-              </a:rPr>
-              <a:t>Why RL doesn't strictly dominate (the key insight)</a:t>
-            </a:r>
-          </a:p>
-        </p:txBody>
-      </p:sp>
-      <p:sp>
-        <p:nvSpPr>
-          <p:cNvPr id="3" name="Rectangle 2"/>
+          <p:cNvPr id="2" name="Rectangle 1"/>
           <p:cNvSpPr/>
           <p:nvPr/>
         </p:nvSpPr>
         <p:spPr>
           <a:xfrm>
-            <a:off x="566928" y="1170432"/>
-            <a:ext cx="2926080" cy="50800"/>
-          </a:xfrm>
-          <a:prstGeom prst="rect">
-            <a:avLst/>
-          </a:prstGeom>
-          <a:solidFill>
-            <a:srgbClr val="0072B2"/>
-          </a:solidFill>
+            <a:off x="0" y="0"/>
+            <a:ext cx="146304" cy="6858000"/>
+          </a:xfrm>
+          <a:prstGeom prst="rect">
+            <a:avLst/>
+          </a:prstGeom>
+          <a:gradFill>
+            <a:gsLst>
+              <a:gs pos="0">
+                <a:srgbClr val="0072B2"/>
+              </a:gs>
+              <a:gs pos="100000">
+                <a:srgbClr val="009E73"/>
+              </a:gs>
+            </a:gsLst>
+            <a:lin ang="5400000" scaled="1"/>
+          </a:gradFill>
           <a:ln>
             <a:noFill/>
           </a:ln>
@@ -5408,14 +9082,14 @@
       </p:sp>
       <p:sp>
         <p:nvSpPr>
-          <p:cNvPr id="4" name="TextBox 3"/>
+          <p:cNvPr id="3" name="TextBox 2"/>
           <p:cNvSpPr txBox="1"/>
           <p:nvPr/>
         </p:nvSpPr>
         <p:spPr>
           <a:xfrm>
-            <a:off x="640080" y="1737360"/>
-            <a:ext cx="11064240" cy="4754880"/>
+            <a:off x="658368" y="329184"/>
+            <a:ext cx="9144000" cy="320040"/>
           </a:xfrm>
           <a:prstGeom prst="rect">
             <a:avLst/>
@@ -5428,93 +9102,440 @@
           </a:bodyPr>
           <a:lstStyle/>
           <a:p>
-            <a:pPr>
+            <a:r>
+              <a:rPr sz="1250" b="1" i="0">
+                <a:solidFill>
+                  <a:srgbClr val="0072B2"/>
+                </a:solidFill>
+              </a:rPr>
+              <a:t>ANALYSIS</a:t>
+            </a:r>
+          </a:p>
+        </p:txBody>
+      </p:sp>
+      <p:sp>
+        <p:nvSpPr>
+          <p:cNvPr id="4" name="TextBox 3"/>
+          <p:cNvSpPr txBox="1"/>
+          <p:nvPr/>
+        </p:nvSpPr>
+        <p:spPr>
+          <a:xfrm>
+            <a:off x="640080" y="566928"/>
+            <a:ext cx="11155680" cy="822960"/>
+          </a:xfrm>
+          <a:prstGeom prst="rect">
+            <a:avLst/>
+          </a:prstGeom>
+          <a:noFill/>
+        </p:spPr>
+        <p:txBody>
+          <a:bodyPr wrap="square">
+            <a:spAutoFit/>
+          </a:bodyPr>
+          <a:lstStyle/>
+          <a:p>
+            <a:r>
+              <a:rPr sz="2800" b="1" i="0">
+                <a:solidFill>
+                  <a:srgbClr val="1A2233"/>
+                </a:solidFill>
+              </a:rPr>
+              <a:t>Why RL doesn't strictly dominate (the key insight)</a:t>
+            </a:r>
+          </a:p>
+        </p:txBody>
+      </p:sp>
+      <p:sp>
+        <p:nvSpPr>
+          <p:cNvPr id="5" name="Rectangle 4"/>
+          <p:cNvSpPr/>
+          <p:nvPr/>
+        </p:nvSpPr>
+        <p:spPr>
+          <a:xfrm>
+            <a:off x="658368" y="1335024"/>
+            <a:ext cx="2468880" cy="68580"/>
+          </a:xfrm>
+          <a:prstGeom prst="rect">
+            <a:avLst/>
+          </a:prstGeom>
+          <a:gradFill>
+            <a:gsLst>
+              <a:gs pos="0">
+                <a:srgbClr val="0072B2"/>
+              </a:gs>
+              <a:gs pos="100000">
+                <a:srgbClr val="009E73"/>
+              </a:gs>
+            </a:gsLst>
+            <a:lin ang="0" scaled="1"/>
+          </a:gradFill>
+          <a:ln>
+            <a:noFill/>
+          </a:ln>
+        </p:spPr>
+        <p:style>
+          <a:lnRef idx="1">
+            <a:schemeClr val="accent1"/>
+          </a:lnRef>
+          <a:fillRef idx="3">
+            <a:schemeClr val="accent1"/>
+          </a:fillRef>
+          <a:effectRef idx="2">
+            <a:schemeClr val="accent1"/>
+          </a:effectRef>
+          <a:fontRef idx="minor">
+            <a:schemeClr val="lt1"/>
+          </a:fontRef>
+        </p:style>
+        <p:txBody>
+          <a:bodyPr rtlCol="0" anchor="ctr"/>
+          <a:lstStyle/>
+          <a:p>
+            <a:pPr algn="ctr"/>
+          </a:p>
+        </p:txBody>
+      </p:sp>
+      <p:sp>
+        <p:nvSpPr>
+          <p:cNvPr id="6" name="Rounded Rectangle 5"/>
+          <p:cNvSpPr/>
+          <p:nvPr/>
+        </p:nvSpPr>
+        <p:spPr>
+          <a:xfrm>
+            <a:off x="548640" y="1810512"/>
+            <a:ext cx="11091672" cy="4462272"/>
+          </a:xfrm>
+          <a:prstGeom prst="roundRect">
+            <a:avLst>
+              <a:gd name="adj" fmla="val 2800"/>
+            </a:avLst>
+          </a:prstGeom>
+          <a:solidFill>
+            <a:srgbClr val="F3F6FB"/>
+          </a:solidFill>
+          <a:ln w="12700">
+            <a:solidFill>
+              <a:srgbClr val="DDE4F0"/>
+            </a:solidFill>
+          </a:ln>
+          <a:effectLst>
+            <a:outerShdw blurRad="90000" dist="32000" dir="5400000" rotWithShape="0">
+              <a:srgbClr val="000000">
+                <a:alpha val="55000"/>
+              </a:srgbClr>
+            </a:outerShdw>
+          </a:effectLst>
+        </p:spPr>
+        <p:style>
+          <a:lnRef idx="1">
+            <a:schemeClr val="accent1"/>
+          </a:lnRef>
+          <a:fillRef idx="3">
+            <a:schemeClr val="accent1"/>
+          </a:fillRef>
+          <a:effectRef idx="2">
+            <a:schemeClr val="accent1"/>
+          </a:effectRef>
+          <a:fontRef idx="minor">
+            <a:schemeClr val="lt1"/>
+          </a:fontRef>
+        </p:style>
+        <p:txBody>
+          <a:bodyPr rtlCol="0" anchor="ctr"/>
+          <a:lstStyle/>
+          <a:p>
+            <a:pPr algn="ctr"/>
+          </a:p>
+        </p:txBody>
+      </p:sp>
+      <p:sp>
+        <p:nvSpPr>
+          <p:cNvPr id="7" name="TextBox 6"/>
+          <p:cNvSpPr txBox="1"/>
+          <p:nvPr/>
+        </p:nvSpPr>
+        <p:spPr>
+          <a:xfrm>
+            <a:off x="932688" y="2048256"/>
+            <a:ext cx="10378440" cy="4023360"/>
+          </a:xfrm>
+          <a:prstGeom prst="rect">
+            <a:avLst/>
+          </a:prstGeom>
+          <a:noFill/>
+        </p:spPr>
+        <p:txBody>
+          <a:bodyPr wrap="square" anchor="t">
+            <a:spAutoFit/>
+          </a:bodyPr>
+          <a:lstStyle/>
+          <a:p>
+            <a:pPr marL="274320" indent="-274320">
+              <a:lnSpc>
+                <a:spcPct val="112000"/>
+              </a:lnSpc>
               <a:spcAft>
-                <a:spcPts val="700"/>
+                <a:spcPts val="1000"/>
               </a:spcAft>
             </a:pPr>
             <a:r>
-              <a:rPr sz="1800">
-                <a:solidFill>
-                  <a:srgbClr val="222222"/>
-                </a:solidFill>
-              </a:rPr>
-              <a:t>• The heuristic is genuinely near-optimal here - it's hard to beat because it's already good.</a:t>
-            </a:r>
-          </a:p>
-          <a:p>
-            <a:pPr>
+              <a:rPr sz="1800" b="1" i="0">
+                <a:solidFill>
+                  <a:srgbClr val="0072B2"/>
+                </a:solidFill>
+              </a:rPr>
+              <a:t>▪  </a:t>
+            </a:r>
+            <a:r>
+              <a:rPr sz="1800" b="0" i="0">
+                <a:solidFill>
+                  <a:srgbClr val="1A2233"/>
+                </a:solidFill>
+              </a:rPr>
+              <a:t>The heuristic is genuinely near-optimal here - it's hard to beat because it's already good.</a:t>
+            </a:r>
+          </a:p>
+          <a:p>
+            <a:pPr marL="274320" indent="-274320">
+              <a:lnSpc>
+                <a:spcPct val="112000"/>
+              </a:lnSpc>
               <a:spcAft>
-                <a:spcPts val="700"/>
+                <a:spcPts val="1000"/>
               </a:spcAft>
             </a:pPr>
             <a:r>
-              <a:rPr sz="1800">
-                <a:solidFill>
-                  <a:srgbClr val="222222"/>
-                </a:solidFill>
-              </a:rPr>
-              <a:t>• RL is sample-starved: the slow sim affords only ~640 trial-steps, and random on/off exploration</a:t>
-            </a:r>
-          </a:p>
-          <a:p>
-            <a:pPr lvl="1">
+              <a:rPr sz="1800" b="1" i="0">
+                <a:solidFill>
+                  <a:srgbClr val="0072B2"/>
+                </a:solidFill>
+              </a:rPr>
+              <a:t>▪  </a:t>
+            </a:r>
+            <a:r>
+              <a:rPr sz="1800" b="0" i="0">
+                <a:solidFill>
+                  <a:srgbClr val="1A2233"/>
+                </a:solidFill>
+              </a:rPr>
+              <a:t>RL is sample-starved: the slow sim affords only ~640 trial-steps, and random on/off exploration</a:t>
+            </a:r>
+          </a:p>
+          <a:p>
+            <a:pPr marL="603504" indent="-274320">
+              <a:lnSpc>
+                <a:spcPct val="112000"/>
+              </a:lnSpc>
               <a:spcAft>
-                <a:spcPts val="700"/>
+                <a:spcPts val="500"/>
               </a:spcAft>
             </a:pPr>
             <a:r>
-              <a:rPr sz="1500">
-                <a:solidFill>
-                  <a:srgbClr val="666666"/>
-                </a:solidFill>
-              </a:rPr>
-              <a:t>– sleeps idle AND busy cells together -&gt; can't isolate 'sleeping THIS idle cell was the good move'.</a:t>
-            </a:r>
-          </a:p>
-          <a:p>
-            <a:pPr>
+              <a:rPr sz="1600" b="1" i="0">
+                <a:solidFill>
+                  <a:srgbClr val="009E73"/>
+                </a:solidFill>
+              </a:rPr>
+              <a:t>–  </a:t>
+            </a:r>
+            <a:r>
+              <a:rPr sz="1600" b="0" i="0">
+                <a:solidFill>
+                  <a:srgbClr val="5B6472"/>
+                </a:solidFill>
+              </a:rPr>
+              <a:t>sleeps idle AND busy cells together -&gt; can't isolate 'sleeping THIS idle cell was the good move'.</a:t>
+            </a:r>
+          </a:p>
+          <a:p>
+            <a:pPr marL="274320" indent="-274320">
+              <a:lnSpc>
+                <a:spcPct val="112000"/>
+              </a:lnSpc>
               <a:spcAft>
-                <a:spcPts val="700"/>
+                <a:spcPts val="1000"/>
               </a:spcAft>
             </a:pPr>
             <a:r>
-              <a:rPr sz="1800">
-                <a:solidFill>
-                  <a:srgbClr val="222222"/>
-                </a:solidFill>
-              </a:rPr>
-              <a:t>• The 43% 'idle-but-powered' waste is real in hindsight, but NOT free to reclaim: sleeping a</a:t>
-            </a:r>
-          </a:p>
-          <a:p>
-            <a:pPr lvl="1">
+              <a:rPr sz="1800" b="1" i="0">
+                <a:solidFill>
+                  <a:srgbClr val="0072B2"/>
+                </a:solidFill>
+              </a:rPr>
+              <a:t>▪  </a:t>
+            </a:r>
+            <a:r>
+              <a:rPr sz="1800" b="0" i="0">
+                <a:solidFill>
+                  <a:srgbClr val="1A2233"/>
+                </a:solidFill>
+              </a:rPr>
+              <a:t>The 43% 'idle-but-powered' waste is real in hindsight, but NOT free to reclaim: sleeping a</a:t>
+            </a:r>
+          </a:p>
+          <a:p>
+            <a:pPr marL="603504" indent="-274320">
+              <a:lnSpc>
+                <a:spcPct val="112000"/>
+              </a:lnSpc>
               <a:spcAft>
-                <a:spcPts val="700"/>
+                <a:spcPts val="500"/>
               </a:spcAft>
             </a:pPr>
             <a:r>
-              <a:rPr sz="1500">
-                <a:solidFill>
-                  <a:srgbClr val="666666"/>
-                </a:solidFill>
-              </a:rPr>
-              <a:t>– momentarily-idle cell that's needed next causes a dropped call. The heuristic's caution is justified.</a:t>
-            </a:r>
-          </a:p>
-          <a:p>
-            <a:pPr>
+              <a:rPr sz="1600" b="1" i="0">
+                <a:solidFill>
+                  <a:srgbClr val="009E73"/>
+                </a:solidFill>
+              </a:rPr>
+              <a:t>–  </a:t>
+            </a:r>
+            <a:r>
+              <a:rPr sz="1600" b="0" i="0">
+                <a:solidFill>
+                  <a:srgbClr val="5B6472"/>
+                </a:solidFill>
+              </a:rPr>
+              <a:t>momentarily-idle cell that's needed next causes a dropped call. The heuristic's caution is justified.</a:t>
+            </a:r>
+          </a:p>
+          <a:p>
+            <a:pPr marL="274320" indent="-274320">
+              <a:lnSpc>
+                <a:spcPct val="112000"/>
+              </a:lnSpc>
               <a:spcAft>
-                <a:spcPts val="700"/>
+                <a:spcPts val="1000"/>
               </a:spcAft>
             </a:pPr>
             <a:r>
-              <a:rPr sz="1800">
-                <a:solidFill>
-                  <a:srgbClr val="222222"/>
-                </a:solidFill>
-              </a:rPr>
-              <a:t>• So it's a favourable TRADEOFF (greener + more reliable, slightly less throughput), not a clean sweep.</a:t>
+              <a:rPr sz="1800" b="1" i="0">
+                <a:solidFill>
+                  <a:srgbClr val="0072B2"/>
+                </a:solidFill>
+              </a:rPr>
+              <a:t>▪  </a:t>
+            </a:r>
+            <a:r>
+              <a:rPr sz="1800" b="0" i="0">
+                <a:solidFill>
+                  <a:srgbClr val="1A2233"/>
+                </a:solidFill>
+              </a:rPr>
+              <a:t>So it's a favourable TRADEOFF (greener + more reliable, slightly less throughput), not a clean sweep.</a:t>
+            </a:r>
+          </a:p>
+        </p:txBody>
+      </p:sp>
+      <p:sp>
+        <p:nvSpPr>
+          <p:cNvPr id="8" name="Rectangle 7"/>
+          <p:cNvSpPr/>
+          <p:nvPr/>
+        </p:nvSpPr>
+        <p:spPr>
+          <a:xfrm>
+            <a:off x="640080" y="6437376"/>
+            <a:ext cx="10881360" cy="11887"/>
+          </a:xfrm>
+          <a:prstGeom prst="rect">
+            <a:avLst/>
+          </a:prstGeom>
+          <a:solidFill>
+            <a:srgbClr val="DDE4F0"/>
+          </a:solidFill>
+          <a:ln>
+            <a:noFill/>
+          </a:ln>
+        </p:spPr>
+        <p:style>
+          <a:lnRef idx="1">
+            <a:schemeClr val="accent1"/>
+          </a:lnRef>
+          <a:fillRef idx="3">
+            <a:schemeClr val="accent1"/>
+          </a:fillRef>
+          <a:effectRef idx="2">
+            <a:schemeClr val="accent1"/>
+          </a:effectRef>
+          <a:fontRef idx="minor">
+            <a:schemeClr val="lt1"/>
+          </a:fontRef>
+        </p:style>
+        <p:txBody>
+          <a:bodyPr rtlCol="0" anchor="ctr"/>
+          <a:lstStyle/>
+          <a:p>
+            <a:pPr algn="ctr"/>
+          </a:p>
+        </p:txBody>
+      </p:sp>
+      <p:sp>
+        <p:nvSpPr>
+          <p:cNvPr id="9" name="TextBox 8"/>
+          <p:cNvSpPr txBox="1"/>
+          <p:nvPr/>
+        </p:nvSpPr>
+        <p:spPr>
+          <a:xfrm>
+            <a:off x="640080" y="6455664"/>
+            <a:ext cx="7315200" cy="320040"/>
+          </a:xfrm>
+          <a:prstGeom prst="rect">
+            <a:avLst/>
+          </a:prstGeom>
+          <a:noFill/>
+        </p:spPr>
+        <p:txBody>
+          <a:bodyPr wrap="square">
+            <a:spAutoFit/>
+          </a:bodyPr>
+          <a:lstStyle/>
+          <a:p>
+            <a:r>
+              <a:rPr sz="900" b="0" i="0">
+                <a:solidFill>
+                  <a:srgbClr val="5B6472"/>
+                </a:solidFill>
+              </a:rPr>
+              <a:t>Energy-Saving RL  ·  ns-O-RAN digital twin</a:t>
+            </a:r>
+          </a:p>
+        </p:txBody>
+      </p:sp>
+      <p:sp>
+        <p:nvSpPr>
+          <p:cNvPr id="10" name="TextBox 9"/>
+          <p:cNvSpPr txBox="1"/>
+          <p:nvPr/>
+        </p:nvSpPr>
+        <p:spPr>
+          <a:xfrm>
+            <a:off x="9692640" y="6455664"/>
+            <a:ext cx="1828800" cy="320040"/>
+          </a:xfrm>
+          <a:prstGeom prst="rect">
+            <a:avLst/>
+          </a:prstGeom>
+          <a:noFill/>
+        </p:spPr>
+        <p:txBody>
+          <a:bodyPr wrap="square">
+            <a:spAutoFit/>
+          </a:bodyPr>
+          <a:lstStyle/>
+          <a:p>
+            <a:pPr algn="r"/>
+            <a:r>
+              <a:rPr sz="900" b="0" i="0">
+                <a:solidFill>
+                  <a:srgbClr val="5B6472"/>
+                </a:solidFill>
+              </a:rPr>
+              <a:t>09 / 13</a:t>
             </a:r>
           </a:p>
         </p:txBody>

--- a/energy_saving_RL_project.pptx
+++ b/energy_saving_RL_project.pptx
@@ -4749,7 +4749,7 @@
               </a:spcAft>
             </a:pPr>
             <a:r>
-              <a:rPr sz="1600" b="1" i="0">
+              <a:rPr sz="1800" b="1" i="0">
                 <a:solidFill>
                   <a:srgbClr val="0072B2"/>
                 </a:solidFill>
@@ -4757,38 +4757,20 @@
               <a:t>▪  </a:t>
             </a:r>
             <a:r>
-              <a:rPr sz="1600" b="0" i="0">
+              <a:rPr sz="1800" b="1" i="0">
                 <a:solidFill>
                   <a:srgbClr val="1A2233"/>
                 </a:solidFill>
               </a:rPr>
-              <a:t>Delivered: a realistic bursty twin, a working imitation+RL pipeline (BC 100% match, stable PPO),</a:t>
-            </a:r>
-          </a:p>
-          <a:p>
-            <a:pPr marL="603504" indent="-274320">
-              <a:lnSpc>
-                <a:spcPct val="112000"/>
-              </a:lnSpc>
-              <a:spcAft>
-                <a:spcPts val="500"/>
-              </a:spcAft>
-            </a:pPr>
-            <a:r>
-              <a:rPr sz="1400" b="1" i="0">
-                <a:solidFill>
-                  <a:srgbClr val="009E73"/>
-                </a:solidFill>
-              </a:rPr>
-              <a:t>–  </a:t>
-            </a:r>
-            <a:r>
-              <a:rPr sz="1400" b="0" i="0">
-                <a:solidFill>
-                  <a:srgbClr val="5B6472"/>
-                </a:solidFill>
-              </a:rPr>
-              <a:t>a rigorous energy-vs-QoS tradeoff, and a tunable energy-saving controller.</a:t>
+              <a:t>Delivered:</a:t>
+            </a:r>
+            <a:r>
+              <a:rPr sz="1800" b="0" i="0">
+                <a:solidFill>
+                  <a:srgbClr val="1A2233"/>
+                </a:solidFill>
+              </a:rPr>
+              <a:t> a realistic bursty twin, a working imitation+RL pipeline (BC 100% match, stable PPO), a rigorous energy-vs-QoS tradeoff, and a tunable energy-saving controller.</a:t>
             </a:r>
           </a:p>
           <a:p>
@@ -4801,7 +4783,7 @@
               </a:spcAft>
             </a:pPr>
             <a:r>
-              <a:rPr sz="1600" b="1" i="0">
+              <a:rPr sz="1800" b="1" i="0">
                 <a:solidFill>
                   <a:srgbClr val="0072B2"/>
                 </a:solidFill>
@@ -4809,38 +4791,20 @@
               <a:t>▪  </a:t>
             </a:r>
             <a:r>
-              <a:rPr sz="1600" b="0" i="0">
+              <a:rPr sz="1800" b="1" i="0">
                 <a:solidFill>
                   <a:srgbClr val="1A2233"/>
                 </a:solidFill>
               </a:rPr>
-              <a:t>RL result: with reward shaping, RL learns a greener + more-reliable operating point than the heuristic</a:t>
-            </a:r>
-          </a:p>
-          <a:p>
-            <a:pPr marL="603504" indent="-274320">
-              <a:lnSpc>
-                <a:spcPct val="112000"/>
-              </a:lnSpc>
-              <a:spcAft>
-                <a:spcPts val="500"/>
-              </a:spcAft>
-            </a:pPr>
-            <a:r>
-              <a:rPr sz="1400" b="1" i="0">
-                <a:solidFill>
-                  <a:srgbClr val="009E73"/>
-                </a:solidFill>
-              </a:rPr>
-              <a:t>–  </a:t>
-            </a:r>
-            <a:r>
-              <a:rPr sz="1400" b="0" i="0">
-                <a:solidFill>
-                  <a:srgbClr val="5B6472"/>
-                </a:solidFill>
-              </a:rPr>
-              <a:t>- better on energy AND dropped-calls, slightly lower throughput: a favourable, honest tradeoff.</a:t>
+              <a:t>RL result:</a:t>
+            </a:r>
+            <a:r>
+              <a:rPr sz="1800" b="0" i="0">
+                <a:solidFill>
+                  <a:srgbClr val="1A2233"/>
+                </a:solidFill>
+              </a:rPr>
+              <a:t> with reward shaping, RL learns a greener + more-reliable operating point than the heuristic - better on energy AND dropped-calls, slightly lower throughput: a favourable, honest tradeoff.</a:t>
             </a:r>
           </a:p>
           <a:p>
@@ -4853,7 +4817,7 @@
               </a:spcAft>
             </a:pPr>
             <a:r>
-              <a:rPr sz="1600" b="1" i="0">
+              <a:rPr sz="1800" b="1" i="0">
                 <a:solidFill>
                   <a:srgbClr val="0072B2"/>
                 </a:solidFill>
@@ -4861,38 +4825,20 @@
               <a:t>▪  </a:t>
             </a:r>
             <a:r>
-              <a:rPr sz="1600" b="0" i="0">
+              <a:rPr sz="1800" b="1" i="0">
                 <a:solidFill>
                   <a:srgbClr val="1A2233"/>
                 </a:solidFill>
               </a:rPr>
-              <a:t>It does not STRICTLY beat a strong heuristic on all three axes - the real blocker is the slow</a:t>
-            </a:r>
-          </a:p>
-          <a:p>
-            <a:pPr marL="603504" indent="-274320">
-              <a:lnSpc>
-                <a:spcPct val="112000"/>
-              </a:lnSpc>
-              <a:spcAft>
-                <a:spcPts val="500"/>
-              </a:spcAft>
-            </a:pPr>
-            <a:r>
-              <a:rPr sz="1400" b="1" i="0">
-                <a:solidFill>
-                  <a:srgbClr val="009E73"/>
-                </a:solidFill>
-              </a:rPr>
-              <a:t>–  </a:t>
-            </a:r>
-            <a:r>
-              <a:rPr sz="1400" b="0" i="0">
-                <a:solidFill>
-                  <a:srgbClr val="5B6472"/>
-                </a:solidFill>
-              </a:rPr>
-              <a:t>simulator's tiny sample budget (~640 RL trial-steps), too little to out-tune a good heuristic.</a:t>
+              <a:t>It does not STRICTLY beat</a:t>
+            </a:r>
+            <a:r>
+              <a:rPr sz="1800" b="0" i="0">
+                <a:solidFill>
+                  <a:srgbClr val="1A2233"/>
+                </a:solidFill>
+              </a:rPr>
+              <a:t> a strong heuristic on all three axes - the real blocker is the slow simulator's tiny sample budget (~640 RL trial-steps), too little to out-tune a good heuristic.</a:t>
             </a:r>
           </a:p>
           <a:p>
@@ -4905,7 +4851,7 @@
               </a:spcAft>
             </a:pPr>
             <a:r>
-              <a:rPr sz="1600" b="1" i="0">
+              <a:rPr sz="1800" b="1" i="0">
                 <a:solidFill>
                   <a:srgbClr val="0072B2"/>
                 </a:solidFill>
@@ -4913,38 +4859,20 @@
               <a:t>▪  </a:t>
             </a:r>
             <a:r>
-              <a:rPr sz="1600" b="0" i="0">
+              <a:rPr sz="1800" b="1" i="0">
                 <a:solidFill>
                   <a:srgbClr val="1A2233"/>
                 </a:solidFill>
               </a:rPr>
-              <a:t>Next steps: (1) sample-efficient RL - offline RL on logged data, or a fast learned surrogate of the</a:t>
-            </a:r>
-          </a:p>
-          <a:p>
-            <a:pPr marL="603504" indent="-274320">
-              <a:lnSpc>
-                <a:spcPct val="112000"/>
-              </a:lnSpc>
-              <a:spcAft>
-                <a:spcPts val="500"/>
-              </a:spcAft>
-            </a:pPr>
-            <a:r>
-              <a:rPr sz="1400" b="1" i="0">
-                <a:solidFill>
-                  <a:srgbClr val="009E73"/>
-                </a:solidFill>
-              </a:rPr>
-              <a:t>–  </a:t>
-            </a:r>
-            <a:r>
-              <a:rPr sz="1400" b="0" i="0">
-                <a:solidFill>
-                  <a:srgbClr val="5B6472"/>
-                </a:solidFill>
-              </a:rPr>
-              <a:t>sim - to escape that budget;  (2) richer / larger network scenarios;  (3) ship the tunable controller.</a:t>
+              <a:t>Next steps:</a:t>
+            </a:r>
+            <a:r>
+              <a:rPr sz="1800" b="0" i="0">
+                <a:solidFill>
+                  <a:srgbClr val="1A2233"/>
+                </a:solidFill>
+              </a:rPr>
+              <a:t> (1) sample-efficient RL - offline RL on logged data, or a fast learned surrogate of the sim - to escape that budget;  (2) richer / larger network scenarios;  (3) ship the tunable controller.</a:t>
             </a:r>
           </a:p>
         </p:txBody>
@@ -5395,33 +5323,7 @@
                   <a:srgbClr val="1A2233"/>
                 </a:solidFill>
               </a:rPr>
-              <a:t>Docs (self-contained): OVERVIEW.md (how it all works), RESULTS.md (findings &amp; numbers),</a:t>
-            </a:r>
-          </a:p>
-          <a:p>
-            <a:pPr marL="603504" indent="-274320">
-              <a:lnSpc>
-                <a:spcPct val="112000"/>
-              </a:lnSpc>
-              <a:spcAft>
-                <a:spcPts val="500"/>
-              </a:spcAft>
-            </a:pPr>
-            <a:r>
-              <a:rPr sz="1600" b="1" i="0">
-                <a:solidFill>
-                  <a:srgbClr val="009E73"/>
-                </a:solidFill>
-              </a:rPr>
-              <a:t>–  </a:t>
-            </a:r>
-            <a:r>
-              <a:rPr sz="1600" b="0" i="0">
-                <a:solidFill>
-                  <a:srgbClr val="5B6472"/>
-                </a:solidFill>
-              </a:rPr>
-              <a:t>REPRODUCE.md (build &amp; run from scratch), CONTEXT.md (full-journey primer).</a:t>
+              <a:t>Docs (self-contained): OVERVIEW.md (how it all works), RESULTS.md (findings &amp; numbers), REPRODUCE.md (build &amp; run from scratch), CONTEXT.md (full-journey primer).</a:t>
             </a:r>
           </a:p>
           <a:p>
@@ -5924,33 +5826,7 @@
                   <a:srgbClr val="1A2233"/>
                 </a:solidFill>
               </a:rPr>
-              <a:t>Company goal: a reinforcement-learning (RL) controller that beats the hand-coded heuristic on the</a:t>
-            </a:r>
-          </a:p>
-          <a:p>
-            <a:pPr marL="603504" indent="-274320">
-              <a:lnSpc>
-                <a:spcPct val="112000"/>
-              </a:lnSpc>
-              <a:spcAft>
-                <a:spcPts val="500"/>
-              </a:spcAft>
-            </a:pPr>
-            <a:r>
-              <a:rPr sz="1600" b="1" i="0">
-                <a:solidFill>
-                  <a:srgbClr val="009E73"/>
-                </a:solidFill>
-              </a:rPr>
-              <a:t>–  </a:t>
-            </a:r>
-            <a:r>
-              <a:rPr sz="1600" b="0" i="0">
-                <a:solidFill>
-                  <a:srgbClr val="5B6472"/>
-                </a:solidFill>
-              </a:rPr>
-              <a:t>energy-vs-QoS tradeoff — more energy saved without hurting throughput or reliability.</a:t>
+              <a:t>Company goal: a reinforcement-learning (RL) controller that beats the hand-coded heuristic on the energy-vs-QoS tradeoff — more energy saved without hurting throughput or reliability.</a:t>
             </a:r>
           </a:p>
         </p:txBody>
@@ -6375,33 +6251,7 @@
                   <a:srgbClr val="1A2233"/>
                 </a:solidFill>
               </a:rPr>
-              <a:t>Traffic redesigned to 3 sharp bursts per episode (+ an always-on baseline user) — so the controller</a:t>
-            </a:r>
-          </a:p>
-          <a:p>
-            <a:pPr marL="603504" indent="-274320">
-              <a:lnSpc>
-                <a:spcPct val="112000"/>
-              </a:lnSpc>
-              <a:spcAft>
-                <a:spcPts val="500"/>
-              </a:spcAft>
-            </a:pPr>
-            <a:r>
-              <a:rPr sz="1600" b="1" i="0">
-                <a:solidFill>
-                  <a:srgbClr val="009E73"/>
-                </a:solidFill>
-              </a:rPr>
-              <a:t>–  </a:t>
-            </a:r>
-            <a:r>
-              <a:rPr sz="1600" b="0" i="0">
-                <a:solidFill>
-                  <a:srgbClr val="5B6472"/>
-                </a:solidFill>
-              </a:rPr>
-              <a:t>must adapt in real time (sleep in the lulls, wake for the bursts).</a:t>
+              <a:t>Traffic redesigned to 3 sharp bursts per episode (+ an always-on baseline user) — so the controller must adapt in real time (sleep in the lulls, wake for the bursts).</a:t>
             </a:r>
           </a:p>
           <a:p>
@@ -7910,33 +7760,7 @@
                   <a:srgbClr val="1A2233"/>
                 </a:solidFill>
               </a:rPr>
-              <a:t>2)  Behaviour Cloning (+ critic warm-up) - clone the heuristic into the policy AND pre-train its value</a:t>
-            </a:r>
-          </a:p>
-          <a:p>
-            <a:pPr marL="603504" indent="-274320">
-              <a:lnSpc>
-                <a:spcPct val="112000"/>
-              </a:lnSpc>
-              <a:spcAft>
-                <a:spcPts val="500"/>
-              </a:spcAft>
-            </a:pPr>
-            <a:r>
-              <a:rPr sz="1600" b="1" i="0">
-                <a:solidFill>
-                  <a:srgbClr val="009E73"/>
-                </a:solidFill>
-              </a:rPr>
-              <a:t>–  </a:t>
-            </a:r>
-            <a:r>
-              <a:rPr sz="1600" b="0" i="0">
-                <a:solidFill>
-                  <a:srgbClr val="5B6472"/>
-                </a:solidFill>
-              </a:rPr>
-              <a:t>estimator; the warm-up fixes a classic BC-&gt;PPO collapse we hit and diagnosed.</a:t>
+              <a:t>2)  Behaviour Cloning (+ critic warm-up) - clone the heuristic into the policy AND pre-train its value estimator; the warm-up fixes a classic BC-&gt;PPO collapse we hit and diagnosed.</a:t>
             </a:r>
           </a:p>
           <a:p>
@@ -9321,33 +9145,7 @@
                   <a:srgbClr val="1A2233"/>
                 </a:solidFill>
               </a:rPr>
-              <a:t>RL is sample-starved: the slow sim affords only ~640 trial-steps, and random on/off exploration</a:t>
-            </a:r>
-          </a:p>
-          <a:p>
-            <a:pPr marL="603504" indent="-274320">
-              <a:lnSpc>
-                <a:spcPct val="112000"/>
-              </a:lnSpc>
-              <a:spcAft>
-                <a:spcPts val="500"/>
-              </a:spcAft>
-            </a:pPr>
-            <a:r>
-              <a:rPr sz="1600" b="1" i="0">
-                <a:solidFill>
-                  <a:srgbClr val="009E73"/>
-                </a:solidFill>
-              </a:rPr>
-              <a:t>–  </a:t>
-            </a:r>
-            <a:r>
-              <a:rPr sz="1600" b="0" i="0">
-                <a:solidFill>
-                  <a:srgbClr val="5B6472"/>
-                </a:solidFill>
-              </a:rPr>
-              <a:t>sleeps idle AND busy cells together -&gt; can't isolate 'sleeping THIS idle cell was the good move'.</a:t>
+              <a:t>RL is sample-starved: the slow sim affords only ~640 trial-steps, and random on/off exploration sleeps idle AND busy cells together -&gt; can't isolate 'sleeping THIS idle cell was the good move'.</a:t>
             </a:r>
           </a:p>
           <a:p>
@@ -9373,33 +9171,7 @@
                   <a:srgbClr val="1A2233"/>
                 </a:solidFill>
               </a:rPr>
-              <a:t>The 43% 'idle-but-powered' waste is real in hindsight, but NOT free to reclaim: sleeping a</a:t>
-            </a:r>
-          </a:p>
-          <a:p>
-            <a:pPr marL="603504" indent="-274320">
-              <a:lnSpc>
-                <a:spcPct val="112000"/>
-              </a:lnSpc>
-              <a:spcAft>
-                <a:spcPts val="500"/>
-              </a:spcAft>
-            </a:pPr>
-            <a:r>
-              <a:rPr sz="1600" b="1" i="0">
-                <a:solidFill>
-                  <a:srgbClr val="009E73"/>
-                </a:solidFill>
-              </a:rPr>
-              <a:t>–  </a:t>
-            </a:r>
-            <a:r>
-              <a:rPr sz="1600" b="0" i="0">
-                <a:solidFill>
-                  <a:srgbClr val="5B6472"/>
-                </a:solidFill>
-              </a:rPr>
-              <a:t>momentarily-idle cell that's needed next causes a dropped call. The heuristic's caution is justified.</a:t>
+              <a:t>The 43% 'idle-but-powered' waste is real in hindsight, but NOT free to reclaim: sleeping a momentarily-idle cell that's needed next causes a dropped call. The heuristic's caution is justified.</a:t>
             </a:r>
           </a:p>
           <a:p>
